--- a/docs/posupos-sales/posupos-teian.pptx
+++ b/docs/posupos-sales/posupos-teian.pptx
@@ -17,9 +17,15 @@
     <p:sldId id="265" r:id="rId11"/>
     <p:sldId id="266" r:id="rId12"/>
     <p:sldId id="267" r:id="rId13"/>
+    <p:sldId id="268" r:id="rId14"/>
+    <p:sldId id="269" r:id="rId15"/>
+    <p:sldId id="270" r:id="rId16"/>
+    <p:sldId id="271" r:id="rId17"/>
+    <p:sldId id="272" r:id="rId18"/>
+    <p:sldId id="273" r:id="rId19"/>
   </p:sldIdLst>
   <p:notesMasterIdLst>
-    <p:notesMasterId r:id="rId14"/>
+    <p:notesMasterId r:id="rId20"/>
   </p:notesMasterIdLst>
   <p:sldSz cx="12192000" cy="6858000"/>
   <p:notesSz cx="6858000" cy="12192000"/>
@@ -689,7 +695,7 @@
           <a:p>
             <a:r>
               <a:rPr lang="en-US" dirty="0"/>
-              <a:t>クロージング。「まず1か月、次の応募者にURLを送ってみませんか？」と提案する。</a:t>
+              <a:t/>
             </a:r>
             <a:endParaRPr lang="en-US" dirty="0"/>
           </a:p>
@@ -801,6 +807,534 @@
             <a:fld id="{F7021451-1387-4CA6-816F-3879F97B5CBC}" type="slidenum">
               <a:rPr lang="en-US"/>
               <a:t>12</a:t>
+            </a:fld>
+            <a:endParaRPr lang="en-US"/>
+          </a:p>
+        </p:txBody>
+      </p:sp>
+    </p:spTree>
+    <p:extLst>
+      <p:ext uri="{BB962C8B-B14F-4D97-AF65-F5344CB8AC3E}">
+        <p14:creationId xmlns:p14="http://schemas.microsoft.com/office/powerpoint/2010/main" val="1024086991"/>
+      </p:ext>
+    </p:extLst>
+  </p:cSld>
+  <p:clrMapOvr>
+    <a:masterClrMapping/>
+  </p:clrMapOvr>
+</p:notes>
+</file>
+
+<file path=ppt/notesSlides/notesSlide13.xml><?xml version="1.0" encoding="utf-8"?>
+<p:notes xmlns:a="http://schemas.openxmlformats.org/drawingml/2006/main" xmlns:r="http://schemas.openxmlformats.org/officeDocument/2006/relationships" xmlns:p="http://schemas.openxmlformats.org/presentationml/2006/main">
+  <p:cSld>
+    <p:spTree>
+      <p:nvGrpSpPr>
+        <p:cNvPr id="1" name=""/>
+        <p:cNvGrpSpPr/>
+        <p:nvPr/>
+      </p:nvGrpSpPr>
+      <p:grpSpPr>
+        <a:xfrm>
+          <a:off x="0" y="0"/>
+          <a:ext cx="0" cy="0"/>
+          <a:chOff x="0" y="0"/>
+          <a:chExt cx="0" cy="0"/>
+        </a:xfrm>
+      </p:grpSpPr>
+      <p:sp>
+        <p:nvSpPr>
+          <p:cNvPr id="2" name="Slide Image Placeholder 1"/>
+          <p:cNvSpPr>
+            <a:spLocks noGrp="1" noRot="1" noChangeAspect="1"/>
+          </p:cNvSpPr>
+          <p:nvPr>
+            <p:ph type="sldImg"/>
+          </p:nvPr>
+        </p:nvSpPr>
+        <p:spPr/>
+      </p:sp>
+      <p:sp>
+        <p:nvSpPr>
+          <p:cNvPr id="3" name="Notes Placeholder 2"/>
+          <p:cNvSpPr>
+            <a:spLocks noGrp="1"/>
+          </p:cNvSpPr>
+          <p:nvPr>
+            <p:ph type="body" idx="1"/>
+          </p:nvPr>
+        </p:nvSpPr>
+        <p:spPr/>
+        <p:txBody>
+          <a:bodyPr/>
+          <a:lstStyle/>
+          <a:p>
+            <a:r>
+              <a:rPr lang="en-US" dirty="0"/>
+              <a:t/>
+            </a:r>
+            <a:endParaRPr lang="en-US" dirty="0"/>
+          </a:p>
+        </p:txBody>
+      </p:sp>
+      <p:sp>
+        <p:nvSpPr>
+          <p:cNvPr id="4" name="Slide Number Placeholder 3"/>
+          <p:cNvSpPr>
+            <a:spLocks noGrp="1"/>
+          </p:cNvSpPr>
+          <p:nvPr>
+            <p:ph type="sldNum" sz="quarter" idx="10"/>
+          </p:nvPr>
+        </p:nvSpPr>
+        <p:spPr/>
+        <p:txBody>
+          <a:bodyPr/>
+          <a:lstStyle/>
+          <a:p>
+            <a:fld id="{F7021451-1387-4CA6-816F-3879F97B5CBC}" type="slidenum">
+              <a:rPr lang="en-US"/>
+              <a:t>13</a:t>
+            </a:fld>
+            <a:endParaRPr lang="en-US"/>
+          </a:p>
+        </p:txBody>
+      </p:sp>
+    </p:spTree>
+    <p:extLst>
+      <p:ext uri="{BB962C8B-B14F-4D97-AF65-F5344CB8AC3E}">
+        <p14:creationId xmlns:p14="http://schemas.microsoft.com/office/powerpoint/2010/main" val="1024086991"/>
+      </p:ext>
+    </p:extLst>
+  </p:cSld>
+  <p:clrMapOvr>
+    <a:masterClrMapping/>
+  </p:clrMapOvr>
+</p:notes>
+</file>
+
+<file path=ppt/notesSlides/notesSlide14.xml><?xml version="1.0" encoding="utf-8"?>
+<p:notes xmlns:a="http://schemas.openxmlformats.org/drawingml/2006/main" xmlns:r="http://schemas.openxmlformats.org/officeDocument/2006/relationships" xmlns:p="http://schemas.openxmlformats.org/presentationml/2006/main">
+  <p:cSld>
+    <p:spTree>
+      <p:nvGrpSpPr>
+        <p:cNvPr id="1" name=""/>
+        <p:cNvGrpSpPr/>
+        <p:nvPr/>
+      </p:nvGrpSpPr>
+      <p:grpSpPr>
+        <a:xfrm>
+          <a:off x="0" y="0"/>
+          <a:ext cx="0" cy="0"/>
+          <a:chOff x="0" y="0"/>
+          <a:chExt cx="0" cy="0"/>
+        </a:xfrm>
+      </p:grpSpPr>
+      <p:sp>
+        <p:nvSpPr>
+          <p:cNvPr id="2" name="Slide Image Placeholder 1"/>
+          <p:cNvSpPr>
+            <a:spLocks noGrp="1" noRot="1" noChangeAspect="1"/>
+          </p:cNvSpPr>
+          <p:nvPr>
+            <p:ph type="sldImg"/>
+          </p:nvPr>
+        </p:nvSpPr>
+        <p:spPr/>
+      </p:sp>
+      <p:sp>
+        <p:nvSpPr>
+          <p:cNvPr id="3" name="Notes Placeholder 2"/>
+          <p:cNvSpPr>
+            <a:spLocks noGrp="1"/>
+          </p:cNvSpPr>
+          <p:nvPr>
+            <p:ph type="body" idx="1"/>
+          </p:nvPr>
+        </p:nvSpPr>
+        <p:spPr/>
+        <p:txBody>
+          <a:bodyPr/>
+          <a:lstStyle/>
+          <a:p>
+            <a:r>
+              <a:rPr lang="en-US" dirty="0"/>
+              <a:t/>
+            </a:r>
+            <a:endParaRPr lang="en-US" dirty="0"/>
+          </a:p>
+        </p:txBody>
+      </p:sp>
+      <p:sp>
+        <p:nvSpPr>
+          <p:cNvPr id="4" name="Slide Number Placeholder 3"/>
+          <p:cNvSpPr>
+            <a:spLocks noGrp="1"/>
+          </p:cNvSpPr>
+          <p:nvPr>
+            <p:ph type="sldNum" sz="quarter" idx="10"/>
+          </p:nvPr>
+        </p:nvSpPr>
+        <p:spPr/>
+        <p:txBody>
+          <a:bodyPr/>
+          <a:lstStyle/>
+          <a:p>
+            <a:fld id="{F7021451-1387-4CA6-816F-3879F97B5CBC}" type="slidenum">
+              <a:rPr lang="en-US"/>
+              <a:t>14</a:t>
+            </a:fld>
+            <a:endParaRPr lang="en-US"/>
+          </a:p>
+        </p:txBody>
+      </p:sp>
+    </p:spTree>
+    <p:extLst>
+      <p:ext uri="{BB962C8B-B14F-4D97-AF65-F5344CB8AC3E}">
+        <p14:creationId xmlns:p14="http://schemas.microsoft.com/office/powerpoint/2010/main" val="1024086991"/>
+      </p:ext>
+    </p:extLst>
+  </p:cSld>
+  <p:clrMapOvr>
+    <a:masterClrMapping/>
+  </p:clrMapOvr>
+</p:notes>
+</file>
+
+<file path=ppt/notesSlides/notesSlide15.xml><?xml version="1.0" encoding="utf-8"?>
+<p:notes xmlns:a="http://schemas.openxmlformats.org/drawingml/2006/main" xmlns:r="http://schemas.openxmlformats.org/officeDocument/2006/relationships" xmlns:p="http://schemas.openxmlformats.org/presentationml/2006/main">
+  <p:cSld>
+    <p:spTree>
+      <p:nvGrpSpPr>
+        <p:cNvPr id="1" name=""/>
+        <p:cNvGrpSpPr/>
+        <p:nvPr/>
+      </p:nvGrpSpPr>
+      <p:grpSpPr>
+        <a:xfrm>
+          <a:off x="0" y="0"/>
+          <a:ext cx="0" cy="0"/>
+          <a:chOff x="0" y="0"/>
+          <a:chExt cx="0" cy="0"/>
+        </a:xfrm>
+      </p:grpSpPr>
+      <p:sp>
+        <p:nvSpPr>
+          <p:cNvPr id="2" name="Slide Image Placeholder 1"/>
+          <p:cNvSpPr>
+            <a:spLocks noGrp="1" noRot="1" noChangeAspect="1"/>
+          </p:cNvSpPr>
+          <p:nvPr>
+            <p:ph type="sldImg"/>
+          </p:nvPr>
+        </p:nvSpPr>
+        <p:spPr/>
+      </p:sp>
+      <p:sp>
+        <p:nvSpPr>
+          <p:cNvPr id="3" name="Notes Placeholder 2"/>
+          <p:cNvSpPr>
+            <a:spLocks noGrp="1"/>
+          </p:cNvSpPr>
+          <p:nvPr>
+            <p:ph type="body" idx="1"/>
+          </p:nvPr>
+        </p:nvSpPr>
+        <p:spPr/>
+        <p:txBody>
+          <a:bodyPr/>
+          <a:lstStyle/>
+          <a:p>
+            <a:r>
+              <a:rPr lang="en-US" dirty="0"/>
+              <a:t/>
+            </a:r>
+            <a:endParaRPr lang="en-US" dirty="0"/>
+          </a:p>
+        </p:txBody>
+      </p:sp>
+      <p:sp>
+        <p:nvSpPr>
+          <p:cNvPr id="4" name="Slide Number Placeholder 3"/>
+          <p:cNvSpPr>
+            <a:spLocks noGrp="1"/>
+          </p:cNvSpPr>
+          <p:nvPr>
+            <p:ph type="sldNum" sz="quarter" idx="10"/>
+          </p:nvPr>
+        </p:nvSpPr>
+        <p:spPr/>
+        <p:txBody>
+          <a:bodyPr/>
+          <a:lstStyle/>
+          <a:p>
+            <a:fld id="{F7021451-1387-4CA6-816F-3879F97B5CBC}" type="slidenum">
+              <a:rPr lang="en-US"/>
+              <a:t>15</a:t>
+            </a:fld>
+            <a:endParaRPr lang="en-US"/>
+          </a:p>
+        </p:txBody>
+      </p:sp>
+    </p:spTree>
+    <p:extLst>
+      <p:ext uri="{BB962C8B-B14F-4D97-AF65-F5344CB8AC3E}">
+        <p14:creationId xmlns:p14="http://schemas.microsoft.com/office/powerpoint/2010/main" val="1024086991"/>
+      </p:ext>
+    </p:extLst>
+  </p:cSld>
+  <p:clrMapOvr>
+    <a:masterClrMapping/>
+  </p:clrMapOvr>
+</p:notes>
+</file>
+
+<file path=ppt/notesSlides/notesSlide16.xml><?xml version="1.0" encoding="utf-8"?>
+<p:notes xmlns:a="http://schemas.openxmlformats.org/drawingml/2006/main" xmlns:r="http://schemas.openxmlformats.org/officeDocument/2006/relationships" xmlns:p="http://schemas.openxmlformats.org/presentationml/2006/main">
+  <p:cSld>
+    <p:spTree>
+      <p:nvGrpSpPr>
+        <p:cNvPr id="1" name=""/>
+        <p:cNvGrpSpPr/>
+        <p:nvPr/>
+      </p:nvGrpSpPr>
+      <p:grpSpPr>
+        <a:xfrm>
+          <a:off x="0" y="0"/>
+          <a:ext cx="0" cy="0"/>
+          <a:chOff x="0" y="0"/>
+          <a:chExt cx="0" cy="0"/>
+        </a:xfrm>
+      </p:grpSpPr>
+      <p:sp>
+        <p:nvSpPr>
+          <p:cNvPr id="2" name="Slide Image Placeholder 1"/>
+          <p:cNvSpPr>
+            <a:spLocks noGrp="1" noRot="1" noChangeAspect="1"/>
+          </p:cNvSpPr>
+          <p:nvPr>
+            <p:ph type="sldImg"/>
+          </p:nvPr>
+        </p:nvSpPr>
+        <p:spPr/>
+      </p:sp>
+      <p:sp>
+        <p:nvSpPr>
+          <p:cNvPr id="3" name="Notes Placeholder 2"/>
+          <p:cNvSpPr>
+            <a:spLocks noGrp="1"/>
+          </p:cNvSpPr>
+          <p:nvPr>
+            <p:ph type="body" idx="1"/>
+          </p:nvPr>
+        </p:nvSpPr>
+        <p:spPr/>
+        <p:txBody>
+          <a:bodyPr/>
+          <a:lstStyle/>
+          <a:p>
+            <a:r>
+              <a:rPr lang="en-US" dirty="0"/>
+              <a:t/>
+            </a:r>
+            <a:endParaRPr lang="en-US" dirty="0"/>
+          </a:p>
+        </p:txBody>
+      </p:sp>
+      <p:sp>
+        <p:nvSpPr>
+          <p:cNvPr id="4" name="Slide Number Placeholder 3"/>
+          <p:cNvSpPr>
+            <a:spLocks noGrp="1"/>
+          </p:cNvSpPr>
+          <p:nvPr>
+            <p:ph type="sldNum" sz="quarter" idx="10"/>
+          </p:nvPr>
+        </p:nvSpPr>
+        <p:spPr/>
+        <p:txBody>
+          <a:bodyPr/>
+          <a:lstStyle/>
+          <a:p>
+            <a:fld id="{F7021451-1387-4CA6-816F-3879F97B5CBC}" type="slidenum">
+              <a:rPr lang="en-US"/>
+              <a:t>16</a:t>
+            </a:fld>
+            <a:endParaRPr lang="en-US"/>
+          </a:p>
+        </p:txBody>
+      </p:sp>
+    </p:spTree>
+    <p:extLst>
+      <p:ext uri="{BB962C8B-B14F-4D97-AF65-F5344CB8AC3E}">
+        <p14:creationId xmlns:p14="http://schemas.microsoft.com/office/powerpoint/2010/main" val="1024086991"/>
+      </p:ext>
+    </p:extLst>
+  </p:cSld>
+  <p:clrMapOvr>
+    <a:masterClrMapping/>
+  </p:clrMapOvr>
+</p:notes>
+</file>
+
+<file path=ppt/notesSlides/notesSlide17.xml><?xml version="1.0" encoding="utf-8"?>
+<p:notes xmlns:a="http://schemas.openxmlformats.org/drawingml/2006/main" xmlns:r="http://schemas.openxmlformats.org/officeDocument/2006/relationships" xmlns:p="http://schemas.openxmlformats.org/presentationml/2006/main">
+  <p:cSld>
+    <p:spTree>
+      <p:nvGrpSpPr>
+        <p:cNvPr id="1" name=""/>
+        <p:cNvGrpSpPr/>
+        <p:nvPr/>
+      </p:nvGrpSpPr>
+      <p:grpSpPr>
+        <a:xfrm>
+          <a:off x="0" y="0"/>
+          <a:ext cx="0" cy="0"/>
+          <a:chOff x="0" y="0"/>
+          <a:chExt cx="0" cy="0"/>
+        </a:xfrm>
+      </p:grpSpPr>
+      <p:sp>
+        <p:nvSpPr>
+          <p:cNvPr id="2" name="Slide Image Placeholder 1"/>
+          <p:cNvSpPr>
+            <a:spLocks noGrp="1" noRot="1" noChangeAspect="1"/>
+          </p:cNvSpPr>
+          <p:nvPr>
+            <p:ph type="sldImg"/>
+          </p:nvPr>
+        </p:nvSpPr>
+        <p:spPr/>
+      </p:sp>
+      <p:sp>
+        <p:nvSpPr>
+          <p:cNvPr id="3" name="Notes Placeholder 2"/>
+          <p:cNvSpPr>
+            <a:spLocks noGrp="1"/>
+          </p:cNvSpPr>
+          <p:nvPr>
+            <p:ph type="body" idx="1"/>
+          </p:nvPr>
+        </p:nvSpPr>
+        <p:spPr/>
+        <p:txBody>
+          <a:bodyPr/>
+          <a:lstStyle/>
+          <a:p>
+            <a:r>
+              <a:rPr lang="en-US" dirty="0"/>
+              <a:t>クロージング。「まず1か月、次の応募者にURLを送ってみませんか？」と提案する。</a:t>
+            </a:r>
+            <a:endParaRPr lang="en-US" dirty="0"/>
+          </a:p>
+        </p:txBody>
+      </p:sp>
+      <p:sp>
+        <p:nvSpPr>
+          <p:cNvPr id="4" name="Slide Number Placeholder 3"/>
+          <p:cNvSpPr>
+            <a:spLocks noGrp="1"/>
+          </p:cNvSpPr>
+          <p:nvPr>
+            <p:ph type="sldNum" sz="quarter" idx="10"/>
+          </p:nvPr>
+        </p:nvSpPr>
+        <p:spPr/>
+        <p:txBody>
+          <a:bodyPr/>
+          <a:lstStyle/>
+          <a:p>
+            <a:fld id="{F7021451-1387-4CA6-816F-3879F97B5CBC}" type="slidenum">
+              <a:rPr lang="en-US"/>
+              <a:t>17</a:t>
+            </a:fld>
+            <a:endParaRPr lang="en-US"/>
+          </a:p>
+        </p:txBody>
+      </p:sp>
+    </p:spTree>
+    <p:extLst>
+      <p:ext uri="{BB962C8B-B14F-4D97-AF65-F5344CB8AC3E}">
+        <p14:creationId xmlns:p14="http://schemas.microsoft.com/office/powerpoint/2010/main" val="1024086991"/>
+      </p:ext>
+    </p:extLst>
+  </p:cSld>
+  <p:clrMapOvr>
+    <a:masterClrMapping/>
+  </p:clrMapOvr>
+</p:notes>
+</file>
+
+<file path=ppt/notesSlides/notesSlide18.xml><?xml version="1.0" encoding="utf-8"?>
+<p:notes xmlns:a="http://schemas.openxmlformats.org/drawingml/2006/main" xmlns:r="http://schemas.openxmlformats.org/officeDocument/2006/relationships" xmlns:p="http://schemas.openxmlformats.org/presentationml/2006/main">
+  <p:cSld>
+    <p:spTree>
+      <p:nvGrpSpPr>
+        <p:cNvPr id="1" name=""/>
+        <p:cNvGrpSpPr/>
+        <p:nvPr/>
+      </p:nvGrpSpPr>
+      <p:grpSpPr>
+        <a:xfrm>
+          <a:off x="0" y="0"/>
+          <a:ext cx="0" cy="0"/>
+          <a:chOff x="0" y="0"/>
+          <a:chExt cx="0" cy="0"/>
+        </a:xfrm>
+      </p:grpSpPr>
+      <p:sp>
+        <p:nvSpPr>
+          <p:cNvPr id="2" name="Slide Image Placeholder 1"/>
+          <p:cNvSpPr>
+            <a:spLocks noGrp="1" noRot="1" noChangeAspect="1"/>
+          </p:cNvSpPr>
+          <p:nvPr>
+            <p:ph type="sldImg"/>
+          </p:nvPr>
+        </p:nvSpPr>
+        <p:spPr/>
+      </p:sp>
+      <p:sp>
+        <p:nvSpPr>
+          <p:cNvPr id="3" name="Notes Placeholder 2"/>
+          <p:cNvSpPr>
+            <a:spLocks noGrp="1"/>
+          </p:cNvSpPr>
+          <p:nvPr>
+            <p:ph type="body" idx="1"/>
+          </p:nvPr>
+        </p:nvSpPr>
+        <p:spPr/>
+        <p:txBody>
+          <a:bodyPr/>
+          <a:lstStyle/>
+          <a:p>
+            <a:r>
+              <a:rPr lang="en-US" dirty="0"/>
+              <a:t/>
+            </a:r>
+            <a:endParaRPr lang="en-US" dirty="0"/>
+          </a:p>
+        </p:txBody>
+      </p:sp>
+      <p:sp>
+        <p:nvSpPr>
+          <p:cNvPr id="4" name="Slide Number Placeholder 3"/>
+          <p:cNvSpPr>
+            <a:spLocks noGrp="1"/>
+          </p:cNvSpPr>
+          <p:nvPr>
+            <p:ph type="sldNum" sz="quarter" idx="10"/>
+          </p:nvPr>
+        </p:nvSpPr>
+        <p:spPr/>
+        <p:txBody>
+          <a:bodyPr/>
+          <a:lstStyle/>
+          <a:p>
+            <a:fld id="{F7021451-1387-4CA6-816F-3879F97B5CBC}" type="slidenum">
+              <a:rPr lang="en-US"/>
+              <a:t>18</a:t>
             </a:fld>
             <a:endParaRPr lang="en-US"/>
           </a:p>
@@ -2490,7 +3024,7 @@
                 <a:ea typeface="Yu Gothic" pitchFamily="34" charset="-122"/>
                 <a:cs typeface="Yu Gothic" pitchFamily="34" charset="-120"/>
               </a:rPr>
-              <a:t>AI面接は、スタンダードの料金にふくまれています</a:t>
+              <a:t>注文から会計まで（昼のお店）</a:t>
             </a:r>
             <a:endParaRPr lang="en-US" sz="3000" dirty="0"/>
           </a:p>
@@ -2504,12 +3038,70 @@
         </p:nvSpPr>
         <p:spPr>
           <a:xfrm>
-            <a:off x="548640" y="1417320"/>
-            <a:ext cx="3520440" cy="4343400"/>
+            <a:off x="539496" y="1453896"/>
+            <a:ext cx="5687568" cy="4146572"/>
           </a:xfrm>
           <a:prstGeom prst="roundRect">
             <a:avLst>
-              <a:gd name="adj" fmla="val 3896"/>
+              <a:gd name="adj" fmla="val 2205"/>
+            </a:avLst>
+          </a:prstGeom>
+          <a:solidFill>
+            <a:srgbClr val="FFFFFF"/>
+          </a:solidFill>
+          <a:ln w="12700">
+            <a:solidFill>
+              <a:srgbClr val="DCE4F2"/>
+            </a:solidFill>
+            <a:prstDash val="solid"/>
+          </a:ln>
+          <a:effectLst>
+            <a:outerShdw sx="100000" sy="100000" kx="0" ky="0" algn="bl" rotWithShape="0" blurRad="127000" dist="50800" dir="5400000">
+              <a:srgbClr val="13234A">
+                <a:alpha val="15000"/>
+              </a:srgbClr>
+            </a:outerShdw>
+          </a:effectLst>
+        </p:spPr>
+      </p:sp>
+      <p:pic>
+        <p:nvPicPr>
+          <p:cNvPr id="4" name="Image 0" descr="/tmp/claude-0/-home-user-GACHICAREERAI/b3a26714-2895-56f0-b4c8-705422406677/scratchpad/deck/m-floor.png">    </p:cNvPr>
+          <p:cNvPicPr>
+            <a:picLocks noChangeAspect="1"/>
+          </p:cNvPicPr>
+          <p:nvPr/>
+        </p:nvPicPr>
+        <p:blipFill>
+          <a:blip r:embed="rId1"/>
+          <a:stretch>
+            <a:fillRect/>
+          </a:stretch>
+        </p:blipFill>
+        <p:spPr>
+          <a:xfrm>
+            <a:off x="594360" y="1508760"/>
+            <a:ext cx="5577840" cy="4036844"/>
+          </a:xfrm>
+          <a:prstGeom prst="rect">
+            <a:avLst/>
+          </a:prstGeom>
+        </p:spPr>
+      </p:pic>
+      <p:sp>
+        <p:nvSpPr>
+          <p:cNvPr id="5" name="Shape 2"/>
+          <p:cNvSpPr/>
+          <p:nvPr/>
+        </p:nvSpPr>
+        <p:spPr>
+          <a:xfrm>
+            <a:off x="6537960" y="1463040"/>
+            <a:ext cx="5074920" cy="914400"/>
+          </a:xfrm>
+          <a:prstGeom prst="roundRect">
+            <a:avLst>
+              <a:gd name="adj" fmla="val 15000"/>
             </a:avLst>
           </a:prstGeom>
           <a:solidFill>
@@ -2525,304 +3117,17 @@
       </p:sp>
       <p:sp>
         <p:nvSpPr>
-          <p:cNvPr id="4" name="Text 2"/>
-          <p:cNvSpPr txBox="1"/>
-          <p:nvPr/>
-        </p:nvSpPr>
-        <p:spPr>
-          <a:xfrm>
-            <a:off x="822960" y="1737360"/>
-            <a:ext cx="2971800" cy="457200"/>
-          </a:xfrm>
-          <a:prstGeom prst="rect">
-            <a:avLst/>
-          </a:prstGeom>
-          <a:noFill/>
-          <a:ln/>
-        </p:spPr>
-        <p:txBody>
-          <a:bodyPr wrap="square" lIns="0" tIns="0" rIns="0" bIns="0" rtlCol="0" anchor="t"/>
-          <a:lstStyle/>
-          <a:p>
-            <a:pPr indent="0" marL="0">
-              <a:buNone/>
-            </a:pPr>
-            <a:r>
-              <a:rPr lang="en-US" sz="2000" b="1" dirty="0">
-                <a:solidFill>
-                  <a:srgbClr val="13234A"/>
-                </a:solidFill>
-                <a:latin typeface="Yu Gothic" pitchFamily="34" charset="0"/>
-                <a:ea typeface="Yu Gothic" pitchFamily="34" charset="-122"/>
-                <a:cs typeface="Yu Gothic" pitchFamily="34" charset="-120"/>
-              </a:rPr>
-              <a:t>ライトプラン</a:t>
-            </a:r>
-            <a:endParaRPr lang="en-US" sz="2000" dirty="0"/>
-          </a:p>
-        </p:txBody>
-      </p:sp>
-      <p:sp>
-        <p:nvSpPr>
-          <p:cNvPr id="5" name="Text 3"/>
-          <p:cNvSpPr txBox="1"/>
-          <p:nvPr/>
-        </p:nvSpPr>
-        <p:spPr>
-          <a:xfrm>
-            <a:off x="822960" y="2194560"/>
-            <a:ext cx="2971800" cy="320040"/>
-          </a:xfrm>
-          <a:prstGeom prst="rect">
-            <a:avLst/>
-          </a:prstGeom>
-          <a:noFill/>
-          <a:ln/>
-        </p:spPr>
-        <p:txBody>
-          <a:bodyPr wrap="square" lIns="0" tIns="0" rIns="0" bIns="0" rtlCol="0" anchor="t"/>
-          <a:lstStyle/>
-          <a:p>
-            <a:pPr indent="0" marL="0">
-              <a:buNone/>
-            </a:pPr>
-            <a:r>
-              <a:rPr lang="en-US" sz="1300" dirty="0">
-                <a:solidFill>
-                  <a:srgbClr val="4A5878"/>
-                </a:solidFill>
-                <a:latin typeface="Yu Gothic" pitchFamily="34" charset="0"/>
-                <a:ea typeface="Yu Gothic" pitchFamily="34" charset="-122"/>
-                <a:cs typeface="Yu Gothic" pitchFamily="34" charset="-120"/>
-              </a:rPr>
-              <a:t>お会計と売上を、まず楽に</a:t>
-            </a:r>
-            <a:endParaRPr lang="en-US" sz="1300" dirty="0"/>
-          </a:p>
-        </p:txBody>
-      </p:sp>
-      <p:sp>
-        <p:nvSpPr>
-          <p:cNvPr id="6" name="Text 4"/>
-          <p:cNvSpPr txBox="1"/>
-          <p:nvPr/>
-        </p:nvSpPr>
-        <p:spPr>
-          <a:xfrm>
-            <a:off x="822960" y="2560320"/>
-            <a:ext cx="2971800" cy="548640"/>
-          </a:xfrm>
-          <a:prstGeom prst="rect">
-            <a:avLst/>
-          </a:prstGeom>
-          <a:noFill/>
-          <a:ln/>
-        </p:spPr>
-        <p:txBody>
-          <a:bodyPr wrap="square" lIns="0" tIns="0" rIns="0" bIns="0" rtlCol="0" anchor="ctr"/>
-          <a:lstStyle/>
-          <a:p>
-            <a:pPr indent="0" marL="0">
-              <a:buNone/>
-            </a:pPr>
-            <a:r>
-              <a:rPr lang="en-US" sz="1300" dirty="0">
-                <a:solidFill>
-                  <a:srgbClr val="13234A"/>
-                </a:solidFill>
-                <a:latin typeface="Yu Gothic" pitchFamily="34" charset="0"/>
-                <a:ea typeface="Yu Gothic" pitchFamily="34" charset="-122"/>
-                <a:cs typeface="Yu Gothic" pitchFamily="34" charset="-120"/>
-              </a:rPr>
-              <a:t>月額 </a:t>
-            </a:r>
-            <a:pPr indent="0" marL="0">
-              <a:buNone/>
-            </a:pPr>
-            <a:r>
-              <a:rPr lang="en-US" sz="2400" b="1" dirty="0">
-                <a:solidFill>
-                  <a:srgbClr val="13234A"/>
-                </a:solidFill>
-                <a:latin typeface="Yu Gothic" pitchFamily="34" charset="0"/>
-                <a:ea typeface="Yu Gothic" pitchFamily="34" charset="-122"/>
-                <a:cs typeface="Yu Gothic" pitchFamily="34" charset="-120"/>
-              </a:rPr>
-              <a:t>11,000円</a:t>
-            </a:r>
-            <a:pPr indent="0" marL="0">
-              <a:buNone/>
-            </a:pPr>
-            <a:r>
-              <a:rPr lang="en-US" sz="1100" dirty="0">
-                <a:solidFill>
-                  <a:srgbClr val="13234A"/>
-                </a:solidFill>
-                <a:latin typeface="Yu Gothic" pitchFamily="34" charset="0"/>
-                <a:ea typeface="Yu Gothic" pitchFamily="34" charset="-122"/>
-                <a:cs typeface="Yu Gothic" pitchFamily="34" charset="-120"/>
-              </a:rPr>
-              <a:t>（税込）</a:t>
-            </a:r>
-            <a:endParaRPr lang="en-US" sz="1500" dirty="0"/>
-          </a:p>
-        </p:txBody>
-      </p:sp>
-      <p:sp>
-        <p:nvSpPr>
-          <p:cNvPr id="7" name="Text 5"/>
-          <p:cNvSpPr txBox="1"/>
-          <p:nvPr/>
-        </p:nvSpPr>
-        <p:spPr>
-          <a:xfrm>
-            <a:off x="822960" y="3794760"/>
-            <a:ext cx="2971800" cy="1828800"/>
-          </a:xfrm>
-          <a:prstGeom prst="rect">
-            <a:avLst/>
-          </a:prstGeom>
-          <a:noFill/>
-          <a:ln/>
-        </p:spPr>
-        <p:txBody>
-          <a:bodyPr wrap="square" lIns="0" tIns="0" rIns="0" bIns="0" rtlCol="0" anchor="t"/>
-          <a:lstStyle/>
-          <a:p>
-            <a:pPr marL="342900" indent="-342900">
-              <a:spcAft>
-                <a:spcPts val="600"/>
-              </a:spcAft>
-              <a:buSzPct val="100000"/>
-              <a:buChar char="•"/>
-            </a:pPr>
-            <a:r>
-              <a:rPr lang="en-US" sz="1400" dirty="0">
-                <a:solidFill>
-                  <a:srgbClr val="13234A"/>
-                </a:solidFill>
-                <a:latin typeface="Yu Gothic" pitchFamily="34" charset="0"/>
-                <a:ea typeface="Yu Gothic" pitchFamily="34" charset="-122"/>
-                <a:cs typeface="Yu Gothic" pitchFamily="34" charset="-120"/>
-              </a:rPr>
-              <a:t>注文・会計・伝票</a:t>
-            </a:r>
-            <a:endParaRPr lang="en-US" sz="1400" dirty="0"/>
-          </a:p>
-          <a:p>
-            <a:pPr marL="342900" indent="-342900">
-              <a:spcAft>
-                <a:spcPts val="600"/>
-              </a:spcAft>
-              <a:buSzPct val="100000"/>
-              <a:buChar char="•"/>
-            </a:pPr>
-            <a:r>
-              <a:rPr lang="en-US" sz="1400" dirty="0">
-                <a:solidFill>
-                  <a:srgbClr val="13234A"/>
-                </a:solidFill>
-                <a:latin typeface="Yu Gothic" pitchFamily="34" charset="0"/>
-                <a:ea typeface="Yu Gothic" pitchFamily="34" charset="-122"/>
-                <a:cs typeface="Yu Gothic" pitchFamily="34" charset="-120"/>
-              </a:rPr>
-              <a:t>QR注文・厨房の画面</a:t>
-            </a:r>
-            <a:endParaRPr lang="en-US" sz="1400" dirty="0"/>
-          </a:p>
-          <a:p>
-            <a:pPr marL="342900" indent="-342900">
-              <a:spcAft>
-                <a:spcPts val="600"/>
-              </a:spcAft>
-              <a:buSzPct val="100000"/>
-              <a:buChar char="•"/>
-            </a:pPr>
-            <a:r>
-              <a:rPr lang="en-US" sz="1400" dirty="0">
-                <a:solidFill>
-                  <a:srgbClr val="13234A"/>
-                </a:solidFill>
-                <a:latin typeface="Yu Gothic" pitchFamily="34" charset="0"/>
-                <a:ea typeface="Yu Gothic" pitchFamily="34" charset="-122"/>
-                <a:cs typeface="Yu Gothic" pitchFamily="34" charset="-120"/>
-              </a:rPr>
-              <a:t>ポイント・会員証</a:t>
-            </a:r>
-            <a:endParaRPr lang="en-US" sz="1400" dirty="0"/>
-          </a:p>
-          <a:p>
-            <a:pPr marL="342900" indent="-342900">
-              <a:spcAft>
-                <a:spcPts val="600"/>
-              </a:spcAft>
-              <a:buSzPct val="100000"/>
-              <a:buChar char="•"/>
-            </a:pPr>
-            <a:r>
-              <a:rPr lang="en-US" sz="1400" dirty="0">
-                <a:solidFill>
-                  <a:srgbClr val="13234A"/>
-                </a:solidFill>
-                <a:latin typeface="Yu Gothic" pitchFamily="34" charset="0"/>
-                <a:ea typeface="Yu Gothic" pitchFamily="34" charset="-122"/>
-                <a:cs typeface="Yu Gothic" pitchFamily="34" charset="-120"/>
-              </a:rPr>
-              <a:t>Square・レシート印刷</a:t>
-            </a:r>
-            <a:endParaRPr lang="en-US" sz="1400" dirty="0"/>
-          </a:p>
-        </p:txBody>
-      </p:sp>
-      <p:sp>
-        <p:nvSpPr>
-          <p:cNvPr id="8" name="Shape 6"/>
+          <p:cNvPr id="6" name="Shape 3"/>
           <p:cNvSpPr/>
           <p:nvPr/>
         </p:nvSpPr>
         <p:spPr>
           <a:xfrm>
-            <a:off x="4325112" y="1417320"/>
-            <a:ext cx="3520440" cy="4343400"/>
-          </a:xfrm>
-          <a:prstGeom prst="roundRect">
-            <a:avLst>
-              <a:gd name="adj" fmla="val 3896"/>
-            </a:avLst>
-          </a:prstGeom>
-          <a:solidFill>
-            <a:srgbClr val="FFFFFF"/>
-          </a:solidFill>
-          <a:ln w="31750">
-            <a:solidFill>
-              <a:srgbClr val="1557D6"/>
-            </a:solidFill>
-            <a:prstDash val="solid"/>
-          </a:ln>
-          <a:effectLst>
-            <a:outerShdw sx="100000" sy="100000" kx="0" ky="0" algn="bl" rotWithShape="0" blurRad="152400" dist="50800" dir="5400000">
-              <a:srgbClr val="1557D6">
-                <a:alpha val="25000"/>
-              </a:srgbClr>
-            </a:outerShdw>
-          </a:effectLst>
-        </p:spPr>
-      </p:sp>
-      <p:sp>
-        <p:nvSpPr>
-          <p:cNvPr id="9" name="Shape 7"/>
-          <p:cNvSpPr/>
-          <p:nvPr/>
-        </p:nvSpPr>
-        <p:spPr>
-          <a:xfrm>
-            <a:off x="4599432" y="1234440"/>
-            <a:ext cx="2377440" cy="384048"/>
-          </a:xfrm>
-          <a:prstGeom prst="roundRect">
-            <a:avLst>
-              <a:gd name="adj" fmla="val 50000"/>
-            </a:avLst>
+            <a:off x="6766560" y="1691640"/>
+            <a:ext cx="457200" cy="457200"/>
+          </a:xfrm>
+          <a:prstGeom prst="ellipse">
+            <a:avLst/>
           </a:prstGeom>
           <a:solidFill>
             <a:srgbClr val="1557D6"/>
@@ -2837,14 +3142,14 @@
       </p:sp>
       <p:sp>
         <p:nvSpPr>
-          <p:cNvPr id="10" name="Text 8"/>
-          <p:cNvSpPr txBox="1"/>
-          <p:nvPr/>
-        </p:nvSpPr>
-        <p:spPr>
-          <a:xfrm>
-            <a:off x="4599432" y="1234440"/>
-            <a:ext cx="2377440" cy="384048"/>
+          <p:cNvPr id="7" name="Text 4"/>
+          <p:cNvSpPr txBox="1"/>
+          <p:nvPr/>
+        </p:nvSpPr>
+        <p:spPr>
+          <a:xfrm>
+            <a:off x="6766560" y="1691640"/>
+            <a:ext cx="457200" cy="457200"/>
           </a:xfrm>
           <a:prstGeom prst="rect">
             <a:avLst/>
@@ -2860,7 +3165,7 @@
               <a:buNone/>
             </a:pPr>
             <a:r>
-              <a:rPr lang="en-US" sz="1200" b="1" dirty="0">
+              <a:rPr lang="en-US" sz="1600" b="1" dirty="0">
                 <a:solidFill>
                   <a:srgbClr val="FFFFFF"/>
                 </a:solidFill>
@@ -2868,22 +3173,22 @@
                 <a:ea typeface="Yu Gothic" pitchFamily="34" charset="-122"/>
                 <a:cs typeface="Yu Gothic" pitchFamily="34" charset="-120"/>
               </a:rPr>
-              <a:t>キャンペーン価格・おすすめ</a:t>
-            </a:r>
-            <a:endParaRPr lang="en-US" sz="1200" dirty="0"/>
-          </a:p>
-        </p:txBody>
-      </p:sp>
-      <p:sp>
-        <p:nvSpPr>
-          <p:cNvPr id="11" name="Text 9"/>
-          <p:cNvSpPr txBox="1"/>
-          <p:nvPr/>
-        </p:nvSpPr>
-        <p:spPr>
-          <a:xfrm>
-            <a:off x="4599432" y="1737360"/>
-            <a:ext cx="2971800" cy="457200"/>
+              <a:t>1</a:t>
+            </a:r>
+            <a:endParaRPr lang="en-US" sz="1600" dirty="0"/>
+          </a:p>
+        </p:txBody>
+      </p:sp>
+      <p:sp>
+        <p:nvSpPr>
+          <p:cNvPr id="8" name="Text 5"/>
+          <p:cNvSpPr txBox="1"/>
+          <p:nvPr/>
+        </p:nvSpPr>
+        <p:spPr>
+          <a:xfrm>
+            <a:off x="7406640" y="1554480"/>
+            <a:ext cx="4023360" cy="365760"/>
           </a:xfrm>
           <a:prstGeom prst="rect">
             <a:avLst/>
@@ -2899,7 +3204,7 @@
               <a:buNone/>
             </a:pPr>
             <a:r>
-              <a:rPr lang="en-US" sz="2000" b="1" dirty="0">
+              <a:rPr lang="en-US" sz="1600" b="1" dirty="0">
                 <a:solidFill>
                   <a:srgbClr val="13234A"/>
                 </a:solidFill>
@@ -2907,22 +3212,22 @@
                 <a:ea typeface="Yu Gothic" pitchFamily="34" charset="-122"/>
                 <a:cs typeface="Yu Gothic" pitchFamily="34" charset="-120"/>
               </a:rPr>
-              <a:t>スタンダードプラン</a:t>
-            </a:r>
-            <a:endParaRPr lang="en-US" sz="2000" dirty="0"/>
-          </a:p>
-        </p:txBody>
-      </p:sp>
-      <p:sp>
-        <p:nvSpPr>
-          <p:cNvPr id="12" name="Text 10"/>
-          <p:cNvSpPr txBox="1"/>
-          <p:nvPr/>
-        </p:nvSpPr>
-        <p:spPr>
-          <a:xfrm>
-            <a:off x="4599432" y="2194560"/>
-            <a:ext cx="2971800" cy="320040"/>
+              <a:t>卓を開く</a:t>
+            </a:r>
+            <a:endParaRPr lang="en-US" sz="1600" dirty="0"/>
+          </a:p>
+        </p:txBody>
+      </p:sp>
+      <p:sp>
+        <p:nvSpPr>
+          <p:cNvPr id="9" name="Text 6"/>
+          <p:cNvSpPr txBox="1"/>
+          <p:nvPr/>
+        </p:nvSpPr>
+        <p:spPr>
+          <a:xfrm>
+            <a:off x="7406640" y="1920240"/>
+            <a:ext cx="4069080" cy="411480"/>
           </a:xfrm>
           <a:prstGeom prst="rect">
             <a:avLst/>
@@ -2946,7 +3251,7 @@
                 <a:ea typeface="Yu Gothic" pitchFamily="34" charset="-122"/>
                 <a:cs typeface="Yu Gothic" pitchFamily="34" charset="-120"/>
               </a:rPr>
-              <a:t>お店の運営を、まるごと</a:t>
+              <a:t>配置図で卓を選んで人数を入れる。1階／2階のタブも</a:t>
             </a:r>
             <a:endParaRPr lang="en-US" sz="1300" dirty="0"/>
           </a:p>
@@ -2954,264 +3259,18 @@
       </p:sp>
       <p:sp>
         <p:nvSpPr>
-          <p:cNvPr id="13" name="Text 11"/>
-          <p:cNvSpPr txBox="1"/>
-          <p:nvPr/>
-        </p:nvSpPr>
-        <p:spPr>
-          <a:xfrm>
-            <a:off x="4599432" y="2514600"/>
-            <a:ext cx="2971800" cy="274320"/>
-          </a:xfrm>
-          <a:prstGeom prst="rect">
-            <a:avLst/>
-          </a:prstGeom>
-          <a:noFill/>
-          <a:ln/>
-        </p:spPr>
-        <p:txBody>
-          <a:bodyPr wrap="square" lIns="0" tIns="0" rIns="0" bIns="0" rtlCol="0" anchor="t"/>
-          <a:lstStyle/>
-          <a:p>
-            <a:pPr indent="0" marL="0">
-              <a:buNone/>
-            </a:pPr>
-            <a:r>
-              <a:rPr lang="en-US" sz="1200" dirty="0">
-                <a:solidFill>
-                  <a:srgbClr val="4A5878"/>
-                </a:solidFill>
-                <a:latin typeface="Yu Gothic" pitchFamily="34" charset="0"/>
-                <a:ea typeface="Yu Gothic" pitchFamily="34" charset="-122"/>
-                <a:cs typeface="Yu Gothic" pitchFamily="34" charset="-120"/>
-              </a:rPr>
-              <a:t>月額（税込）</a:t>
-            </a:r>
-            <a:endParaRPr lang="en-US" sz="1200" dirty="0"/>
-          </a:p>
-        </p:txBody>
-      </p:sp>
-      <p:sp>
-        <p:nvSpPr>
-          <p:cNvPr id="14" name="Text 12"/>
-          <p:cNvSpPr txBox="1"/>
-          <p:nvPr/>
-        </p:nvSpPr>
-        <p:spPr>
-          <a:xfrm>
-            <a:off x="4599432" y="2743200"/>
-            <a:ext cx="2971800" cy="685800"/>
-          </a:xfrm>
-          <a:prstGeom prst="rect">
-            <a:avLst/>
-          </a:prstGeom>
-          <a:noFill/>
-          <a:ln/>
-        </p:spPr>
-        <p:txBody>
-          <a:bodyPr wrap="square" lIns="0" tIns="0" rIns="0" bIns="0" rtlCol="0" anchor="t"/>
-          <a:lstStyle/>
-          <a:p>
-            <a:pPr indent="0" marL="0">
-              <a:lnSpc>
-                <a:spcPct val="100000"/>
-              </a:lnSpc>
-              <a:buNone/>
-            </a:pPr>
-            <a:r>
-              <a:rPr lang="en-US" sz="1900" b="1" dirty="0">
-                <a:solidFill>
-                  <a:srgbClr val="1557D6"/>
-                </a:solidFill>
-                <a:latin typeface="Yu Gothic" pitchFamily="34" charset="0"/>
-                <a:ea typeface="Yu Gothic" pitchFamily="34" charset="-122"/>
-                <a:cs typeface="Yu Gothic" pitchFamily="34" charset="-120"/>
-              </a:rPr>
-              <a:t>昼 22,000円</a:t>
-            </a:r>
-            <a:endParaRPr lang="en-US" sz="1900" dirty="0"/>
-          </a:p>
-          <a:p>
-            <a:pPr indent="0" marL="0">
-              <a:lnSpc>
-                <a:spcPct val="100000"/>
-              </a:lnSpc>
-              <a:buNone/>
-            </a:pPr>
-            <a:r>
-              <a:rPr lang="en-US" sz="1900" b="1" dirty="0">
-                <a:solidFill>
-                  <a:srgbClr val="1557D6"/>
-                </a:solidFill>
-                <a:latin typeface="Yu Gothic" pitchFamily="34" charset="0"/>
-                <a:ea typeface="Yu Gothic" pitchFamily="34" charset="-122"/>
-                <a:cs typeface="Yu Gothic" pitchFamily="34" charset="-120"/>
-              </a:rPr>
-              <a:t>夜 33,000円</a:t>
-            </a:r>
-            <a:endParaRPr lang="en-US" sz="1900" dirty="0"/>
-          </a:p>
-        </p:txBody>
-      </p:sp>
-      <p:sp>
-        <p:nvSpPr>
-          <p:cNvPr id="15" name="Text 13"/>
-          <p:cNvSpPr txBox="1"/>
-          <p:nvPr/>
-        </p:nvSpPr>
-        <p:spPr>
-          <a:xfrm>
-            <a:off x="4599432" y="3429000"/>
-            <a:ext cx="2971800" cy="274320"/>
-          </a:xfrm>
-          <a:prstGeom prst="rect">
-            <a:avLst/>
-          </a:prstGeom>
-          <a:noFill/>
-          <a:ln/>
-        </p:spPr>
-        <p:txBody>
-          <a:bodyPr wrap="square" lIns="0" tIns="0" rIns="0" bIns="0" rtlCol="0" anchor="t"/>
-          <a:lstStyle/>
-          <a:p>
-            <a:pPr indent="0" marL="0">
-              <a:buNone/>
-            </a:pPr>
-            <a:r>
-              <a:rPr lang="en-US" sz="1100" dirty="0">
-                <a:solidFill>
-                  <a:srgbClr val="4A5878"/>
-                </a:solidFill>
-                <a:latin typeface="Yu Gothic" pitchFamily="34" charset="0"/>
-                <a:ea typeface="Yu Gothic" pitchFamily="34" charset="-122"/>
-                <a:cs typeface="Yu Gothic" pitchFamily="34" charset="-120"/>
-              </a:rPr>
-              <a:t>通常 昼33,000円／夜40,000円</a:t>
-            </a:r>
-            <a:endParaRPr lang="en-US" sz="1100" dirty="0"/>
-          </a:p>
-        </p:txBody>
-      </p:sp>
-      <p:sp>
-        <p:nvSpPr>
-          <p:cNvPr id="16" name="Text 14"/>
-          <p:cNvSpPr txBox="1"/>
-          <p:nvPr/>
-        </p:nvSpPr>
-        <p:spPr>
-          <a:xfrm>
-            <a:off x="4599432" y="3794760"/>
-            <a:ext cx="2971800" cy="1828800"/>
-          </a:xfrm>
-          <a:prstGeom prst="rect">
-            <a:avLst/>
-          </a:prstGeom>
-          <a:noFill/>
-          <a:ln/>
-        </p:spPr>
-        <p:txBody>
-          <a:bodyPr wrap="square" lIns="0" tIns="0" rIns="0" bIns="0" rtlCol="0" anchor="t"/>
-          <a:lstStyle/>
-          <a:p>
-            <a:pPr marL="342900" indent="-342900">
-              <a:spcAft>
-                <a:spcPts val="600"/>
-              </a:spcAft>
-              <a:buSzPct val="100000"/>
-              <a:buChar char="•"/>
-            </a:pPr>
-            <a:r>
-              <a:rPr lang="en-US" sz="1400" dirty="0">
-                <a:solidFill>
-                  <a:srgbClr val="13234A"/>
-                </a:solidFill>
-                <a:latin typeface="Yu Gothic" pitchFamily="34" charset="0"/>
-                <a:ea typeface="Yu Gothic" pitchFamily="34" charset="-122"/>
-                <a:cs typeface="Yu Gothic" pitchFamily="34" charset="-120"/>
-              </a:rPr>
-              <a:t>ライトの機能すべて</a:t>
-            </a:r>
-            <a:endParaRPr lang="en-US" sz="1400" dirty="0"/>
-          </a:p>
-          <a:p>
-            <a:pPr marL="342900" indent="-342900">
-              <a:spcAft>
-                <a:spcPts val="600"/>
-              </a:spcAft>
-              <a:buSzPct val="100000"/>
-              <a:buChar char="•"/>
-            </a:pPr>
-            <a:r>
-              <a:rPr lang="en-US" sz="1400" dirty="0">
-                <a:solidFill>
-                  <a:srgbClr val="13234A"/>
-                </a:solidFill>
-                <a:latin typeface="Yu Gothic" pitchFamily="34" charset="0"/>
-                <a:ea typeface="Yu Gothic" pitchFamily="34" charset="-122"/>
-                <a:cs typeface="Yu Gothic" pitchFamily="34" charset="-120"/>
-              </a:rPr>
-              <a:t>打刻・シフト・給料</a:t>
-            </a:r>
-            <a:endParaRPr lang="en-US" sz="1400" dirty="0"/>
-          </a:p>
-          <a:p>
-            <a:pPr marL="342900" indent="-342900">
-              <a:spcAft>
-                <a:spcPts val="600"/>
-              </a:spcAft>
-              <a:buSzPct val="100000"/>
-              <a:buChar char="•"/>
-            </a:pPr>
-            <a:r>
-              <a:rPr lang="en-US" sz="1400" dirty="0">
-                <a:solidFill>
-                  <a:srgbClr val="13234A"/>
-                </a:solidFill>
-                <a:latin typeface="Yu Gothic" pitchFamily="34" charset="0"/>
-                <a:ea typeface="Yu Gothic" pitchFamily="34" charset="-122"/>
-                <a:cs typeface="Yu Gothic" pitchFamily="34" charset="-120"/>
-              </a:rPr>
-              <a:t>顧客・クーポン・お金・日報</a:t>
-            </a:r>
-            <a:endParaRPr lang="en-US" sz="1400" dirty="0"/>
-          </a:p>
-          <a:p>
-            <a:pPr marL="342900" indent="-342900">
-              <a:spcAft>
-                <a:spcPts val="600"/>
-              </a:spcAft>
-              <a:buSzPct val="100000"/>
-              <a:buChar char="•"/>
-            </a:pPr>
-            <a:r>
-              <a:rPr lang="en-US" sz="1400" b="1" dirty="0">
-                <a:solidFill>
-                  <a:srgbClr val="1557D6"/>
-                </a:solidFill>
-                <a:latin typeface="Yu Gothic" pitchFamily="34" charset="0"/>
-                <a:ea typeface="Yu Gothic" pitchFamily="34" charset="-122"/>
-                <a:cs typeface="Yu Gothic" pitchFamily="34" charset="-120"/>
-              </a:rPr>
-              <a:t>AI面接（追加料金なし）</a:t>
-            </a:r>
-            <a:endParaRPr lang="en-US" sz="1400" dirty="0"/>
-          </a:p>
-        </p:txBody>
-      </p:sp>
-      <p:sp>
-        <p:nvSpPr>
-          <p:cNvPr id="17" name="Shape 15"/>
+          <p:cNvPr id="10" name="Shape 7"/>
           <p:cNvSpPr/>
           <p:nvPr/>
         </p:nvSpPr>
         <p:spPr>
           <a:xfrm>
-            <a:off x="8101584" y="1417320"/>
-            <a:ext cx="3520440" cy="4343400"/>
+            <a:off x="6537960" y="2542032"/>
+            <a:ext cx="5074920" cy="914400"/>
           </a:xfrm>
           <a:prstGeom prst="roundRect">
             <a:avLst>
-              <a:gd name="adj" fmla="val 3896"/>
+              <a:gd name="adj" fmla="val 15000"/>
             </a:avLst>
           </a:prstGeom>
           <a:solidFill>
@@ -3227,14 +3286,78 @@
       </p:sp>
       <p:sp>
         <p:nvSpPr>
-          <p:cNvPr id="18" name="Text 16"/>
-          <p:cNvSpPr txBox="1"/>
-          <p:nvPr/>
-        </p:nvSpPr>
-        <p:spPr>
-          <a:xfrm>
-            <a:off x="8375904" y="1737360"/>
-            <a:ext cx="2971800" cy="457200"/>
+          <p:cNvPr id="11" name="Shape 8"/>
+          <p:cNvSpPr/>
+          <p:nvPr/>
+        </p:nvSpPr>
+        <p:spPr>
+          <a:xfrm>
+            <a:off x="6766560" y="2770632"/>
+            <a:ext cx="457200" cy="457200"/>
+          </a:xfrm>
+          <a:prstGeom prst="ellipse">
+            <a:avLst/>
+          </a:prstGeom>
+          <a:solidFill>
+            <a:srgbClr val="1557D6"/>
+          </a:solidFill>
+          <a:ln w="12700">
+            <a:solidFill>
+              <a:srgbClr val="1557D6"/>
+            </a:solidFill>
+            <a:prstDash val="solid"/>
+          </a:ln>
+        </p:spPr>
+      </p:sp>
+      <p:sp>
+        <p:nvSpPr>
+          <p:cNvPr id="12" name="Text 9"/>
+          <p:cNvSpPr txBox="1"/>
+          <p:nvPr/>
+        </p:nvSpPr>
+        <p:spPr>
+          <a:xfrm>
+            <a:off x="6766560" y="2770632"/>
+            <a:ext cx="457200" cy="457200"/>
+          </a:xfrm>
+          <a:prstGeom prst="rect">
+            <a:avLst/>
+          </a:prstGeom>
+          <a:noFill/>
+          <a:ln/>
+        </p:spPr>
+        <p:txBody>
+          <a:bodyPr wrap="square" lIns="0" tIns="0" rIns="0" bIns="0" rtlCol="0" anchor="ctr"/>
+          <a:lstStyle/>
+          <a:p>
+            <a:pPr algn="ctr" indent="0" marL="0">
+              <a:buNone/>
+            </a:pPr>
+            <a:r>
+              <a:rPr lang="en-US" sz="1600" b="1" dirty="0">
+                <a:solidFill>
+                  <a:srgbClr val="FFFFFF"/>
+                </a:solidFill>
+                <a:latin typeface="Yu Gothic" pitchFamily="34" charset="0"/>
+                <a:ea typeface="Yu Gothic" pitchFamily="34" charset="-122"/>
+                <a:cs typeface="Yu Gothic" pitchFamily="34" charset="-120"/>
+              </a:rPr>
+              <a:t>2</a:t>
+            </a:r>
+            <a:endParaRPr lang="en-US" sz="1600" dirty="0"/>
+          </a:p>
+        </p:txBody>
+      </p:sp>
+      <p:sp>
+        <p:nvSpPr>
+          <p:cNvPr id="13" name="Text 10"/>
+          <p:cNvSpPr txBox="1"/>
+          <p:nvPr/>
+        </p:nvSpPr>
+        <p:spPr>
+          <a:xfrm>
+            <a:off x="7406640" y="2633472"/>
+            <a:ext cx="4023360" cy="365760"/>
           </a:xfrm>
           <a:prstGeom prst="rect">
             <a:avLst/>
@@ -3250,7 +3373,7 @@
               <a:buNone/>
             </a:pPr>
             <a:r>
-              <a:rPr lang="en-US" sz="2000" b="1" dirty="0">
+              <a:rPr lang="en-US" sz="1600" b="1" dirty="0">
                 <a:solidFill>
                   <a:srgbClr val="13234A"/>
                 </a:solidFill>
@@ -3258,22 +3381,22 @@
                 <a:ea typeface="Yu Gothic" pitchFamily="34" charset="-122"/>
                 <a:cs typeface="Yu Gothic" pitchFamily="34" charset="-120"/>
               </a:rPr>
-              <a:t>個別プラン</a:t>
-            </a:r>
-            <a:endParaRPr lang="en-US" sz="2000" dirty="0"/>
-          </a:p>
-        </p:txBody>
-      </p:sp>
-      <p:sp>
-        <p:nvSpPr>
-          <p:cNvPr id="19" name="Text 17"/>
-          <p:cNvSpPr txBox="1"/>
-          <p:nvPr/>
-        </p:nvSpPr>
-        <p:spPr>
-          <a:xfrm>
-            <a:off x="8375904" y="2194560"/>
-            <a:ext cx="2971800" cy="320040"/>
+              <a:t>注文</a:t>
+            </a:r>
+            <a:endParaRPr lang="en-US" sz="1600" dirty="0"/>
+          </a:p>
+        </p:txBody>
+      </p:sp>
+      <p:sp>
+        <p:nvSpPr>
+          <p:cNvPr id="14" name="Text 11"/>
+          <p:cNvSpPr txBox="1"/>
+          <p:nvPr/>
+        </p:nvSpPr>
+        <p:spPr>
+          <a:xfrm>
+            <a:off x="7406640" y="2999232"/>
+            <a:ext cx="4069080" cy="411480"/>
           </a:xfrm>
           <a:prstGeom prst="rect">
             <a:avLst/>
@@ -3297,7 +3420,7 @@
                 <a:ea typeface="Yu Gothic" pitchFamily="34" charset="-122"/>
                 <a:cs typeface="Yu Gothic" pitchFamily="34" charset="-120"/>
               </a:rPr>
-              <a:t>お店のやり方に合わせて</a:t>
+              <a:t>オプション・飲み放題／食べ放題・折半。注文は厨房の画面へ</a:t>
             </a:r>
             <a:endParaRPr lang="en-US" sz="1300" dirty="0"/>
           </a:p>
@@ -3305,14 +3428,66 @@
       </p:sp>
       <p:sp>
         <p:nvSpPr>
-          <p:cNvPr id="20" name="Text 18"/>
-          <p:cNvSpPr txBox="1"/>
-          <p:nvPr/>
-        </p:nvSpPr>
-        <p:spPr>
-          <a:xfrm>
-            <a:off x="8375904" y="2560320"/>
-            <a:ext cx="2971800" cy="548640"/>
+          <p:cNvPr id="15" name="Shape 12"/>
+          <p:cNvSpPr/>
+          <p:nvPr/>
+        </p:nvSpPr>
+        <p:spPr>
+          <a:xfrm>
+            <a:off x="6537960" y="3621024"/>
+            <a:ext cx="5074920" cy="914400"/>
+          </a:xfrm>
+          <a:prstGeom prst="roundRect">
+            <a:avLst>
+              <a:gd name="adj" fmla="val 15000"/>
+            </a:avLst>
+          </a:prstGeom>
+          <a:solidFill>
+            <a:srgbClr val="F2F6FD"/>
+          </a:solidFill>
+          <a:ln w="12700">
+            <a:solidFill>
+              <a:srgbClr val="F2F6FD"/>
+            </a:solidFill>
+            <a:prstDash val="solid"/>
+          </a:ln>
+        </p:spPr>
+      </p:sp>
+      <p:sp>
+        <p:nvSpPr>
+          <p:cNvPr id="16" name="Shape 13"/>
+          <p:cNvSpPr/>
+          <p:nvPr/>
+        </p:nvSpPr>
+        <p:spPr>
+          <a:xfrm>
+            <a:off x="6766560" y="3849624"/>
+            <a:ext cx="457200" cy="457200"/>
+          </a:xfrm>
+          <a:prstGeom prst="ellipse">
+            <a:avLst/>
+          </a:prstGeom>
+          <a:solidFill>
+            <a:srgbClr val="1557D6"/>
+          </a:solidFill>
+          <a:ln w="12700">
+            <a:solidFill>
+              <a:srgbClr val="1557D6"/>
+            </a:solidFill>
+            <a:prstDash val="solid"/>
+          </a:ln>
+        </p:spPr>
+      </p:sp>
+      <p:sp>
+        <p:nvSpPr>
+          <p:cNvPr id="17" name="Text 14"/>
+          <p:cNvSpPr txBox="1"/>
+          <p:nvPr/>
+        </p:nvSpPr>
+        <p:spPr>
+          <a:xfrm>
+            <a:off x="6766560" y="3849624"/>
+            <a:ext cx="457200" cy="457200"/>
           </a:xfrm>
           <a:prstGeom prst="rect">
             <a:avLst/>
@@ -3324,62 +3499,242 @@
           <a:bodyPr wrap="square" lIns="0" tIns="0" rIns="0" bIns="0" rtlCol="0" anchor="ctr"/>
           <a:lstStyle/>
           <a:p>
+            <a:pPr algn="ctr" indent="0" marL="0">
+              <a:buNone/>
+            </a:pPr>
+            <a:r>
+              <a:rPr lang="en-US" sz="1600" b="1" dirty="0">
+                <a:solidFill>
+                  <a:srgbClr val="FFFFFF"/>
+                </a:solidFill>
+                <a:latin typeface="Yu Gothic" pitchFamily="34" charset="0"/>
+                <a:ea typeface="Yu Gothic" pitchFamily="34" charset="-122"/>
+                <a:cs typeface="Yu Gothic" pitchFamily="34" charset="-120"/>
+              </a:rPr>
+              <a:t>3</a:t>
+            </a:r>
+            <a:endParaRPr lang="en-US" sz="1600" dirty="0"/>
+          </a:p>
+        </p:txBody>
+      </p:sp>
+      <p:sp>
+        <p:nvSpPr>
+          <p:cNvPr id="18" name="Text 15"/>
+          <p:cNvSpPr txBox="1"/>
+          <p:nvPr/>
+        </p:nvSpPr>
+        <p:spPr>
+          <a:xfrm>
+            <a:off x="7406640" y="3712464"/>
+            <a:ext cx="4023360" cy="365760"/>
+          </a:xfrm>
+          <a:prstGeom prst="rect">
+            <a:avLst/>
+          </a:prstGeom>
+          <a:noFill/>
+          <a:ln/>
+        </p:spPr>
+        <p:txBody>
+          <a:bodyPr wrap="square" lIns="0" tIns="0" rIns="0" bIns="0" rtlCol="0" anchor="t"/>
+          <a:lstStyle/>
+          <a:p>
+            <a:pPr indent="0" marL="0">
+              <a:buNone/>
+            </a:pPr>
+            <a:r>
+              <a:rPr lang="en-US" sz="1600" b="1" dirty="0">
+                <a:solidFill>
+                  <a:srgbClr val="13234A"/>
+                </a:solidFill>
+                <a:latin typeface="Yu Gothic" pitchFamily="34" charset="0"/>
+                <a:ea typeface="Yu Gothic" pitchFamily="34" charset="-122"/>
+                <a:cs typeface="Yu Gothic" pitchFamily="34" charset="-120"/>
+              </a:rPr>
+              <a:t>お会計</a:t>
+            </a:r>
+            <a:endParaRPr lang="en-US" sz="1600" dirty="0"/>
+          </a:p>
+        </p:txBody>
+      </p:sp>
+      <p:sp>
+        <p:nvSpPr>
+          <p:cNvPr id="19" name="Text 16"/>
+          <p:cNvSpPr txBox="1"/>
+          <p:nvPr/>
+        </p:nvSpPr>
+        <p:spPr>
+          <a:xfrm>
+            <a:off x="7406640" y="4078224"/>
+            <a:ext cx="4069080" cy="411480"/>
+          </a:xfrm>
+          <a:prstGeom prst="rect">
+            <a:avLst/>
+          </a:prstGeom>
+          <a:noFill/>
+          <a:ln/>
+        </p:spPr>
+        <p:txBody>
+          <a:bodyPr wrap="square" lIns="0" tIns="0" rIns="0" bIns="0" rtlCol="0" anchor="t"/>
+          <a:lstStyle/>
+          <a:p>
             <a:pPr indent="0" marL="0">
               <a:buNone/>
             </a:pPr>
             <a:r>
               <a:rPr lang="en-US" sz="1300" dirty="0">
                 <a:solidFill>
+                  <a:srgbClr val="4A5878"/>
+                </a:solidFill>
+                <a:latin typeface="Yu Gothic" pitchFamily="34" charset="0"/>
+                <a:ea typeface="Yu Gothic" pitchFamily="34" charset="-122"/>
+                <a:cs typeface="Yu Gothic" pitchFamily="34" charset="-120"/>
+              </a:rPr>
+              <a:t>分け払い・分けて会計・ポイント／クーポン・Square</a:t>
+            </a:r>
+            <a:endParaRPr lang="en-US" sz="1300" dirty="0"/>
+          </a:p>
+        </p:txBody>
+      </p:sp>
+      <p:sp>
+        <p:nvSpPr>
+          <p:cNvPr id="20" name="Shape 17"/>
+          <p:cNvSpPr/>
+          <p:nvPr/>
+        </p:nvSpPr>
+        <p:spPr>
+          <a:xfrm>
+            <a:off x="6537960" y="4700016"/>
+            <a:ext cx="5074920" cy="914400"/>
+          </a:xfrm>
+          <a:prstGeom prst="roundRect">
+            <a:avLst>
+              <a:gd name="adj" fmla="val 15000"/>
+            </a:avLst>
+          </a:prstGeom>
+          <a:solidFill>
+            <a:srgbClr val="F2F6FD"/>
+          </a:solidFill>
+          <a:ln w="12700">
+            <a:solidFill>
+              <a:srgbClr val="F2F6FD"/>
+            </a:solidFill>
+            <a:prstDash val="solid"/>
+          </a:ln>
+        </p:spPr>
+      </p:sp>
+      <p:sp>
+        <p:nvSpPr>
+          <p:cNvPr id="21" name="Shape 18"/>
+          <p:cNvSpPr/>
+          <p:nvPr/>
+        </p:nvSpPr>
+        <p:spPr>
+          <a:xfrm>
+            <a:off x="6766560" y="4928616"/>
+            <a:ext cx="457200" cy="457200"/>
+          </a:xfrm>
+          <a:prstGeom prst="ellipse">
+            <a:avLst/>
+          </a:prstGeom>
+          <a:solidFill>
+            <a:srgbClr val="1557D6"/>
+          </a:solidFill>
+          <a:ln w="12700">
+            <a:solidFill>
+              <a:srgbClr val="1557D6"/>
+            </a:solidFill>
+            <a:prstDash val="solid"/>
+          </a:ln>
+        </p:spPr>
+      </p:sp>
+      <p:sp>
+        <p:nvSpPr>
+          <p:cNvPr id="22" name="Text 19"/>
+          <p:cNvSpPr txBox="1"/>
+          <p:nvPr/>
+        </p:nvSpPr>
+        <p:spPr>
+          <a:xfrm>
+            <a:off x="6766560" y="4928616"/>
+            <a:ext cx="457200" cy="457200"/>
+          </a:xfrm>
+          <a:prstGeom prst="rect">
+            <a:avLst/>
+          </a:prstGeom>
+          <a:noFill/>
+          <a:ln/>
+        </p:spPr>
+        <p:txBody>
+          <a:bodyPr wrap="square" lIns="0" tIns="0" rIns="0" bIns="0" rtlCol="0" anchor="ctr"/>
+          <a:lstStyle/>
+          <a:p>
+            <a:pPr algn="ctr" indent="0" marL="0">
+              <a:buNone/>
+            </a:pPr>
+            <a:r>
+              <a:rPr lang="en-US" sz="1600" b="1" dirty="0">
+                <a:solidFill>
+                  <a:srgbClr val="FFFFFF"/>
+                </a:solidFill>
+                <a:latin typeface="Yu Gothic" pitchFamily="34" charset="0"/>
+                <a:ea typeface="Yu Gothic" pitchFamily="34" charset="-122"/>
+                <a:cs typeface="Yu Gothic" pitchFamily="34" charset="-120"/>
+              </a:rPr>
+              <a:t>4</a:t>
+            </a:r>
+            <a:endParaRPr lang="en-US" sz="1600" dirty="0"/>
+          </a:p>
+        </p:txBody>
+      </p:sp>
+      <p:sp>
+        <p:nvSpPr>
+          <p:cNvPr id="23" name="Text 20"/>
+          <p:cNvSpPr txBox="1"/>
+          <p:nvPr/>
+        </p:nvSpPr>
+        <p:spPr>
+          <a:xfrm>
+            <a:off x="7406640" y="4791456"/>
+            <a:ext cx="4023360" cy="365760"/>
+          </a:xfrm>
+          <a:prstGeom prst="rect">
+            <a:avLst/>
+          </a:prstGeom>
+          <a:noFill/>
+          <a:ln/>
+        </p:spPr>
+        <p:txBody>
+          <a:bodyPr wrap="square" lIns="0" tIns="0" rIns="0" bIns="0" rtlCol="0" anchor="t"/>
+          <a:lstStyle/>
+          <a:p>
+            <a:pPr indent="0" marL="0">
+              <a:buNone/>
+            </a:pPr>
+            <a:r>
+              <a:rPr lang="en-US" sz="1600" b="1" dirty="0">
+                <a:solidFill>
                   <a:srgbClr val="13234A"/>
                 </a:solidFill>
                 <a:latin typeface="Yu Gothic" pitchFamily="34" charset="0"/>
                 <a:ea typeface="Yu Gothic" pitchFamily="34" charset="-122"/>
                 <a:cs typeface="Yu Gothic" pitchFamily="34" charset="-120"/>
               </a:rPr>
-              <a:t>月額 </a:t>
-            </a:r>
-            <a:pPr indent="0" marL="0">
-              <a:buNone/>
-            </a:pPr>
-            <a:r>
-              <a:rPr lang="en-US" sz="2400" b="1" dirty="0">
-                <a:solidFill>
-                  <a:srgbClr val="13234A"/>
-                </a:solidFill>
-                <a:latin typeface="Yu Gothic" pitchFamily="34" charset="0"/>
-                <a:ea typeface="Yu Gothic" pitchFamily="34" charset="-122"/>
-                <a:cs typeface="Yu Gothic" pitchFamily="34" charset="-120"/>
-              </a:rPr>
-              <a:t>55,000円〜</a:t>
-            </a:r>
-            <a:pPr indent="0" marL="0">
-              <a:buNone/>
-            </a:pPr>
-            <a:r>
-              <a:rPr lang="en-US" sz="1100" dirty="0">
-                <a:solidFill>
-                  <a:srgbClr val="13234A"/>
-                </a:solidFill>
-                <a:latin typeface="Yu Gothic" pitchFamily="34" charset="0"/>
-                <a:ea typeface="Yu Gothic" pitchFamily="34" charset="-122"/>
-                <a:cs typeface="Yu Gothic" pitchFamily="34" charset="-120"/>
-              </a:rPr>
-              <a:t>（税込）</a:t>
-            </a:r>
-            <a:endParaRPr lang="en-US" sz="1500" dirty="0"/>
-          </a:p>
-        </p:txBody>
-      </p:sp>
-      <p:sp>
-        <p:nvSpPr>
-          <p:cNvPr id="21" name="Text 19"/>
-          <p:cNvSpPr txBox="1"/>
-          <p:nvPr/>
-        </p:nvSpPr>
-        <p:spPr>
-          <a:xfrm>
-            <a:off x="8375904" y="3794760"/>
-            <a:ext cx="2971800" cy="1828800"/>
+              <a:t>レシート</a:t>
+            </a:r>
+            <a:endParaRPr lang="en-US" sz="1600" dirty="0"/>
+          </a:p>
+        </p:txBody>
+      </p:sp>
+      <p:sp>
+        <p:nvSpPr>
+          <p:cNvPr id="24" name="Text 21"/>
+          <p:cNvSpPr txBox="1"/>
+          <p:nvPr/>
+        </p:nvSpPr>
+        <p:spPr>
+          <a:xfrm>
+            <a:off x="7406640" y="5157216"/>
+            <a:ext cx="4069080" cy="411480"/>
           </a:xfrm>
           <a:prstGeom prst="rect">
             <a:avLst/>
@@ -3391,94 +3746,27 @@
           <a:bodyPr wrap="square" lIns="0" tIns="0" rIns="0" bIns="0" rtlCol="0" anchor="t"/>
           <a:lstStyle/>
           <a:p>
-            <a:pPr marL="342900" indent="-342900">
-              <a:spcAft>
-                <a:spcPts val="600"/>
-              </a:spcAft>
-              <a:buSzPct val="100000"/>
-              <a:buChar char="•"/>
-            </a:pPr>
-            <a:r>
-              <a:rPr lang="en-US" sz="1400" dirty="0">
-                <a:solidFill>
-                  <a:srgbClr val="13234A"/>
-                </a:solidFill>
-                <a:latin typeface="Yu Gothic" pitchFamily="34" charset="0"/>
-                <a:ea typeface="Yu Gothic" pitchFamily="34" charset="-122"/>
-                <a:cs typeface="Yu Gothic" pitchFamily="34" charset="-120"/>
-              </a:rPr>
-              <a:t>ライト＋スタンダードの機能</a:t>
-            </a:r>
-            <a:endParaRPr lang="en-US" sz="1400" dirty="0"/>
-          </a:p>
-          <a:p>
-            <a:pPr marL="342900" indent="-342900">
-              <a:spcAft>
-                <a:spcPts val="600"/>
-              </a:spcAft>
-              <a:buSzPct val="100000"/>
-              <a:buChar char="•"/>
-            </a:pPr>
-            <a:r>
-              <a:rPr lang="en-US" sz="1400" dirty="0">
-                <a:solidFill>
-                  <a:srgbClr val="13234A"/>
-                </a:solidFill>
-                <a:latin typeface="Yu Gothic" pitchFamily="34" charset="0"/>
-                <a:ea typeface="Yu Gothic" pitchFamily="34" charset="-122"/>
-                <a:cs typeface="Yu Gothic" pitchFamily="34" charset="-120"/>
-              </a:rPr>
-              <a:t>お店独自の給料の計算</a:t>
-            </a:r>
-            <a:endParaRPr lang="en-US" sz="1400" dirty="0"/>
-          </a:p>
-          <a:p>
-            <a:pPr marL="342900" indent="-342900">
-              <a:spcAft>
-                <a:spcPts val="600"/>
-              </a:spcAft>
-              <a:buSzPct val="100000"/>
-              <a:buChar char="•"/>
-            </a:pPr>
-            <a:r>
-              <a:rPr lang="en-US" sz="1400" dirty="0">
-                <a:solidFill>
-                  <a:srgbClr val="13234A"/>
-                </a:solidFill>
-                <a:latin typeface="Yu Gothic" pitchFamily="34" charset="0"/>
-                <a:ea typeface="Yu Gothic" pitchFamily="34" charset="-122"/>
-                <a:cs typeface="Yu Gothic" pitchFamily="34" charset="-120"/>
-              </a:rPr>
-              <a:t>データの取り込み・帳票</a:t>
-            </a:r>
-            <a:endParaRPr lang="en-US" sz="1400" dirty="0"/>
-          </a:p>
-          <a:p>
-            <a:pPr marL="342900" indent="-342900">
-              <a:spcAft>
-                <a:spcPts val="600"/>
-              </a:spcAft>
-              <a:buSzPct val="100000"/>
-              <a:buChar char="•"/>
-            </a:pPr>
-            <a:r>
-              <a:rPr lang="en-US" sz="1400" b="1" dirty="0">
-                <a:solidFill>
-                  <a:srgbClr val="1557D6"/>
-                </a:solidFill>
-                <a:latin typeface="Yu Gothic" pitchFamily="34" charset="0"/>
-                <a:ea typeface="Yu Gothic" pitchFamily="34" charset="-122"/>
-                <a:cs typeface="Yu Gothic" pitchFamily="34" charset="-120"/>
-              </a:rPr>
-              <a:t>AI面接（追加料金なし）</a:t>
-            </a:r>
-            <a:endParaRPr lang="en-US" sz="1400" dirty="0"/>
-          </a:p>
-        </p:txBody>
-      </p:sp>
-      <p:sp>
-        <p:nvSpPr>
-          <p:cNvPr id="22" name="Text 20"/>
+            <a:pPr indent="0" marL="0">
+              <a:buNone/>
+            </a:pPr>
+            <a:r>
+              <a:rPr lang="en-US" sz="1300" dirty="0">
+                <a:solidFill>
+                  <a:srgbClr val="4A5878"/>
+                </a:solidFill>
+                <a:latin typeface="Yu Gothic" pitchFamily="34" charset="0"/>
+                <a:ea typeface="Yu Gothic" pitchFamily="34" charset="-122"/>
+                <a:cs typeface="Yu Gothic" pitchFamily="34" charset="-120"/>
+              </a:rPr>
+              <a:t>明細・レシート・領収書を印刷。会員番号のQRつき</a:t>
+            </a:r>
+            <a:endParaRPr lang="en-US" sz="1300" dirty="0"/>
+          </a:p>
+        </p:txBody>
+      </p:sp>
+      <p:sp>
+        <p:nvSpPr>
+          <p:cNvPr id="25" name="Text 22"/>
           <p:cNvSpPr txBox="1"/>
           <p:nvPr/>
         </p:nvSpPr>
@@ -3509,7 +3797,7 @@
                 <a:ea typeface="Yu Gothic" pitchFamily="34" charset="-122"/>
                 <a:cs typeface="Yu Gothic" pitchFamily="34" charset="-120"/>
               </a:rPr>
-              <a:t>料金は1店舗ごと・初期費用0円・1か月無料。キャンペーン期間中のお申し込みは、契約が続くかぎりキャンペーン価格のまま（予告なく終了する場合があります）。</a:t>
+              <a:t>画面は見本です（店名・数字は架空）。</a:t>
             </a:r>
             <a:endParaRPr lang="en-US" sz="1000" dirty="0"/>
           </a:p>
@@ -3623,6 +3911,4403 @@
                 <a:ea typeface="Yu Gothic" pitchFamily="34" charset="-122"/>
                 <a:cs typeface="Yu Gothic" pitchFamily="34" charset="-120"/>
               </a:rPr>
+              <a:t>お会計でできること</a:t>
+            </a:r>
+            <a:endParaRPr lang="en-US" sz="3000" dirty="0"/>
+          </a:p>
+        </p:txBody>
+      </p:sp>
+      <p:sp>
+        <p:nvSpPr>
+          <p:cNvPr id="3" name="Shape 1"/>
+          <p:cNvSpPr/>
+          <p:nvPr/>
+        </p:nvSpPr>
+        <p:spPr>
+          <a:xfrm>
+            <a:off x="539496" y="1453896"/>
+            <a:ext cx="4590288" cy="4259008"/>
+          </a:xfrm>
+          <a:prstGeom prst="roundRect">
+            <a:avLst>
+              <a:gd name="adj" fmla="val 2147"/>
+            </a:avLst>
+          </a:prstGeom>
+          <a:solidFill>
+            <a:srgbClr val="FFFFFF"/>
+          </a:solidFill>
+          <a:ln w="12700">
+            <a:solidFill>
+              <a:srgbClr val="DCE4F2"/>
+            </a:solidFill>
+            <a:prstDash val="solid"/>
+          </a:ln>
+          <a:effectLst>
+            <a:outerShdw sx="100000" sy="100000" kx="0" ky="0" algn="bl" rotWithShape="0" blurRad="127000" dist="50800" dir="5400000">
+              <a:srgbClr val="13234A">
+                <a:alpha val="15000"/>
+              </a:srgbClr>
+            </a:outerShdw>
+          </a:effectLst>
+        </p:spPr>
+      </p:sp>
+      <p:pic>
+        <p:nvPicPr>
+          <p:cNvPr id="4" name="Image 0" descr="/tmp/claude-0/-home-user-GACHICAREERAI/b3a26714-2895-56f0-b4c8-705422406677/scratchpad/deck/m-checkout.png">    </p:cNvPr>
+          <p:cNvPicPr>
+            <a:picLocks noChangeAspect="1"/>
+          </p:cNvPicPr>
+          <p:nvPr/>
+        </p:nvPicPr>
+        <p:blipFill>
+          <a:blip r:embed="rId1"/>
+          <a:stretch>
+            <a:fillRect/>
+          </a:stretch>
+        </p:blipFill>
+        <p:spPr>
+          <a:xfrm>
+            <a:off x="594360" y="1508760"/>
+            <a:ext cx="4480560" cy="4149280"/>
+          </a:xfrm>
+          <a:prstGeom prst="rect">
+            <a:avLst/>
+          </a:prstGeom>
+        </p:spPr>
+      </p:pic>
+      <p:sp>
+        <p:nvSpPr>
+          <p:cNvPr id="5" name="Shape 2"/>
+          <p:cNvSpPr/>
+          <p:nvPr/>
+        </p:nvSpPr>
+        <p:spPr>
+          <a:xfrm>
+            <a:off x="5486400" y="1463040"/>
+            <a:ext cx="2971800" cy="1325880"/>
+          </a:xfrm>
+          <a:prstGeom prst="roundRect">
+            <a:avLst>
+              <a:gd name="adj" fmla="val 10345"/>
+            </a:avLst>
+          </a:prstGeom>
+          <a:solidFill>
+            <a:srgbClr val="F2F6FD"/>
+          </a:solidFill>
+          <a:ln w="12700">
+            <a:solidFill>
+              <a:srgbClr val="F2F6FD"/>
+            </a:solidFill>
+            <a:prstDash val="solid"/>
+          </a:ln>
+        </p:spPr>
+      </p:sp>
+      <p:sp>
+        <p:nvSpPr>
+          <p:cNvPr id="6" name="Text 3"/>
+          <p:cNvSpPr txBox="1"/>
+          <p:nvPr/>
+        </p:nvSpPr>
+        <p:spPr>
+          <a:xfrm>
+            <a:off x="5760720" y="1719072"/>
+            <a:ext cx="2468880" cy="457200"/>
+          </a:xfrm>
+          <a:prstGeom prst="rect">
+            <a:avLst/>
+          </a:prstGeom>
+          <a:noFill/>
+          <a:ln/>
+        </p:spPr>
+        <p:txBody>
+          <a:bodyPr wrap="square" lIns="0" tIns="0" rIns="0" bIns="0" rtlCol="0" anchor="ctr"/>
+          <a:lstStyle/>
+          <a:p>
+            <a:pPr indent="0" marL="0">
+              <a:buNone/>
+            </a:pPr>
+            <a:r>
+              <a:rPr lang="en-US" sz="1500" b="1" dirty="0">
+                <a:solidFill>
+                  <a:srgbClr val="13234A"/>
+                </a:solidFill>
+                <a:latin typeface="Yu Gothic" pitchFamily="34" charset="0"/>
+                <a:ea typeface="Yu Gothic" pitchFamily="34" charset="-122"/>
+                <a:cs typeface="Yu Gothic" pitchFamily="34" charset="-120"/>
+              </a:rPr>
+              <a:t>分けて払う・分けて会計</a:t>
+            </a:r>
+            <a:endParaRPr lang="en-US" sz="1500" dirty="0"/>
+          </a:p>
+        </p:txBody>
+      </p:sp>
+      <p:sp>
+        <p:nvSpPr>
+          <p:cNvPr id="7" name="Text 4"/>
+          <p:cNvSpPr txBox="1"/>
+          <p:nvPr/>
+        </p:nvSpPr>
+        <p:spPr>
+          <a:xfrm>
+            <a:off x="5760720" y="2286000"/>
+            <a:ext cx="2468880" cy="365760"/>
+          </a:xfrm>
+          <a:prstGeom prst="rect">
+            <a:avLst/>
+          </a:prstGeom>
+          <a:noFill/>
+          <a:ln/>
+        </p:spPr>
+        <p:txBody>
+          <a:bodyPr wrap="square" lIns="0" tIns="0" rIns="0" bIns="0" rtlCol="0" anchor="t"/>
+          <a:lstStyle/>
+          <a:p>
+            <a:pPr indent="0" marL="0">
+              <a:lnSpc>
+                <a:spcPct val="115000"/>
+              </a:lnSpc>
+              <a:buNone/>
+            </a:pPr>
+            <a:r>
+              <a:rPr lang="en-US" sz="1250" dirty="0">
+                <a:solidFill>
+                  <a:srgbClr val="4A5878"/>
+                </a:solidFill>
+                <a:latin typeface="Yu Gothic" pitchFamily="34" charset="0"/>
+                <a:ea typeface="Yu Gothic" pitchFamily="34" charset="-122"/>
+                <a:cs typeface="Yu Gothic" pitchFamily="34" charset="-120"/>
+              </a:rPr>
+              <a:t>現金＋カードなど払い方を分けたり、1つの卓を分けて会計したり。</a:t>
+            </a:r>
+            <a:endParaRPr lang="en-US" sz="1250" dirty="0"/>
+          </a:p>
+        </p:txBody>
+      </p:sp>
+      <p:sp>
+        <p:nvSpPr>
+          <p:cNvPr id="8" name="Shape 5"/>
+          <p:cNvSpPr/>
+          <p:nvPr/>
+        </p:nvSpPr>
+        <p:spPr>
+          <a:xfrm>
+            <a:off x="8641080" y="1463040"/>
+            <a:ext cx="2971800" cy="1325880"/>
+          </a:xfrm>
+          <a:prstGeom prst="roundRect">
+            <a:avLst>
+              <a:gd name="adj" fmla="val 10345"/>
+            </a:avLst>
+          </a:prstGeom>
+          <a:solidFill>
+            <a:srgbClr val="F2F6FD"/>
+          </a:solidFill>
+          <a:ln w="12700">
+            <a:solidFill>
+              <a:srgbClr val="F2F6FD"/>
+            </a:solidFill>
+            <a:prstDash val="solid"/>
+          </a:ln>
+        </p:spPr>
+      </p:sp>
+      <p:sp>
+        <p:nvSpPr>
+          <p:cNvPr id="9" name="Text 6"/>
+          <p:cNvSpPr txBox="1"/>
+          <p:nvPr/>
+        </p:nvSpPr>
+        <p:spPr>
+          <a:xfrm>
+            <a:off x="8915400" y="1719072"/>
+            <a:ext cx="2468880" cy="457200"/>
+          </a:xfrm>
+          <a:prstGeom prst="rect">
+            <a:avLst/>
+          </a:prstGeom>
+          <a:noFill/>
+          <a:ln/>
+        </p:spPr>
+        <p:txBody>
+          <a:bodyPr wrap="square" lIns="0" tIns="0" rIns="0" bIns="0" rtlCol="0" anchor="ctr"/>
+          <a:lstStyle/>
+          <a:p>
+            <a:pPr indent="0" marL="0">
+              <a:buNone/>
+            </a:pPr>
+            <a:r>
+              <a:rPr lang="en-US" sz="1500" b="1" dirty="0">
+                <a:solidFill>
+                  <a:srgbClr val="13234A"/>
+                </a:solidFill>
+                <a:latin typeface="Yu Gothic" pitchFamily="34" charset="0"/>
+                <a:ea typeface="Yu Gothic" pitchFamily="34" charset="-122"/>
+                <a:cs typeface="Yu Gothic" pitchFamily="34" charset="-120"/>
+              </a:rPr>
+              <a:t>消費税・軽減税率</a:t>
+            </a:r>
+            <a:endParaRPr lang="en-US" sz="1500" dirty="0"/>
+          </a:p>
+        </p:txBody>
+      </p:sp>
+      <p:sp>
+        <p:nvSpPr>
+          <p:cNvPr id="10" name="Text 7"/>
+          <p:cNvSpPr txBox="1"/>
+          <p:nvPr/>
+        </p:nvSpPr>
+        <p:spPr>
+          <a:xfrm>
+            <a:off x="8915400" y="2286000"/>
+            <a:ext cx="2468880" cy="365760"/>
+          </a:xfrm>
+          <a:prstGeom prst="rect">
+            <a:avLst/>
+          </a:prstGeom>
+          <a:noFill/>
+          <a:ln/>
+        </p:spPr>
+        <p:txBody>
+          <a:bodyPr wrap="square" lIns="0" tIns="0" rIns="0" bIns="0" rtlCol="0" anchor="t"/>
+          <a:lstStyle/>
+          <a:p>
+            <a:pPr indent="0" marL="0">
+              <a:lnSpc>
+                <a:spcPct val="115000"/>
+              </a:lnSpc>
+              <a:buNone/>
+            </a:pPr>
+            <a:r>
+              <a:rPr lang="en-US" sz="1250" dirty="0">
+                <a:solidFill>
+                  <a:srgbClr val="4A5878"/>
+                </a:solidFill>
+                <a:latin typeface="Yu Gothic" pitchFamily="34" charset="0"/>
+                <a:ea typeface="Yu Gothic" pitchFamily="34" charset="-122"/>
+                <a:cs typeface="Yu Gothic" pitchFamily="34" charset="-120"/>
+              </a:rPr>
+              <a:t>店内／お持ち帰りを選んで、お持ち帰りは軽減税率で計算。</a:t>
+            </a:r>
+            <a:endParaRPr lang="en-US" sz="1250" dirty="0"/>
+          </a:p>
+        </p:txBody>
+      </p:sp>
+      <p:sp>
+        <p:nvSpPr>
+          <p:cNvPr id="11" name="Shape 8"/>
+          <p:cNvSpPr/>
+          <p:nvPr/>
+        </p:nvSpPr>
+        <p:spPr>
+          <a:xfrm>
+            <a:off x="5486400" y="2971800"/>
+            <a:ext cx="2971800" cy="1325880"/>
+          </a:xfrm>
+          <a:prstGeom prst="roundRect">
+            <a:avLst>
+              <a:gd name="adj" fmla="val 10345"/>
+            </a:avLst>
+          </a:prstGeom>
+          <a:solidFill>
+            <a:srgbClr val="F2F6FD"/>
+          </a:solidFill>
+          <a:ln w="12700">
+            <a:solidFill>
+              <a:srgbClr val="F2F6FD"/>
+            </a:solidFill>
+            <a:prstDash val="solid"/>
+          </a:ln>
+        </p:spPr>
+      </p:sp>
+      <p:sp>
+        <p:nvSpPr>
+          <p:cNvPr id="12" name="Text 9"/>
+          <p:cNvSpPr txBox="1"/>
+          <p:nvPr/>
+        </p:nvSpPr>
+        <p:spPr>
+          <a:xfrm>
+            <a:off x="5760720" y="3227832"/>
+            <a:ext cx="2468880" cy="457200"/>
+          </a:xfrm>
+          <a:prstGeom prst="rect">
+            <a:avLst/>
+          </a:prstGeom>
+          <a:noFill/>
+          <a:ln/>
+        </p:spPr>
+        <p:txBody>
+          <a:bodyPr wrap="square" lIns="0" tIns="0" rIns="0" bIns="0" rtlCol="0" anchor="ctr"/>
+          <a:lstStyle/>
+          <a:p>
+            <a:pPr indent="0" marL="0">
+              <a:buNone/>
+            </a:pPr>
+            <a:r>
+              <a:rPr lang="en-US" sz="1500" b="1" dirty="0">
+                <a:solidFill>
+                  <a:srgbClr val="13234A"/>
+                </a:solidFill>
+                <a:latin typeface="Yu Gothic" pitchFamily="34" charset="0"/>
+                <a:ea typeface="Yu Gothic" pitchFamily="34" charset="-122"/>
+                <a:cs typeface="Yu Gothic" pitchFamily="34" charset="-120"/>
+              </a:rPr>
+              <a:t>深夜料金・サービス料</a:t>
+            </a:r>
+            <a:endParaRPr lang="en-US" sz="1500" dirty="0"/>
+          </a:p>
+        </p:txBody>
+      </p:sp>
+      <p:sp>
+        <p:nvSpPr>
+          <p:cNvPr id="13" name="Text 10"/>
+          <p:cNvSpPr txBox="1"/>
+          <p:nvPr/>
+        </p:nvSpPr>
+        <p:spPr>
+          <a:xfrm>
+            <a:off x="5760720" y="3794760"/>
+            <a:ext cx="2468880" cy="365760"/>
+          </a:xfrm>
+          <a:prstGeom prst="rect">
+            <a:avLst/>
+          </a:prstGeom>
+          <a:noFill/>
+          <a:ln/>
+        </p:spPr>
+        <p:txBody>
+          <a:bodyPr wrap="square" lIns="0" tIns="0" rIns="0" bIns="0" rtlCol="0" anchor="t"/>
+          <a:lstStyle/>
+          <a:p>
+            <a:pPr indent="0" marL="0">
+              <a:lnSpc>
+                <a:spcPct val="115000"/>
+              </a:lnSpc>
+              <a:buNone/>
+            </a:pPr>
+            <a:r>
+              <a:rPr lang="en-US" sz="1250" dirty="0">
+                <a:solidFill>
+                  <a:srgbClr val="4A5878"/>
+                </a:solidFill>
+                <a:latin typeface="Yu Gothic" pitchFamily="34" charset="0"/>
+                <a:ea typeface="Yu Gothic" pitchFamily="34" charset="-122"/>
+                <a:cs typeface="Yu Gothic" pitchFamily="34" charset="-120"/>
+              </a:rPr>
+              <a:t>22時からの注文に10%など。夜はサービス料も会計でそのまま。</a:t>
+            </a:r>
+            <a:endParaRPr lang="en-US" sz="1250" dirty="0"/>
+          </a:p>
+        </p:txBody>
+      </p:sp>
+      <p:sp>
+        <p:nvSpPr>
+          <p:cNvPr id="14" name="Shape 11"/>
+          <p:cNvSpPr/>
+          <p:nvPr/>
+        </p:nvSpPr>
+        <p:spPr>
+          <a:xfrm>
+            <a:off x="8641080" y="2971800"/>
+            <a:ext cx="2971800" cy="1325880"/>
+          </a:xfrm>
+          <a:prstGeom prst="roundRect">
+            <a:avLst>
+              <a:gd name="adj" fmla="val 10345"/>
+            </a:avLst>
+          </a:prstGeom>
+          <a:solidFill>
+            <a:srgbClr val="F2F6FD"/>
+          </a:solidFill>
+          <a:ln w="12700">
+            <a:solidFill>
+              <a:srgbClr val="F2F6FD"/>
+            </a:solidFill>
+            <a:prstDash val="solid"/>
+          </a:ln>
+        </p:spPr>
+      </p:sp>
+      <p:sp>
+        <p:nvSpPr>
+          <p:cNvPr id="15" name="Text 12"/>
+          <p:cNvSpPr txBox="1"/>
+          <p:nvPr/>
+        </p:nvSpPr>
+        <p:spPr>
+          <a:xfrm>
+            <a:off x="8915400" y="3227832"/>
+            <a:ext cx="2468880" cy="457200"/>
+          </a:xfrm>
+          <a:prstGeom prst="rect">
+            <a:avLst/>
+          </a:prstGeom>
+          <a:noFill/>
+          <a:ln/>
+        </p:spPr>
+        <p:txBody>
+          <a:bodyPr wrap="square" lIns="0" tIns="0" rIns="0" bIns="0" rtlCol="0" anchor="ctr"/>
+          <a:lstStyle/>
+          <a:p>
+            <a:pPr indent="0" marL="0">
+              <a:buNone/>
+            </a:pPr>
+            <a:r>
+              <a:rPr lang="en-US" sz="1500" b="1" dirty="0">
+                <a:solidFill>
+                  <a:srgbClr val="13234A"/>
+                </a:solidFill>
+                <a:latin typeface="Yu Gothic" pitchFamily="34" charset="0"/>
+                <a:ea typeface="Yu Gothic" pitchFamily="34" charset="-122"/>
+                <a:cs typeface="Yu Gothic" pitchFamily="34" charset="-120"/>
+              </a:rPr>
+              <a:t>ポイント・クーポン</a:t>
+            </a:r>
+            <a:endParaRPr lang="en-US" sz="1500" dirty="0"/>
+          </a:p>
+        </p:txBody>
+      </p:sp>
+      <p:sp>
+        <p:nvSpPr>
+          <p:cNvPr id="16" name="Text 13"/>
+          <p:cNvSpPr txBox="1"/>
+          <p:nvPr/>
+        </p:nvSpPr>
+        <p:spPr>
+          <a:xfrm>
+            <a:off x="8915400" y="3794760"/>
+            <a:ext cx="2468880" cy="365760"/>
+          </a:xfrm>
+          <a:prstGeom prst="rect">
+            <a:avLst/>
+          </a:prstGeom>
+          <a:noFill/>
+          <a:ln/>
+        </p:spPr>
+        <p:txBody>
+          <a:bodyPr wrap="square" lIns="0" tIns="0" rIns="0" bIns="0" rtlCol="0" anchor="t"/>
+          <a:lstStyle/>
+          <a:p>
+            <a:pPr indent="0" marL="0">
+              <a:lnSpc>
+                <a:spcPct val="115000"/>
+              </a:lnSpc>
+              <a:buNone/>
+            </a:pPr>
+            <a:r>
+              <a:rPr lang="en-US" sz="1250" dirty="0">
+                <a:solidFill>
+                  <a:srgbClr val="4A5878"/>
+                </a:solidFill>
+                <a:latin typeface="Yu Gothic" pitchFamily="34" charset="0"/>
+                <a:ea typeface="Yu Gothic" pitchFamily="34" charset="-122"/>
+                <a:cs typeface="Yu Gothic" pitchFamily="34" charset="-120"/>
+              </a:rPr>
+              <a:t>会員証のQRでポイント。円引き・％引き・期間・回数のクーポン。</a:t>
+            </a:r>
+            <a:endParaRPr lang="en-US" sz="1250" dirty="0"/>
+          </a:p>
+        </p:txBody>
+      </p:sp>
+      <p:sp>
+        <p:nvSpPr>
+          <p:cNvPr id="17" name="Shape 14"/>
+          <p:cNvSpPr/>
+          <p:nvPr/>
+        </p:nvSpPr>
+        <p:spPr>
+          <a:xfrm>
+            <a:off x="5486400" y="4480560"/>
+            <a:ext cx="2971800" cy="1325880"/>
+          </a:xfrm>
+          <a:prstGeom prst="roundRect">
+            <a:avLst>
+              <a:gd name="adj" fmla="val 10345"/>
+            </a:avLst>
+          </a:prstGeom>
+          <a:solidFill>
+            <a:srgbClr val="F2F6FD"/>
+          </a:solidFill>
+          <a:ln w="12700">
+            <a:solidFill>
+              <a:srgbClr val="F2F6FD"/>
+            </a:solidFill>
+            <a:prstDash val="solid"/>
+          </a:ln>
+        </p:spPr>
+      </p:sp>
+      <p:sp>
+        <p:nvSpPr>
+          <p:cNvPr id="18" name="Text 15"/>
+          <p:cNvSpPr txBox="1"/>
+          <p:nvPr/>
+        </p:nvSpPr>
+        <p:spPr>
+          <a:xfrm>
+            <a:off x="5760720" y="4736592"/>
+            <a:ext cx="2468880" cy="457200"/>
+          </a:xfrm>
+          <a:prstGeom prst="rect">
+            <a:avLst/>
+          </a:prstGeom>
+          <a:noFill/>
+          <a:ln/>
+        </p:spPr>
+        <p:txBody>
+          <a:bodyPr wrap="square" lIns="0" tIns="0" rIns="0" bIns="0" rtlCol="0" anchor="ctr"/>
+          <a:lstStyle/>
+          <a:p>
+            <a:pPr indent="0" marL="0">
+              <a:buNone/>
+            </a:pPr>
+            <a:r>
+              <a:rPr lang="en-US" sz="1500" b="1" dirty="0">
+                <a:solidFill>
+                  <a:srgbClr val="13234A"/>
+                </a:solidFill>
+                <a:latin typeface="Yu Gothic" pitchFamily="34" charset="0"/>
+                <a:ea typeface="Yu Gothic" pitchFamily="34" charset="-122"/>
+                <a:cs typeface="Yu Gothic" pitchFamily="34" charset="-120"/>
+              </a:rPr>
+              <a:t>Square・売掛</a:t>
+            </a:r>
+            <a:endParaRPr lang="en-US" sz="1500" dirty="0"/>
+          </a:p>
+        </p:txBody>
+      </p:sp>
+      <p:sp>
+        <p:nvSpPr>
+          <p:cNvPr id="19" name="Text 16"/>
+          <p:cNvSpPr txBox="1"/>
+          <p:nvPr/>
+        </p:nvSpPr>
+        <p:spPr>
+          <a:xfrm>
+            <a:off x="5760720" y="5303520"/>
+            <a:ext cx="2468880" cy="365760"/>
+          </a:xfrm>
+          <a:prstGeom prst="rect">
+            <a:avLst/>
+          </a:prstGeom>
+          <a:noFill/>
+          <a:ln/>
+        </p:spPr>
+        <p:txBody>
+          <a:bodyPr wrap="square" lIns="0" tIns="0" rIns="0" bIns="0" rtlCol="0" anchor="t"/>
+          <a:lstStyle/>
+          <a:p>
+            <a:pPr indent="0" marL="0">
+              <a:lnSpc>
+                <a:spcPct val="115000"/>
+              </a:lnSpc>
+              <a:buNone/>
+            </a:pPr>
+            <a:r>
+              <a:rPr lang="en-US" sz="1250" dirty="0">
+                <a:solidFill>
+                  <a:srgbClr val="4A5878"/>
+                </a:solidFill>
+                <a:latin typeface="Yu Gothic" pitchFamily="34" charset="0"/>
+                <a:ea typeface="Yu Gothic" pitchFamily="34" charset="-122"/>
+                <a:cs typeface="Yu Gothic" pitchFamily="34" charset="-120"/>
+              </a:rPr>
+              <a:t>カード・交通系IC・QR決済はSquareで。夜は売掛（ツケ）も。</a:t>
+            </a:r>
+            <a:endParaRPr lang="en-US" sz="1250" dirty="0"/>
+          </a:p>
+        </p:txBody>
+      </p:sp>
+      <p:sp>
+        <p:nvSpPr>
+          <p:cNvPr id="20" name="Shape 17"/>
+          <p:cNvSpPr/>
+          <p:nvPr/>
+        </p:nvSpPr>
+        <p:spPr>
+          <a:xfrm>
+            <a:off x="8641080" y="4480560"/>
+            <a:ext cx="2971800" cy="1325880"/>
+          </a:xfrm>
+          <a:prstGeom prst="roundRect">
+            <a:avLst>
+              <a:gd name="adj" fmla="val 10345"/>
+            </a:avLst>
+          </a:prstGeom>
+          <a:solidFill>
+            <a:srgbClr val="F2F6FD"/>
+          </a:solidFill>
+          <a:ln w="12700">
+            <a:solidFill>
+              <a:srgbClr val="F2F6FD"/>
+            </a:solidFill>
+            <a:prstDash val="solid"/>
+          </a:ln>
+        </p:spPr>
+      </p:sp>
+      <p:sp>
+        <p:nvSpPr>
+          <p:cNvPr id="21" name="Text 18"/>
+          <p:cNvSpPr txBox="1"/>
+          <p:nvPr/>
+        </p:nvSpPr>
+        <p:spPr>
+          <a:xfrm>
+            <a:off x="8915400" y="4736592"/>
+            <a:ext cx="2468880" cy="457200"/>
+          </a:xfrm>
+          <a:prstGeom prst="rect">
+            <a:avLst/>
+          </a:prstGeom>
+          <a:noFill/>
+          <a:ln/>
+        </p:spPr>
+        <p:txBody>
+          <a:bodyPr wrap="square" lIns="0" tIns="0" rIns="0" bIns="0" rtlCol="0" anchor="ctr"/>
+          <a:lstStyle/>
+          <a:p>
+            <a:pPr indent="0" marL="0">
+              <a:buNone/>
+            </a:pPr>
+            <a:r>
+              <a:rPr lang="en-US" sz="1500" b="1" dirty="0">
+                <a:solidFill>
+                  <a:srgbClr val="13234A"/>
+                </a:solidFill>
+                <a:latin typeface="Yu Gothic" pitchFamily="34" charset="0"/>
+                <a:ea typeface="Yu Gothic" pitchFamily="34" charset="-122"/>
+                <a:cs typeface="Yu Gothic" pitchFamily="34" charset="-120"/>
+              </a:rPr>
+              <a:t>伝票の直しは理由つき</a:t>
+            </a:r>
+            <a:endParaRPr lang="en-US" sz="1500" dirty="0"/>
+          </a:p>
+        </p:txBody>
+      </p:sp>
+      <p:sp>
+        <p:nvSpPr>
+          <p:cNvPr id="22" name="Text 19"/>
+          <p:cNvSpPr txBox="1"/>
+          <p:nvPr/>
+        </p:nvSpPr>
+        <p:spPr>
+          <a:xfrm>
+            <a:off x="8915400" y="5303520"/>
+            <a:ext cx="2468880" cy="365760"/>
+          </a:xfrm>
+          <a:prstGeom prst="rect">
+            <a:avLst/>
+          </a:prstGeom>
+          <a:noFill/>
+          <a:ln/>
+        </p:spPr>
+        <p:txBody>
+          <a:bodyPr wrap="square" lIns="0" tIns="0" rIns="0" bIns="0" rtlCol="0" anchor="t"/>
+          <a:lstStyle/>
+          <a:p>
+            <a:pPr indent="0" marL="0">
+              <a:lnSpc>
+                <a:spcPct val="115000"/>
+              </a:lnSpc>
+              <a:buNone/>
+            </a:pPr>
+            <a:r>
+              <a:rPr lang="en-US" sz="1250" dirty="0">
+                <a:solidFill>
+                  <a:srgbClr val="4A5878"/>
+                </a:solidFill>
+                <a:latin typeface="Yu Gothic" pitchFamily="34" charset="0"/>
+                <a:ea typeface="Yu Gothic" pitchFamily="34" charset="-122"/>
+                <a:cs typeface="Yu Gothic" pitchFamily="34" charset="-120"/>
+              </a:rPr>
+              <a:t>直す・消すときは理由が必須。あとから見られます。</a:t>
+            </a:r>
+            <a:endParaRPr lang="en-US" sz="1250" dirty="0"/>
+          </a:p>
+        </p:txBody>
+      </p:sp>
+      <p:sp>
+        <p:nvSpPr>
+          <p:cNvPr id="23" name="Text 20"/>
+          <p:cNvSpPr txBox="1"/>
+          <p:nvPr/>
+        </p:nvSpPr>
+        <p:spPr>
+          <a:xfrm>
+            <a:off x="1280160" y="6272784"/>
+            <a:ext cx="8595360" cy="365760"/>
+          </a:xfrm>
+          <a:prstGeom prst="rect">
+            <a:avLst/>
+          </a:prstGeom>
+          <a:noFill/>
+          <a:ln/>
+        </p:spPr>
+        <p:txBody>
+          <a:bodyPr wrap="square" lIns="0" tIns="0" rIns="0" bIns="0" rtlCol="0" anchor="ctr"/>
+          <a:lstStyle/>
+          <a:p>
+            <a:pPr indent="0" marL="0">
+              <a:buNone/>
+            </a:pPr>
+            <a:r>
+              <a:rPr lang="en-US" sz="1000" dirty="0">
+                <a:solidFill>
+                  <a:srgbClr val="4A5878"/>
+                </a:solidFill>
+                <a:latin typeface="Yu Gothic" pitchFamily="34" charset="0"/>
+                <a:ea typeface="Yu Gothic" pitchFamily="34" charset="-122"/>
+                <a:cs typeface="Yu Gothic" pitchFamily="34" charset="-120"/>
+              </a:rPr>
+              <a:t>画面は見本です（店名・数字は架空）。</a:t>
+            </a:r>
+            <a:endParaRPr lang="en-US" sz="1000" dirty="0"/>
+          </a:p>
+        </p:txBody>
+      </p:sp>
+      <p:sp>
+        <p:nvSpPr>
+          <p:cNvPr id="25" name="Slide Number Placeholder 0"/>
+          <p:cNvSpPr>
+            <a:spLocks noGrp="1"/>
+          </p:cNvSpPr>
+          <p:nvPr>
+            <p:ph type="sldNum" sz="quarter" idx="4294967295"/>
+          </p:nvPr>
+        </p:nvSpPr>
+        <p:spPr>
+          <a:xfrm>
+            <a:off x="548640" y="6309360"/>
+            <a:ext cx="548640" cy="274320"/>
+          </a:xfrm>
+          <a:prstGeom prst="rect">
+            <a:avLst/>
+          </a:prstGeom>
+          <a:extLst>
+            <a:ext uri="{C572A759-6A51-4108-AA02-DFA0A04FC94B}">
+              <ma14:wrappingTextBoxFlag xmlns:ma14="http://schemas.microsoft.com/office/mac/drawingml/2011/main" val="0"/>
+            </a:ext>
+          </a:extLst>
+        </p:spPr>
+        <p:txBody>
+          <a:bodyPr/>
+          <a:lstStyle>
+            <a:lvl1pPr>
+              <a:defRPr sz="1000">
+                <a:solidFill>
+                  <a:srgbClr val="4A5878"/>
+                </a:solidFill>
+                <a:latin typeface="Yu Gothic"/>
+                <a:ea typeface="Yu Gothic"/>
+                <a:cs typeface="Yu Gothic"/>
+              </a:defRPr>
+            </a:lvl1pPr>
+          </a:lstStyle>
+          <a:p>
+            <a:pPr algn="l"/>
+            <a:fld id="{F7021451-1387-4CA6-816F-3879F97B5CBC}" type="slidenum">
+              <a:rPr b="0" lang="en-US"/>
+              <a:t>11</a:t>
+            </a:fld>
+            <a:endParaRPr lang="en-US"/>
+          </a:p>
+        </p:txBody>
+      </p:sp>
+    </p:spTree>
+  </p:cSld>
+  <p:clrMapOvr>
+    <a:masterClrMapping/>
+  </p:clrMapOvr>
+</p:sld>
+</file>
+
+<file path=ppt/slides/slide12.xml><?xml version="1.0" encoding="utf-8"?>
+<p:sld xmlns:a="http://schemas.openxmlformats.org/drawingml/2006/main" xmlns:r="http://schemas.openxmlformats.org/officeDocument/2006/relationships" xmlns:p="http://schemas.openxmlformats.org/presentationml/2006/main">
+  <p:cSld name="Slide 12">
+    <p:spTree>
+      <p:nvGrpSpPr>
+        <p:cNvPr id="1" name=""/>
+        <p:cNvGrpSpPr/>
+        <p:nvPr/>
+      </p:nvGrpSpPr>
+      <p:grpSpPr>
+        <a:xfrm>
+          <a:off x="0" y="0"/>
+          <a:ext cx="0" cy="0"/>
+          <a:chOff x="0" y="0"/>
+          <a:chExt cx="0" cy="0"/>
+        </a:xfrm>
+      </p:grpSpPr>
+      <p:sp>
+        <p:nvSpPr>
+          <p:cNvPr id="2" name="Text 0"/>
+          <p:cNvSpPr/>
+          <p:nvPr>
+            <p:ph idx="100" type="title" hasCustomPrompt="1"/>
+          </p:nvPr>
+        </p:nvSpPr>
+        <p:spPr>
+          <a:xfrm>
+            <a:off x="548640" y="365760"/>
+            <a:ext cx="11064240" cy="822960"/>
+          </a:xfrm>
+          <a:prstGeom prst="rect">
+            <a:avLst/>
+          </a:prstGeom>
+          <a:noFill/>
+          <a:ln/>
+        </p:spPr>
+        <p:txBody>
+          <a:bodyPr wrap="square" lIns="0" tIns="0" rIns="0" bIns="0" rtlCol="0" anchor="ctr"/>
+          <a:lstStyle/>
+          <a:p>
+            <a:pPr indent="0" marL="0">
+              <a:buNone/>
+            </a:pPr>
+            <a:r>
+              <a:rPr lang="en-US" sz="3000" b="1" dirty="0">
+                <a:solidFill>
+                  <a:srgbClr val="13234A"/>
+                </a:solidFill>
+                <a:latin typeface="Yu Gothic" pitchFamily="34" charset="0"/>
+                <a:ea typeface="Yu Gothic" pitchFamily="34" charset="-122"/>
+                <a:cs typeface="Yu Gothic" pitchFamily="34" charset="-120"/>
+              </a:rPr>
+              <a:t>夜のお店：伝票・延長・指名・付け回し</a:t>
+            </a:r>
+            <a:endParaRPr lang="en-US" sz="3000" dirty="0"/>
+          </a:p>
+        </p:txBody>
+      </p:sp>
+      <p:sp>
+        <p:nvSpPr>
+          <p:cNvPr id="3" name="Shape 1"/>
+          <p:cNvSpPr/>
+          <p:nvPr/>
+        </p:nvSpPr>
+        <p:spPr>
+          <a:xfrm>
+            <a:off x="539496" y="1453896"/>
+            <a:ext cx="3858768" cy="2962811"/>
+          </a:xfrm>
+          <a:prstGeom prst="roundRect">
+            <a:avLst>
+              <a:gd name="adj" fmla="val 3086"/>
+            </a:avLst>
+          </a:prstGeom>
+          <a:solidFill>
+            <a:srgbClr val="FFFFFF"/>
+          </a:solidFill>
+          <a:ln w="12700">
+            <a:solidFill>
+              <a:srgbClr val="DCE4F2"/>
+            </a:solidFill>
+            <a:prstDash val="solid"/>
+          </a:ln>
+          <a:effectLst>
+            <a:outerShdw sx="100000" sy="100000" kx="0" ky="0" algn="bl" rotWithShape="0" blurRad="127000" dist="50800" dir="5400000">
+              <a:srgbClr val="13234A">
+                <a:alpha val="15000"/>
+              </a:srgbClr>
+            </a:outerShdw>
+          </a:effectLst>
+        </p:spPr>
+      </p:sp>
+      <p:pic>
+        <p:nvPicPr>
+          <p:cNvPr id="4" name="Image 0" descr="/tmp/claude-0/-home-user-GACHICAREERAI/b3a26714-2895-56f0-b4c8-705422406677/scratchpad/deck/m-slip.png">    </p:cNvPr>
+          <p:cNvPicPr>
+            <a:picLocks noChangeAspect="1"/>
+          </p:cNvPicPr>
+          <p:nvPr/>
+        </p:nvPicPr>
+        <p:blipFill>
+          <a:blip r:embed="rId1"/>
+          <a:stretch>
+            <a:fillRect/>
+          </a:stretch>
+        </p:blipFill>
+        <p:spPr>
+          <a:xfrm>
+            <a:off x="594360" y="1508760"/>
+            <a:ext cx="3749040" cy="2853083"/>
+          </a:xfrm>
+          <a:prstGeom prst="rect">
+            <a:avLst/>
+          </a:prstGeom>
+        </p:spPr>
+      </p:pic>
+      <p:sp>
+        <p:nvSpPr>
+          <p:cNvPr id="5" name="Shape 2"/>
+          <p:cNvSpPr/>
+          <p:nvPr/>
+        </p:nvSpPr>
+        <p:spPr>
+          <a:xfrm>
+            <a:off x="4517136" y="1453896"/>
+            <a:ext cx="3355848" cy="3152278"/>
+          </a:xfrm>
+          <a:prstGeom prst="roundRect">
+            <a:avLst>
+              <a:gd name="adj" fmla="val 2901"/>
+            </a:avLst>
+          </a:prstGeom>
+          <a:solidFill>
+            <a:srgbClr val="FFFFFF"/>
+          </a:solidFill>
+          <a:ln w="12700">
+            <a:solidFill>
+              <a:srgbClr val="DCE4F2"/>
+            </a:solidFill>
+            <a:prstDash val="solid"/>
+          </a:ln>
+          <a:effectLst>
+            <a:outerShdw sx="100000" sy="100000" kx="0" ky="0" algn="bl" rotWithShape="0" blurRad="127000" dist="50800" dir="5400000">
+              <a:srgbClr val="13234A">
+                <a:alpha val="15000"/>
+              </a:srgbClr>
+            </a:outerShdw>
+          </a:effectLst>
+        </p:spPr>
+      </p:sp>
+      <p:pic>
+        <p:nvPicPr>
+          <p:cNvPr id="6" name="Image 1" descr="/tmp/claude-0/-home-user-GACHICAREERAI/b3a26714-2895-56f0-b4c8-705422406677/scratchpad/deck/m-tsukemawashi.png">    </p:cNvPr>
+          <p:cNvPicPr>
+            <a:picLocks noChangeAspect="1"/>
+          </p:cNvPicPr>
+          <p:nvPr/>
+        </p:nvPicPr>
+        <p:blipFill>
+          <a:blip r:embed="rId2"/>
+          <a:stretch>
+            <a:fillRect/>
+          </a:stretch>
+        </p:blipFill>
+        <p:spPr>
+          <a:xfrm>
+            <a:off x="4572000" y="1508760"/>
+            <a:ext cx="3246120" cy="3042550"/>
+          </a:xfrm>
+          <a:prstGeom prst="rect">
+            <a:avLst/>
+          </a:prstGeom>
+        </p:spPr>
+      </p:pic>
+      <p:sp>
+        <p:nvSpPr>
+          <p:cNvPr id="7" name="Text 3"/>
+          <p:cNvSpPr txBox="1"/>
+          <p:nvPr/>
+        </p:nvSpPr>
+        <p:spPr>
+          <a:xfrm>
+            <a:off x="8138160" y="1463040"/>
+            <a:ext cx="3474720" cy="4389120"/>
+          </a:xfrm>
+          <a:prstGeom prst="rect">
+            <a:avLst/>
+          </a:prstGeom>
+          <a:noFill/>
+          <a:ln/>
+        </p:spPr>
+        <p:txBody>
+          <a:bodyPr wrap="square" lIns="0" tIns="0" rIns="0" bIns="0" rtlCol="0" anchor="t"/>
+          <a:lstStyle/>
+          <a:p>
+            <a:pPr marL="342900" indent="-342900">
+              <a:lnSpc>
+                <a:spcPct val="110000"/>
+              </a:lnSpc>
+              <a:spcAft>
+                <a:spcPts val="700"/>
+              </a:spcAft>
+              <a:buSzPct val="100000"/>
+              <a:buChar char="•"/>
+            </a:pPr>
+            <a:r>
+              <a:rPr lang="en-US" sz="1300" b="1" dirty="0">
+                <a:solidFill>
+                  <a:srgbClr val="13234A"/>
+                </a:solidFill>
+                <a:latin typeface="Yu Gothic" pitchFamily="34" charset="0"/>
+                <a:ea typeface="Yu Gothic" pitchFamily="34" charset="-122"/>
+                <a:cs typeface="Yu Gothic" pitchFamily="34" charset="-120"/>
+              </a:rPr>
+              <a:t>ホール・延長：</a:t>
+            </a:r>
+            <a:pPr indent="0" marL="0">
+              <a:lnSpc>
+                <a:spcPct val="110000"/>
+              </a:lnSpc>
+              <a:spcAft>
+                <a:spcPts val="700"/>
+              </a:spcAft>
+              <a:buNone/>
+            </a:pPr>
+            <a:r>
+              <a:rPr lang="en-US" sz="1300" dirty="0">
+                <a:solidFill>
+                  <a:srgbClr val="4A5878"/>
+                </a:solidFill>
+                <a:latin typeface="Yu Gothic" pitchFamily="34" charset="0"/>
+                <a:ea typeface="Yu Gothic" pitchFamily="34" charset="-122"/>
+                <a:cs typeface="Yu Gothic" pitchFamily="34" charset="-120"/>
+              </a:rPr>
+              <a:t>卓ごとに人数・残り時間・合計。もうすぐ終わる卓は赤、自動延長も</a:t>
+            </a:r>
+            <a:endParaRPr lang="en-US" sz="1300" dirty="0"/>
+          </a:p>
+          <a:p>
+            <a:pPr marL="342900" indent="-342900">
+              <a:lnSpc>
+                <a:spcPct val="110000"/>
+              </a:lnSpc>
+              <a:spcAft>
+                <a:spcPts val="700"/>
+              </a:spcAft>
+              <a:buSzPct val="100000"/>
+              <a:buChar char="•"/>
+            </a:pPr>
+            <a:r>
+              <a:rPr lang="en-US" sz="1300" b="1" dirty="0">
+                <a:solidFill>
+                  <a:srgbClr val="13234A"/>
+                </a:solidFill>
+                <a:latin typeface="Yu Gothic" pitchFamily="34" charset="0"/>
+                <a:ea typeface="Yu Gothic" pitchFamily="34" charset="-122"/>
+                <a:cs typeface="Yu Gothic" pitchFamily="34" charset="-120"/>
+              </a:rPr>
+              <a:t>指名・同伴：</a:t>
+            </a:r>
+            <a:pPr indent="0" marL="0">
+              <a:lnSpc>
+                <a:spcPct val="110000"/>
+              </a:lnSpc>
+              <a:spcAft>
+                <a:spcPts val="700"/>
+              </a:spcAft>
+              <a:buNone/>
+            </a:pPr>
+            <a:r>
+              <a:rPr lang="en-US" sz="1300" dirty="0">
+                <a:solidFill>
+                  <a:srgbClr val="4A5878"/>
+                </a:solidFill>
+                <a:latin typeface="Yu Gothic" pitchFamily="34" charset="0"/>
+                <a:ea typeface="Yu Gothic" pitchFamily="34" charset="-122"/>
+                <a:cs typeface="Yu Gothic" pitchFamily="34" charset="-120"/>
+              </a:rPr>
+              <a:t>本指名・場内指名・同伴を記録。リクエストの売上は指名した子へ</a:t>
+            </a:r>
+            <a:endParaRPr lang="en-US" sz="1300" dirty="0"/>
+          </a:p>
+          <a:p>
+            <a:pPr marL="342900" indent="-342900">
+              <a:lnSpc>
+                <a:spcPct val="110000"/>
+              </a:lnSpc>
+              <a:spcAft>
+                <a:spcPts val="700"/>
+              </a:spcAft>
+              <a:buSzPct val="100000"/>
+              <a:buChar char="•"/>
+            </a:pPr>
+            <a:r>
+              <a:rPr lang="en-US" sz="1300" b="1" dirty="0">
+                <a:solidFill>
+                  <a:srgbClr val="13234A"/>
+                </a:solidFill>
+                <a:latin typeface="Yu Gothic" pitchFamily="34" charset="0"/>
+                <a:ea typeface="Yu Gothic" pitchFamily="34" charset="-122"/>
+                <a:cs typeface="Yu Gothic" pitchFamily="34" charset="-120"/>
+              </a:rPr>
+              <a:t>付け回し：</a:t>
+            </a:r>
+            <a:pPr indent="0" marL="0">
+              <a:lnSpc>
+                <a:spcPct val="110000"/>
+              </a:lnSpc>
+              <a:spcAft>
+                <a:spcPts val="700"/>
+              </a:spcAft>
+              <a:buNone/>
+            </a:pPr>
+            <a:r>
+              <a:rPr lang="en-US" sz="1300" dirty="0">
+                <a:solidFill>
+                  <a:srgbClr val="4A5878"/>
+                </a:solidFill>
+                <a:latin typeface="Yu Gothic" pitchFamily="34" charset="0"/>
+                <a:ea typeface="Yu Gothic" pitchFamily="34" charset="-122"/>
+                <a:cs typeface="Yu Gothic" pitchFamily="34" charset="-120"/>
+              </a:rPr>
+              <a:t>卓→キャスト→付け方→何分を選ぶだけ。キャストのスマホに「今の席・あと何分」</a:t>
+            </a:r>
+            <a:endParaRPr lang="en-US" sz="1300" dirty="0"/>
+          </a:p>
+          <a:p>
+            <a:pPr marL="342900" indent="-342900">
+              <a:lnSpc>
+                <a:spcPct val="110000"/>
+              </a:lnSpc>
+              <a:spcAft>
+                <a:spcPts val="700"/>
+              </a:spcAft>
+              <a:buSzPct val="100000"/>
+              <a:buChar char="•"/>
+            </a:pPr>
+            <a:r>
+              <a:rPr lang="en-US" sz="1300" b="1" dirty="0">
+                <a:solidFill>
+                  <a:srgbClr val="13234A"/>
+                </a:solidFill>
+                <a:latin typeface="Yu Gothic" pitchFamily="34" charset="0"/>
+                <a:ea typeface="Yu Gothic" pitchFamily="34" charset="-122"/>
+                <a:cs typeface="Yu Gothic" pitchFamily="34" charset="-120"/>
+              </a:rPr>
+              <a:t>伝票の内わけ：</a:t>
+            </a:r>
+            <a:pPr indent="0" marL="0">
+              <a:lnSpc>
+                <a:spcPct val="110000"/>
+              </a:lnSpc>
+              <a:spcAft>
+                <a:spcPts val="700"/>
+              </a:spcAft>
+              <a:buNone/>
+            </a:pPr>
+            <a:r>
+              <a:rPr lang="en-US" sz="1300" dirty="0">
+                <a:solidFill>
+                  <a:srgbClr val="4A5878"/>
+                </a:solidFill>
+                <a:latin typeface="Yu Gothic" pitchFamily="34" charset="0"/>
+                <a:ea typeface="Yu Gothic" pitchFamily="34" charset="-122"/>
+                <a:cs typeface="Yu Gothic" pitchFamily="34" charset="-120"/>
+              </a:rPr>
+              <a:t>お店・キャスト・利益の内わけ。直したときは理由つきで記録</a:t>
+            </a:r>
+            <a:endParaRPr lang="en-US" sz="1300" dirty="0"/>
+          </a:p>
+          <a:p>
+            <a:pPr marL="342900" indent="-342900">
+              <a:lnSpc>
+                <a:spcPct val="110000"/>
+              </a:lnSpc>
+              <a:spcAft>
+                <a:spcPts val="700"/>
+              </a:spcAft>
+              <a:buSzPct val="100000"/>
+              <a:buChar char="•"/>
+            </a:pPr>
+            <a:r>
+              <a:rPr lang="en-US" sz="1300" b="1" dirty="0">
+                <a:solidFill>
+                  <a:srgbClr val="13234A"/>
+                </a:solidFill>
+                <a:latin typeface="Yu Gothic" pitchFamily="34" charset="0"/>
+                <a:ea typeface="Yu Gothic" pitchFamily="34" charset="-122"/>
+                <a:cs typeface="Yu Gothic" pitchFamily="34" charset="-120"/>
+              </a:rPr>
+              <a:t>売掛・ボトル：</a:t>
+            </a:r>
+            <a:pPr indent="0" marL="0">
+              <a:lnSpc>
+                <a:spcPct val="110000"/>
+              </a:lnSpc>
+              <a:spcAft>
+                <a:spcPts val="700"/>
+              </a:spcAft>
+              <a:buNone/>
+            </a:pPr>
+            <a:r>
+              <a:rPr lang="en-US" sz="1300" dirty="0">
+                <a:solidFill>
+                  <a:srgbClr val="4A5878"/>
+                </a:solidFill>
+                <a:latin typeface="Yu Gothic" pitchFamily="34" charset="0"/>
+                <a:ea typeface="Yu Gothic" pitchFamily="34" charset="-122"/>
+                <a:cs typeface="Yu Gothic" pitchFamily="34" charset="-120"/>
+              </a:rPr>
+              <a:t>ツケの一覧と回収、ボトルキープの残り・期限</a:t>
+            </a:r>
+            <a:endParaRPr lang="en-US" sz="1300" dirty="0"/>
+          </a:p>
+        </p:txBody>
+      </p:sp>
+      <p:sp>
+        <p:nvSpPr>
+          <p:cNvPr id="8" name="Text 4"/>
+          <p:cNvSpPr txBox="1"/>
+          <p:nvPr/>
+        </p:nvSpPr>
+        <p:spPr>
+          <a:xfrm>
+            <a:off x="1280160" y="6272784"/>
+            <a:ext cx="8595360" cy="365760"/>
+          </a:xfrm>
+          <a:prstGeom prst="rect">
+            <a:avLst/>
+          </a:prstGeom>
+          <a:noFill/>
+          <a:ln/>
+        </p:spPr>
+        <p:txBody>
+          <a:bodyPr wrap="square" lIns="0" tIns="0" rIns="0" bIns="0" rtlCol="0" anchor="ctr"/>
+          <a:lstStyle/>
+          <a:p>
+            <a:pPr indent="0" marL="0">
+              <a:buNone/>
+            </a:pPr>
+            <a:r>
+              <a:rPr lang="en-US" sz="1000" dirty="0">
+                <a:solidFill>
+                  <a:srgbClr val="4A5878"/>
+                </a:solidFill>
+                <a:latin typeface="Yu Gothic" pitchFamily="34" charset="0"/>
+                <a:ea typeface="Yu Gothic" pitchFamily="34" charset="-122"/>
+                <a:cs typeface="Yu Gothic" pitchFamily="34" charset="-120"/>
+              </a:rPr>
+              <a:t>画面は見本です（店名・名前・数字は架空）。</a:t>
+            </a:r>
+            <a:endParaRPr lang="en-US" sz="1000" dirty="0"/>
+          </a:p>
+        </p:txBody>
+      </p:sp>
+      <p:sp>
+        <p:nvSpPr>
+          <p:cNvPr id="25" name="Slide Number Placeholder 0"/>
+          <p:cNvSpPr>
+            <a:spLocks noGrp="1"/>
+          </p:cNvSpPr>
+          <p:nvPr>
+            <p:ph type="sldNum" sz="quarter" idx="4294967295"/>
+          </p:nvPr>
+        </p:nvSpPr>
+        <p:spPr>
+          <a:xfrm>
+            <a:off x="548640" y="6309360"/>
+            <a:ext cx="548640" cy="274320"/>
+          </a:xfrm>
+          <a:prstGeom prst="rect">
+            <a:avLst/>
+          </a:prstGeom>
+          <a:extLst>
+            <a:ext uri="{C572A759-6A51-4108-AA02-DFA0A04FC94B}">
+              <ma14:wrappingTextBoxFlag xmlns:ma14="http://schemas.microsoft.com/office/mac/drawingml/2011/main" val="0"/>
+            </a:ext>
+          </a:extLst>
+        </p:spPr>
+        <p:txBody>
+          <a:bodyPr/>
+          <a:lstStyle>
+            <a:lvl1pPr>
+              <a:defRPr sz="1000">
+                <a:solidFill>
+                  <a:srgbClr val="4A5878"/>
+                </a:solidFill>
+                <a:latin typeface="Yu Gothic"/>
+                <a:ea typeface="Yu Gothic"/>
+                <a:cs typeface="Yu Gothic"/>
+              </a:defRPr>
+            </a:lvl1pPr>
+          </a:lstStyle>
+          <a:p>
+            <a:pPr algn="l"/>
+            <a:fld id="{F7021451-1387-4CA6-816F-3879F97B5CBC}" type="slidenum">
+              <a:rPr b="0" lang="en-US"/>
+              <a:t>12</a:t>
+            </a:fld>
+            <a:endParaRPr lang="en-US"/>
+          </a:p>
+        </p:txBody>
+      </p:sp>
+    </p:spTree>
+  </p:cSld>
+  <p:clrMapOvr>
+    <a:masterClrMapping/>
+  </p:clrMapOvr>
+</p:sld>
+</file>
+
+<file path=ppt/slides/slide13.xml><?xml version="1.0" encoding="utf-8"?>
+<p:sld xmlns:a="http://schemas.openxmlformats.org/drawingml/2006/main" xmlns:r="http://schemas.openxmlformats.org/officeDocument/2006/relationships" xmlns:p="http://schemas.openxmlformats.org/presentationml/2006/main">
+  <p:cSld name="Slide 13">
+    <p:spTree>
+      <p:nvGrpSpPr>
+        <p:cNvPr id="1" name=""/>
+        <p:cNvGrpSpPr/>
+        <p:nvPr/>
+      </p:nvGrpSpPr>
+      <p:grpSpPr>
+        <a:xfrm>
+          <a:off x="0" y="0"/>
+          <a:ext cx="0" cy="0"/>
+          <a:chOff x="0" y="0"/>
+          <a:chExt cx="0" cy="0"/>
+        </a:xfrm>
+      </p:grpSpPr>
+      <p:sp>
+        <p:nvSpPr>
+          <p:cNvPr id="2" name="Text 0"/>
+          <p:cNvSpPr/>
+          <p:nvPr>
+            <p:ph idx="100" type="title" hasCustomPrompt="1"/>
+          </p:nvPr>
+        </p:nvSpPr>
+        <p:spPr>
+          <a:xfrm>
+            <a:off x="548640" y="365760"/>
+            <a:ext cx="11064240" cy="822960"/>
+          </a:xfrm>
+          <a:prstGeom prst="rect">
+            <a:avLst/>
+          </a:prstGeom>
+          <a:noFill/>
+          <a:ln/>
+        </p:spPr>
+        <p:txBody>
+          <a:bodyPr wrap="square" lIns="0" tIns="0" rIns="0" bIns="0" rtlCol="0" anchor="ctr"/>
+          <a:lstStyle/>
+          <a:p>
+            <a:pPr indent="0" marL="0">
+              <a:buNone/>
+            </a:pPr>
+            <a:r>
+              <a:rPr lang="en-US" sz="3000" b="1" dirty="0">
+                <a:solidFill>
+                  <a:srgbClr val="13234A"/>
+                </a:solidFill>
+                <a:latin typeface="Yu Gothic" pitchFamily="34" charset="0"/>
+                <a:ea typeface="Yu Gothic" pitchFamily="34" charset="-122"/>
+                <a:cs typeface="Yu Gothic" pitchFamily="34" charset="-120"/>
+              </a:rPr>
+              <a:t>打刻・シフト・給料を自動で</a:t>
+            </a:r>
+            <a:endParaRPr lang="en-US" sz="3000" dirty="0"/>
+          </a:p>
+        </p:txBody>
+      </p:sp>
+      <p:sp>
+        <p:nvSpPr>
+          <p:cNvPr id="3" name="Shape 1"/>
+          <p:cNvSpPr/>
+          <p:nvPr/>
+        </p:nvSpPr>
+        <p:spPr>
+          <a:xfrm>
+            <a:off x="539496" y="1453896"/>
+            <a:ext cx="6876288" cy="2261053"/>
+          </a:xfrm>
+          <a:prstGeom prst="roundRect">
+            <a:avLst>
+              <a:gd name="adj" fmla="val 4044"/>
+            </a:avLst>
+          </a:prstGeom>
+          <a:solidFill>
+            <a:srgbClr val="FFFFFF"/>
+          </a:solidFill>
+          <a:ln w="12700">
+            <a:solidFill>
+              <a:srgbClr val="DCE4F2"/>
+            </a:solidFill>
+            <a:prstDash val="solid"/>
+          </a:ln>
+          <a:effectLst>
+            <a:outerShdw sx="100000" sy="100000" kx="0" ky="0" algn="bl" rotWithShape="0" blurRad="127000" dist="50800" dir="5400000">
+              <a:srgbClr val="13234A">
+                <a:alpha val="15000"/>
+              </a:srgbClr>
+            </a:outerShdw>
+          </a:effectLst>
+        </p:spPr>
+      </p:sp>
+      <p:pic>
+        <p:nvPicPr>
+          <p:cNvPr id="4" name="Image 0" descr="/tmp/claude-0/-home-user-GACHICAREERAI/b3a26714-2895-56f0-b4c8-705422406677/scratchpad/deck/m-salary.png">    </p:cNvPr>
+          <p:cNvPicPr>
+            <a:picLocks noChangeAspect="1"/>
+          </p:cNvPicPr>
+          <p:nvPr/>
+        </p:nvPicPr>
+        <p:blipFill>
+          <a:blip r:embed="rId1"/>
+          <a:stretch>
+            <a:fillRect/>
+          </a:stretch>
+        </p:blipFill>
+        <p:spPr>
+          <a:xfrm>
+            <a:off x="594360" y="1508760"/>
+            <a:ext cx="6766560" cy="2151325"/>
+          </a:xfrm>
+          <a:prstGeom prst="rect">
+            <a:avLst/>
+          </a:prstGeom>
+        </p:spPr>
+      </p:pic>
+      <p:sp>
+        <p:nvSpPr>
+          <p:cNvPr id="5" name="Shape 2"/>
+          <p:cNvSpPr/>
+          <p:nvPr/>
+        </p:nvSpPr>
+        <p:spPr>
+          <a:xfrm>
+            <a:off x="539496" y="3877056"/>
+            <a:ext cx="2726478" cy="2029968"/>
+          </a:xfrm>
+          <a:prstGeom prst="roundRect">
+            <a:avLst>
+              <a:gd name="adj" fmla="val 4505"/>
+            </a:avLst>
+          </a:prstGeom>
+          <a:solidFill>
+            <a:srgbClr val="FFFFFF"/>
+          </a:solidFill>
+          <a:ln w="12700">
+            <a:solidFill>
+              <a:srgbClr val="DCE4F2"/>
+            </a:solidFill>
+            <a:prstDash val="solid"/>
+          </a:ln>
+          <a:effectLst>
+            <a:outerShdw sx="100000" sy="100000" kx="0" ky="0" algn="bl" rotWithShape="0" blurRad="127000" dist="50800" dir="5400000">
+              <a:srgbClr val="13234A">
+                <a:alpha val="15000"/>
+              </a:srgbClr>
+            </a:outerShdw>
+          </a:effectLst>
+        </p:spPr>
+      </p:sp>
+      <p:pic>
+        <p:nvPicPr>
+          <p:cNvPr id="6" name="Image 1" descr="/tmp/claude-0/-home-user-GACHICAREERAI/b3a26714-2895-56f0-b4c8-705422406677/scratchpad/deck/m-back.png">    </p:cNvPr>
+          <p:cNvPicPr>
+            <a:picLocks noChangeAspect="1"/>
+          </p:cNvPicPr>
+          <p:nvPr/>
+        </p:nvPicPr>
+        <p:blipFill>
+          <a:blip r:embed="rId2"/>
+          <a:stretch>
+            <a:fillRect/>
+          </a:stretch>
+        </p:blipFill>
+        <p:spPr>
+          <a:xfrm>
+            <a:off x="594360" y="3931920"/>
+            <a:ext cx="2616750" cy="1920240"/>
+          </a:xfrm>
+          <a:prstGeom prst="rect">
+            <a:avLst/>
+          </a:prstGeom>
+        </p:spPr>
+      </p:pic>
+      <p:sp>
+        <p:nvSpPr>
+          <p:cNvPr id="7" name="Text 3"/>
+          <p:cNvSpPr txBox="1"/>
+          <p:nvPr/>
+        </p:nvSpPr>
+        <p:spPr>
+          <a:xfrm>
+            <a:off x="7680960" y="1463040"/>
+            <a:ext cx="3931920" cy="4480560"/>
+          </a:xfrm>
+          <a:prstGeom prst="rect">
+            <a:avLst/>
+          </a:prstGeom>
+          <a:noFill/>
+          <a:ln/>
+        </p:spPr>
+        <p:txBody>
+          <a:bodyPr wrap="square" lIns="0" tIns="0" rIns="0" bIns="0" rtlCol="0" anchor="t"/>
+          <a:lstStyle/>
+          <a:p>
+            <a:pPr marL="342900" indent="-342900">
+              <a:lnSpc>
+                <a:spcPct val="110000"/>
+              </a:lnSpc>
+              <a:spcAft>
+                <a:spcPts val="700"/>
+              </a:spcAft>
+              <a:buSzPct val="100000"/>
+              <a:buChar char="•"/>
+            </a:pPr>
+            <a:r>
+              <a:rPr lang="en-US" sz="1300" b="1" dirty="0">
+                <a:solidFill>
+                  <a:srgbClr val="13234A"/>
+                </a:solidFill>
+                <a:latin typeface="Yu Gothic" pitchFamily="34" charset="0"/>
+                <a:ea typeface="Yu Gothic" pitchFamily="34" charset="-122"/>
+                <a:cs typeface="Yu Gothic" pitchFamily="34" charset="-120"/>
+              </a:rPr>
+              <a:t>打刻：</a:t>
+            </a:r>
+            <a:pPr indent="0" marL="0">
+              <a:lnSpc>
+                <a:spcPct val="110000"/>
+              </a:lnSpc>
+              <a:spcAft>
+                <a:spcPts val="700"/>
+              </a:spcAft>
+              <a:buNone/>
+            </a:pPr>
+            <a:r>
+              <a:rPr lang="en-US" sz="1300" dirty="0">
+                <a:solidFill>
+                  <a:srgbClr val="4A5878"/>
+                </a:solidFill>
+                <a:latin typeface="Yu Gothic" pitchFamily="34" charset="0"/>
+                <a:ea typeface="Yu Gothic" pitchFamily="34" charset="-122"/>
+                <a:cs typeface="Yu Gothic" pitchFamily="34" charset="-120"/>
+              </a:rPr>
+              <a:t>ICカード（Suicaなど）でタッチ。打刻の直し・修正申請の承認</a:t>
+            </a:r>
+            <a:endParaRPr lang="en-US" sz="1300" dirty="0"/>
+          </a:p>
+          <a:p>
+            <a:pPr marL="342900" indent="-342900">
+              <a:lnSpc>
+                <a:spcPct val="110000"/>
+              </a:lnSpc>
+              <a:spcAft>
+                <a:spcPts val="700"/>
+              </a:spcAft>
+              <a:buSzPct val="100000"/>
+              <a:buChar char="•"/>
+            </a:pPr>
+            <a:r>
+              <a:rPr lang="en-US" sz="1300" b="1" dirty="0">
+                <a:solidFill>
+                  <a:srgbClr val="13234A"/>
+                </a:solidFill>
+                <a:latin typeface="Yu Gothic" pitchFamily="34" charset="0"/>
+                <a:ea typeface="Yu Gothic" pitchFamily="34" charset="-122"/>
+                <a:cs typeface="Yu Gothic" pitchFamily="34" charset="-120"/>
+              </a:rPr>
+              <a:t>シフト：</a:t>
+            </a:r>
+            <a:pPr indent="0" marL="0">
+              <a:lnSpc>
+                <a:spcPct val="110000"/>
+              </a:lnSpc>
+              <a:spcAft>
+                <a:spcPts val="700"/>
+              </a:spcAft>
+              <a:buNone/>
+            </a:pPr>
+            <a:r>
+              <a:rPr lang="en-US" sz="1300" dirty="0">
+                <a:solidFill>
+                  <a:srgbClr val="4A5878"/>
+                </a:solidFill>
+                <a:latin typeface="Yu Gothic" pitchFamily="34" charset="0"/>
+                <a:ea typeface="Yu Gothic" pitchFamily="34" charset="-122"/>
+                <a:cs typeface="Yu Gothic" pitchFamily="34" charset="-120"/>
+              </a:rPr>
+              <a:t>スタッフがスマホで希望を出す。締め切り・決めたシフト・臨時休業</a:t>
+            </a:r>
+            <a:endParaRPr lang="en-US" sz="1300" dirty="0"/>
+          </a:p>
+          <a:p>
+            <a:pPr marL="342900" indent="-342900">
+              <a:lnSpc>
+                <a:spcPct val="110000"/>
+              </a:lnSpc>
+              <a:spcAft>
+                <a:spcPts val="700"/>
+              </a:spcAft>
+              <a:buSzPct val="100000"/>
+              <a:buChar char="•"/>
+            </a:pPr>
+            <a:r>
+              <a:rPr lang="en-US" sz="1300" b="1" dirty="0">
+                <a:solidFill>
+                  <a:srgbClr val="13234A"/>
+                </a:solidFill>
+                <a:latin typeface="Yu Gothic" pitchFamily="34" charset="0"/>
+                <a:ea typeface="Yu Gothic" pitchFamily="34" charset="-122"/>
+                <a:cs typeface="Yu Gothic" pitchFamily="34" charset="-120"/>
+              </a:rPr>
+              <a:t>給料：</a:t>
+            </a:r>
+            <a:pPr indent="0" marL="0">
+              <a:lnSpc>
+                <a:spcPct val="110000"/>
+              </a:lnSpc>
+              <a:spcAft>
+                <a:spcPts val="700"/>
+              </a:spcAft>
+              <a:buNone/>
+            </a:pPr>
+            <a:r>
+              <a:rPr lang="en-US" sz="1300" dirty="0">
+                <a:solidFill>
+                  <a:srgbClr val="4A5878"/>
+                </a:solidFill>
+                <a:latin typeface="Yu Gothic" pitchFamily="34" charset="0"/>
+                <a:ea typeface="Yu Gothic" pitchFamily="34" charset="-122"/>
+                <a:cs typeface="Yu Gothic" pitchFamily="34" charset="-120"/>
+              </a:rPr>
+              <a:t>日払い・週払い・月払い。時給・手当・控除、深夜時給・交通費・前借りの差し引き</a:t>
+            </a:r>
+            <a:endParaRPr lang="en-US" sz="1300" dirty="0"/>
+          </a:p>
+          <a:p>
+            <a:pPr marL="342900" indent="-342900">
+              <a:lnSpc>
+                <a:spcPct val="110000"/>
+              </a:lnSpc>
+              <a:spcAft>
+                <a:spcPts val="700"/>
+              </a:spcAft>
+              <a:buSzPct val="100000"/>
+              <a:buChar char="•"/>
+            </a:pPr>
+            <a:r>
+              <a:rPr lang="en-US" sz="1300" b="1" dirty="0">
+                <a:solidFill>
+                  <a:srgbClr val="13234A"/>
+                </a:solidFill>
+                <a:latin typeface="Yu Gothic" pitchFamily="34" charset="0"/>
+                <a:ea typeface="Yu Gothic" pitchFamily="34" charset="-122"/>
+                <a:cs typeface="Yu Gothic" pitchFamily="34" charset="-120"/>
+              </a:rPr>
+              <a:t>夜のお店：</a:t>
+            </a:r>
+            <a:pPr indent="0" marL="0">
+              <a:lnSpc>
+                <a:spcPct val="110000"/>
+              </a:lnSpc>
+              <a:spcAft>
+                <a:spcPts val="700"/>
+              </a:spcAft>
+              <a:buNone/>
+            </a:pPr>
+            <a:r>
+              <a:rPr lang="en-US" sz="1300" dirty="0">
+                <a:solidFill>
+                  <a:srgbClr val="4A5878"/>
+                </a:solidFill>
+                <a:latin typeface="Yu Gothic" pitchFamily="34" charset="0"/>
+                <a:ea typeface="Yu Gothic" pitchFamily="34" charset="-122"/>
+                <a:cs typeface="Yu Gothic" pitchFamily="34" charset="-120"/>
+              </a:rPr>
+              <a:t>商品ごとのバック、売上や指名で変わる時給・歩合、送りの手当、源泉徴収</a:t>
+            </a:r>
+            <a:endParaRPr lang="en-US" sz="1300" dirty="0"/>
+          </a:p>
+          <a:p>
+            <a:pPr marL="342900" indent="-342900">
+              <a:lnSpc>
+                <a:spcPct val="110000"/>
+              </a:lnSpc>
+              <a:spcAft>
+                <a:spcPts val="700"/>
+              </a:spcAft>
+              <a:buSzPct val="100000"/>
+              <a:buChar char="•"/>
+            </a:pPr>
+            <a:r>
+              <a:rPr lang="en-US" sz="1300" b="1" dirty="0">
+                <a:solidFill>
+                  <a:srgbClr val="13234A"/>
+                </a:solidFill>
+                <a:latin typeface="Yu Gothic" pitchFamily="34" charset="0"/>
+                <a:ea typeface="Yu Gothic" pitchFamily="34" charset="-122"/>
+                <a:cs typeface="Yu Gothic" pitchFamily="34" charset="-120"/>
+              </a:rPr>
+              <a:t>決めたあとも安心：</a:t>
+            </a:r>
+            <a:pPr indent="0" marL="0">
+              <a:lnSpc>
+                <a:spcPct val="110000"/>
+              </a:lnSpc>
+              <a:spcAft>
+                <a:spcPts val="700"/>
+              </a:spcAft>
+              <a:buNone/>
+            </a:pPr>
+            <a:r>
+              <a:rPr lang="en-US" sz="1300" dirty="0">
+                <a:solidFill>
+                  <a:srgbClr val="4A5878"/>
+                </a:solidFill>
+                <a:latin typeface="Yu Gothic" pitchFamily="34" charset="0"/>
+                <a:ea typeface="Yu Gothic" pitchFamily="34" charset="-122"/>
+                <a:cs typeface="Yu Gothic" pitchFamily="34" charset="-120"/>
+              </a:rPr>
+              <a:t>決めたあとに打刻や伝票を直すと「決めた後に変更あり」とお知らせ。Excel出力も</a:t>
+            </a:r>
+            <a:endParaRPr lang="en-US" sz="1300" dirty="0"/>
+          </a:p>
+        </p:txBody>
+      </p:sp>
+      <p:sp>
+        <p:nvSpPr>
+          <p:cNvPr id="8" name="Text 4"/>
+          <p:cNvSpPr txBox="1"/>
+          <p:nvPr/>
+        </p:nvSpPr>
+        <p:spPr>
+          <a:xfrm>
+            <a:off x="1280160" y="6272784"/>
+            <a:ext cx="8595360" cy="365760"/>
+          </a:xfrm>
+          <a:prstGeom prst="rect">
+            <a:avLst/>
+          </a:prstGeom>
+          <a:noFill/>
+          <a:ln/>
+        </p:spPr>
+        <p:txBody>
+          <a:bodyPr wrap="square" lIns="0" tIns="0" rIns="0" bIns="0" rtlCol="0" anchor="ctr"/>
+          <a:lstStyle/>
+          <a:p>
+            <a:pPr indent="0" marL="0">
+              <a:buNone/>
+            </a:pPr>
+            <a:r>
+              <a:rPr lang="en-US" sz="1000" dirty="0">
+                <a:solidFill>
+                  <a:srgbClr val="4A5878"/>
+                </a:solidFill>
+                <a:latin typeface="Yu Gothic" pitchFamily="34" charset="0"/>
+                <a:ea typeface="Yu Gothic" pitchFamily="34" charset="-122"/>
+                <a:cs typeface="Yu Gothic" pitchFamily="34" charset="-120"/>
+              </a:rPr>
+              <a:t>画面は見本です（名前・数字は架空）。</a:t>
+            </a:r>
+            <a:endParaRPr lang="en-US" sz="1000" dirty="0"/>
+          </a:p>
+        </p:txBody>
+      </p:sp>
+      <p:sp>
+        <p:nvSpPr>
+          <p:cNvPr id="25" name="Slide Number Placeholder 0"/>
+          <p:cNvSpPr>
+            <a:spLocks noGrp="1"/>
+          </p:cNvSpPr>
+          <p:nvPr>
+            <p:ph type="sldNum" sz="quarter" idx="4294967295"/>
+          </p:nvPr>
+        </p:nvSpPr>
+        <p:spPr>
+          <a:xfrm>
+            <a:off x="548640" y="6309360"/>
+            <a:ext cx="548640" cy="274320"/>
+          </a:xfrm>
+          <a:prstGeom prst="rect">
+            <a:avLst/>
+          </a:prstGeom>
+          <a:extLst>
+            <a:ext uri="{C572A759-6A51-4108-AA02-DFA0A04FC94B}">
+              <ma14:wrappingTextBoxFlag xmlns:ma14="http://schemas.microsoft.com/office/mac/drawingml/2011/main" val="0"/>
+            </a:ext>
+          </a:extLst>
+        </p:spPr>
+        <p:txBody>
+          <a:bodyPr/>
+          <a:lstStyle>
+            <a:lvl1pPr>
+              <a:defRPr sz="1000">
+                <a:solidFill>
+                  <a:srgbClr val="4A5878"/>
+                </a:solidFill>
+                <a:latin typeface="Yu Gothic"/>
+                <a:ea typeface="Yu Gothic"/>
+                <a:cs typeface="Yu Gothic"/>
+              </a:defRPr>
+            </a:lvl1pPr>
+          </a:lstStyle>
+          <a:p>
+            <a:pPr algn="l"/>
+            <a:fld id="{F7021451-1387-4CA6-816F-3879F97B5CBC}" type="slidenum">
+              <a:rPr b="0" lang="en-US"/>
+              <a:t>13</a:t>
+            </a:fld>
+            <a:endParaRPr lang="en-US"/>
+          </a:p>
+        </p:txBody>
+      </p:sp>
+    </p:spTree>
+  </p:cSld>
+  <p:clrMapOvr>
+    <a:masterClrMapping/>
+  </p:clrMapOvr>
+</p:sld>
+</file>
+
+<file path=ppt/slides/slide14.xml><?xml version="1.0" encoding="utf-8"?>
+<p:sld xmlns:a="http://schemas.openxmlformats.org/drawingml/2006/main" xmlns:r="http://schemas.openxmlformats.org/officeDocument/2006/relationships" xmlns:p="http://schemas.openxmlformats.org/presentationml/2006/main">
+  <p:cSld name="Slide 14">
+    <p:spTree>
+      <p:nvGrpSpPr>
+        <p:cNvPr id="1" name=""/>
+        <p:cNvGrpSpPr/>
+        <p:nvPr/>
+      </p:nvGrpSpPr>
+      <p:grpSpPr>
+        <a:xfrm>
+          <a:off x="0" y="0"/>
+          <a:ext cx="0" cy="0"/>
+          <a:chOff x="0" y="0"/>
+          <a:chExt cx="0" cy="0"/>
+        </a:xfrm>
+      </p:grpSpPr>
+      <p:sp>
+        <p:nvSpPr>
+          <p:cNvPr id="2" name="Text 0"/>
+          <p:cNvSpPr/>
+          <p:nvPr>
+            <p:ph idx="100" type="title" hasCustomPrompt="1"/>
+          </p:nvPr>
+        </p:nvSpPr>
+        <p:spPr>
+          <a:xfrm>
+            <a:off x="548640" y="365760"/>
+            <a:ext cx="11064240" cy="822960"/>
+          </a:xfrm>
+          <a:prstGeom prst="rect">
+            <a:avLst/>
+          </a:prstGeom>
+          <a:noFill/>
+          <a:ln/>
+        </p:spPr>
+        <p:txBody>
+          <a:bodyPr wrap="square" lIns="0" tIns="0" rIns="0" bIns="0" rtlCol="0" anchor="ctr"/>
+          <a:lstStyle/>
+          <a:p>
+            <a:pPr indent="0" marL="0">
+              <a:buNone/>
+            </a:pPr>
+            <a:r>
+              <a:rPr lang="en-US" sz="3000" b="1" dirty="0">
+                <a:solidFill>
+                  <a:srgbClr val="13234A"/>
+                </a:solidFill>
+                <a:latin typeface="Yu Gothic" pitchFamily="34" charset="0"/>
+                <a:ea typeface="Yu Gothic" pitchFamily="34" charset="-122"/>
+                <a:cs typeface="Yu Gothic" pitchFamily="34" charset="-120"/>
+              </a:rPr>
+              <a:t>お金・日報・在庫・顧客もひとつに</a:t>
+            </a:r>
+            <a:endParaRPr lang="en-US" sz="3000" dirty="0"/>
+          </a:p>
+        </p:txBody>
+      </p:sp>
+      <p:sp>
+        <p:nvSpPr>
+          <p:cNvPr id="3" name="Shape 1"/>
+          <p:cNvSpPr/>
+          <p:nvPr/>
+        </p:nvSpPr>
+        <p:spPr>
+          <a:xfrm>
+            <a:off x="1472184" y="1408176"/>
+            <a:ext cx="9253728" cy="2942380"/>
+          </a:xfrm>
+          <a:prstGeom prst="roundRect">
+            <a:avLst>
+              <a:gd name="adj" fmla="val 3108"/>
+            </a:avLst>
+          </a:prstGeom>
+          <a:solidFill>
+            <a:srgbClr val="FFFFFF"/>
+          </a:solidFill>
+          <a:ln w="12700">
+            <a:solidFill>
+              <a:srgbClr val="DCE4F2"/>
+            </a:solidFill>
+            <a:prstDash val="solid"/>
+          </a:ln>
+          <a:effectLst>
+            <a:outerShdw sx="100000" sy="100000" kx="0" ky="0" algn="bl" rotWithShape="0" blurRad="127000" dist="50800" dir="5400000">
+              <a:srgbClr val="13234A">
+                <a:alpha val="15000"/>
+              </a:srgbClr>
+            </a:outerShdw>
+          </a:effectLst>
+        </p:spPr>
+      </p:sp>
+      <p:pic>
+        <p:nvPicPr>
+          <p:cNvPr id="4" name="Image 0" descr="/tmp/claude-0/-home-user-GACHICAREERAI/b3a26714-2895-56f0-b4c8-705422406677/scratchpad/deck/m-money.png">    </p:cNvPr>
+          <p:cNvPicPr>
+            <a:picLocks noChangeAspect="1"/>
+          </p:cNvPicPr>
+          <p:nvPr/>
+        </p:nvPicPr>
+        <p:blipFill>
+          <a:blip r:embed="rId1"/>
+          <a:stretch>
+            <a:fillRect/>
+          </a:stretch>
+        </p:blipFill>
+        <p:spPr>
+          <a:xfrm>
+            <a:off x="1527048" y="1463040"/>
+            <a:ext cx="9144000" cy="2832652"/>
+          </a:xfrm>
+          <a:prstGeom prst="rect">
+            <a:avLst/>
+          </a:prstGeom>
+        </p:spPr>
+      </p:pic>
+      <p:sp>
+        <p:nvSpPr>
+          <p:cNvPr id="5" name="Shape 2"/>
+          <p:cNvSpPr/>
+          <p:nvPr/>
+        </p:nvSpPr>
+        <p:spPr>
+          <a:xfrm>
+            <a:off x="548640" y="4572000"/>
+            <a:ext cx="2628900" cy="1463040"/>
+          </a:xfrm>
+          <a:prstGeom prst="roundRect">
+            <a:avLst>
+              <a:gd name="adj" fmla="val 9375"/>
+            </a:avLst>
+          </a:prstGeom>
+          <a:solidFill>
+            <a:srgbClr val="F2F6FD"/>
+          </a:solidFill>
+          <a:ln w="12700">
+            <a:solidFill>
+              <a:srgbClr val="F2F6FD"/>
+            </a:solidFill>
+            <a:prstDash val="solid"/>
+          </a:ln>
+        </p:spPr>
+      </p:sp>
+      <p:sp>
+        <p:nvSpPr>
+          <p:cNvPr id="6" name="Text 3"/>
+          <p:cNvSpPr txBox="1"/>
+          <p:nvPr/>
+        </p:nvSpPr>
+        <p:spPr>
+          <a:xfrm>
+            <a:off x="822960" y="4828032"/>
+            <a:ext cx="2125980" cy="457200"/>
+          </a:xfrm>
+          <a:prstGeom prst="rect">
+            <a:avLst/>
+          </a:prstGeom>
+          <a:noFill/>
+          <a:ln/>
+        </p:spPr>
+        <p:txBody>
+          <a:bodyPr wrap="square" lIns="0" tIns="0" rIns="0" bIns="0" rtlCol="0" anchor="ctr"/>
+          <a:lstStyle/>
+          <a:p>
+            <a:pPr indent="0" marL="0">
+              <a:buNone/>
+            </a:pPr>
+            <a:r>
+              <a:rPr lang="en-US" sz="1500" b="1" dirty="0">
+                <a:solidFill>
+                  <a:srgbClr val="13234A"/>
+                </a:solidFill>
+                <a:latin typeface="Yu Gothic" pitchFamily="34" charset="0"/>
+                <a:ea typeface="Yu Gothic" pitchFamily="34" charset="-122"/>
+                <a:cs typeface="Yu Gothic" pitchFamily="34" charset="-120"/>
+              </a:rPr>
+              <a:t>お金</a:t>
+            </a:r>
+            <a:endParaRPr lang="en-US" sz="1500" dirty="0"/>
+          </a:p>
+        </p:txBody>
+      </p:sp>
+      <p:sp>
+        <p:nvSpPr>
+          <p:cNvPr id="7" name="Text 4"/>
+          <p:cNvSpPr txBox="1"/>
+          <p:nvPr/>
+        </p:nvSpPr>
+        <p:spPr>
+          <a:xfrm>
+            <a:off x="822960" y="5394960"/>
+            <a:ext cx="2125980" cy="502920"/>
+          </a:xfrm>
+          <a:prstGeom prst="rect">
+            <a:avLst/>
+          </a:prstGeom>
+          <a:noFill/>
+          <a:ln/>
+        </p:spPr>
+        <p:txBody>
+          <a:bodyPr wrap="square" lIns="0" tIns="0" rIns="0" bIns="0" rtlCol="0" anchor="t"/>
+          <a:lstStyle/>
+          <a:p>
+            <a:pPr indent="0" marL="0">
+              <a:lnSpc>
+                <a:spcPct val="115000"/>
+              </a:lnSpc>
+              <a:buNone/>
+            </a:pPr>
+            <a:r>
+              <a:rPr lang="en-US" sz="1250" dirty="0">
+                <a:solidFill>
+                  <a:srgbClr val="4A5878"/>
+                </a:solidFill>
+                <a:latin typeface="Yu Gothic" pitchFamily="34" charset="0"/>
+                <a:ea typeface="Yu Gothic" pitchFamily="34" charset="-122"/>
+                <a:cs typeface="Yu Gothic" pitchFamily="34" charset="-120"/>
+              </a:rPr>
+              <a:t>利益（売上−手数料−人件費−仕入れ−経費）・原価率・レジの現金・明細。</a:t>
+            </a:r>
+            <a:endParaRPr lang="en-US" sz="1250" dirty="0"/>
+          </a:p>
+        </p:txBody>
+      </p:sp>
+      <p:sp>
+        <p:nvSpPr>
+          <p:cNvPr id="8" name="Shape 5"/>
+          <p:cNvSpPr/>
+          <p:nvPr/>
+        </p:nvSpPr>
+        <p:spPr>
+          <a:xfrm>
+            <a:off x="3360420" y="4572000"/>
+            <a:ext cx="2628900" cy="1463040"/>
+          </a:xfrm>
+          <a:prstGeom prst="roundRect">
+            <a:avLst>
+              <a:gd name="adj" fmla="val 9375"/>
+            </a:avLst>
+          </a:prstGeom>
+          <a:solidFill>
+            <a:srgbClr val="F2F6FD"/>
+          </a:solidFill>
+          <a:ln w="12700">
+            <a:solidFill>
+              <a:srgbClr val="F2F6FD"/>
+            </a:solidFill>
+            <a:prstDash val="solid"/>
+          </a:ln>
+        </p:spPr>
+      </p:sp>
+      <p:sp>
+        <p:nvSpPr>
+          <p:cNvPr id="9" name="Text 6"/>
+          <p:cNvSpPr txBox="1"/>
+          <p:nvPr/>
+        </p:nvSpPr>
+        <p:spPr>
+          <a:xfrm>
+            <a:off x="3634740" y="4828032"/>
+            <a:ext cx="2125980" cy="457200"/>
+          </a:xfrm>
+          <a:prstGeom prst="rect">
+            <a:avLst/>
+          </a:prstGeom>
+          <a:noFill/>
+          <a:ln/>
+        </p:spPr>
+        <p:txBody>
+          <a:bodyPr wrap="square" lIns="0" tIns="0" rIns="0" bIns="0" rtlCol="0" anchor="ctr"/>
+          <a:lstStyle/>
+          <a:p>
+            <a:pPr indent="0" marL="0">
+              <a:buNone/>
+            </a:pPr>
+            <a:r>
+              <a:rPr lang="en-US" sz="1500" b="1" dirty="0">
+                <a:solidFill>
+                  <a:srgbClr val="13234A"/>
+                </a:solidFill>
+                <a:latin typeface="Yu Gothic" pitchFamily="34" charset="0"/>
+                <a:ea typeface="Yu Gothic" pitchFamily="34" charset="-122"/>
+                <a:cs typeface="Yu Gothic" pitchFamily="34" charset="-120"/>
+              </a:rPr>
+              <a:t>日報・月報</a:t>
+            </a:r>
+            <a:endParaRPr lang="en-US" sz="1500" dirty="0"/>
+          </a:p>
+        </p:txBody>
+      </p:sp>
+      <p:sp>
+        <p:nvSpPr>
+          <p:cNvPr id="10" name="Text 7"/>
+          <p:cNvSpPr txBox="1"/>
+          <p:nvPr/>
+        </p:nvSpPr>
+        <p:spPr>
+          <a:xfrm>
+            <a:off x="3634740" y="5394960"/>
+            <a:ext cx="2125980" cy="502920"/>
+          </a:xfrm>
+          <a:prstGeom prst="rect">
+            <a:avLst/>
+          </a:prstGeom>
+          <a:noFill/>
+          <a:ln/>
+        </p:spPr>
+        <p:txBody>
+          <a:bodyPr wrap="square" lIns="0" tIns="0" rIns="0" bIns="0" rtlCol="0" anchor="t"/>
+          <a:lstStyle/>
+          <a:p>
+            <a:pPr indent="0" marL="0">
+              <a:lnSpc>
+                <a:spcPct val="115000"/>
+              </a:lnSpc>
+              <a:buNone/>
+            </a:pPr>
+            <a:r>
+              <a:rPr lang="en-US" sz="1250" dirty="0">
+                <a:solidFill>
+                  <a:srgbClr val="4A5878"/>
+                </a:solidFill>
+                <a:latin typeface="Yu Gothic" pitchFamily="34" charset="0"/>
+                <a:ea typeface="Yu Gothic" pitchFamily="34" charset="-122"/>
+                <a:cs typeface="Yu Gothic" pitchFamily="34" charset="-120"/>
+              </a:rPr>
+              <a:t>売上・客数・客単価・支払い方法ごと・人件費・よく出た商品。印刷も。</a:t>
+            </a:r>
+            <a:endParaRPr lang="en-US" sz="1250" dirty="0"/>
+          </a:p>
+        </p:txBody>
+      </p:sp>
+      <p:sp>
+        <p:nvSpPr>
+          <p:cNvPr id="11" name="Shape 8"/>
+          <p:cNvSpPr/>
+          <p:nvPr/>
+        </p:nvSpPr>
+        <p:spPr>
+          <a:xfrm>
+            <a:off x="6172200" y="4572000"/>
+            <a:ext cx="2628900" cy="1463040"/>
+          </a:xfrm>
+          <a:prstGeom prst="roundRect">
+            <a:avLst>
+              <a:gd name="adj" fmla="val 9375"/>
+            </a:avLst>
+          </a:prstGeom>
+          <a:solidFill>
+            <a:srgbClr val="F2F6FD"/>
+          </a:solidFill>
+          <a:ln w="12700">
+            <a:solidFill>
+              <a:srgbClr val="F2F6FD"/>
+            </a:solidFill>
+            <a:prstDash val="solid"/>
+          </a:ln>
+        </p:spPr>
+      </p:sp>
+      <p:sp>
+        <p:nvSpPr>
+          <p:cNvPr id="12" name="Text 9"/>
+          <p:cNvSpPr txBox="1"/>
+          <p:nvPr/>
+        </p:nvSpPr>
+        <p:spPr>
+          <a:xfrm>
+            <a:off x="6446520" y="4828032"/>
+            <a:ext cx="2125980" cy="457200"/>
+          </a:xfrm>
+          <a:prstGeom prst="rect">
+            <a:avLst/>
+          </a:prstGeom>
+          <a:noFill/>
+          <a:ln/>
+        </p:spPr>
+        <p:txBody>
+          <a:bodyPr wrap="square" lIns="0" tIns="0" rIns="0" bIns="0" rtlCol="0" anchor="ctr"/>
+          <a:lstStyle/>
+          <a:p>
+            <a:pPr indent="0" marL="0">
+              <a:buNone/>
+            </a:pPr>
+            <a:r>
+              <a:rPr lang="en-US" sz="1500" b="1" dirty="0">
+                <a:solidFill>
+                  <a:srgbClr val="13234A"/>
+                </a:solidFill>
+                <a:latin typeface="Yu Gothic" pitchFamily="34" charset="0"/>
+                <a:ea typeface="Yu Gothic" pitchFamily="34" charset="-122"/>
+                <a:cs typeface="Yu Gothic" pitchFamily="34" charset="-120"/>
+              </a:rPr>
+              <a:t>出数・在庫</a:t>
+            </a:r>
+            <a:endParaRPr lang="en-US" sz="1500" dirty="0"/>
+          </a:p>
+        </p:txBody>
+      </p:sp>
+      <p:sp>
+        <p:nvSpPr>
+          <p:cNvPr id="13" name="Text 10"/>
+          <p:cNvSpPr txBox="1"/>
+          <p:nvPr/>
+        </p:nvSpPr>
+        <p:spPr>
+          <a:xfrm>
+            <a:off x="6446520" y="5394960"/>
+            <a:ext cx="2125980" cy="502920"/>
+          </a:xfrm>
+          <a:prstGeom prst="rect">
+            <a:avLst/>
+          </a:prstGeom>
+          <a:noFill/>
+          <a:ln/>
+        </p:spPr>
+        <p:txBody>
+          <a:bodyPr wrap="square" lIns="0" tIns="0" rIns="0" bIns="0" rtlCol="0" anchor="t"/>
+          <a:lstStyle/>
+          <a:p>
+            <a:pPr indent="0" marL="0">
+              <a:lnSpc>
+                <a:spcPct val="115000"/>
+              </a:lnSpc>
+              <a:buNone/>
+            </a:pPr>
+            <a:r>
+              <a:rPr lang="en-US" sz="1250" dirty="0">
+                <a:solidFill>
+                  <a:srgbClr val="4A5878"/>
+                </a:solidFill>
+                <a:latin typeface="Yu Gothic" pitchFamily="34" charset="0"/>
+                <a:ea typeface="Yu Gothic" pitchFamily="34" charset="-122"/>
+                <a:cs typeface="Yu Gothic" pitchFamily="34" charset="-120"/>
+              </a:rPr>
+              <a:t>よく出たメニュー、在庫・入荷・原価。氷・おしぼりなども。</a:t>
+            </a:r>
+            <a:endParaRPr lang="en-US" sz="1250" dirty="0"/>
+          </a:p>
+        </p:txBody>
+      </p:sp>
+      <p:sp>
+        <p:nvSpPr>
+          <p:cNvPr id="14" name="Shape 11"/>
+          <p:cNvSpPr/>
+          <p:nvPr/>
+        </p:nvSpPr>
+        <p:spPr>
+          <a:xfrm>
+            <a:off x="8983980" y="4572000"/>
+            <a:ext cx="2628900" cy="1463040"/>
+          </a:xfrm>
+          <a:prstGeom prst="roundRect">
+            <a:avLst>
+              <a:gd name="adj" fmla="val 9375"/>
+            </a:avLst>
+          </a:prstGeom>
+          <a:solidFill>
+            <a:srgbClr val="F2F6FD"/>
+          </a:solidFill>
+          <a:ln w="12700">
+            <a:solidFill>
+              <a:srgbClr val="F2F6FD"/>
+            </a:solidFill>
+            <a:prstDash val="solid"/>
+          </a:ln>
+        </p:spPr>
+      </p:sp>
+      <p:sp>
+        <p:nvSpPr>
+          <p:cNvPr id="15" name="Text 12"/>
+          <p:cNvSpPr txBox="1"/>
+          <p:nvPr/>
+        </p:nvSpPr>
+        <p:spPr>
+          <a:xfrm>
+            <a:off x="9258300" y="4828032"/>
+            <a:ext cx="2125980" cy="457200"/>
+          </a:xfrm>
+          <a:prstGeom prst="rect">
+            <a:avLst/>
+          </a:prstGeom>
+          <a:noFill/>
+          <a:ln/>
+        </p:spPr>
+        <p:txBody>
+          <a:bodyPr wrap="square" lIns="0" tIns="0" rIns="0" bIns="0" rtlCol="0" anchor="ctr"/>
+          <a:lstStyle/>
+          <a:p>
+            <a:pPr indent="0" marL="0">
+              <a:buNone/>
+            </a:pPr>
+            <a:r>
+              <a:rPr lang="en-US" sz="1500" b="1" dirty="0">
+                <a:solidFill>
+                  <a:srgbClr val="13234A"/>
+                </a:solidFill>
+                <a:latin typeface="Yu Gothic" pitchFamily="34" charset="0"/>
+                <a:ea typeface="Yu Gothic" pitchFamily="34" charset="-122"/>
+                <a:cs typeface="Yu Gothic" pitchFamily="34" charset="-120"/>
+              </a:rPr>
+              <a:t>顧客・会計ソフトへ</a:t>
+            </a:r>
+            <a:endParaRPr lang="en-US" sz="1500" dirty="0"/>
+          </a:p>
+        </p:txBody>
+      </p:sp>
+      <p:sp>
+        <p:nvSpPr>
+          <p:cNvPr id="16" name="Text 13"/>
+          <p:cNvSpPr txBox="1"/>
+          <p:nvPr/>
+        </p:nvSpPr>
+        <p:spPr>
+          <a:xfrm>
+            <a:off x="9258300" y="5394960"/>
+            <a:ext cx="2125980" cy="502920"/>
+          </a:xfrm>
+          <a:prstGeom prst="rect">
+            <a:avLst/>
+          </a:prstGeom>
+          <a:noFill/>
+          <a:ln/>
+        </p:spPr>
+        <p:txBody>
+          <a:bodyPr wrap="square" lIns="0" tIns="0" rIns="0" bIns="0" rtlCol="0" anchor="t"/>
+          <a:lstStyle/>
+          <a:p>
+            <a:pPr indent="0" marL="0">
+              <a:lnSpc>
+                <a:spcPct val="115000"/>
+              </a:lnSpc>
+              <a:buNone/>
+            </a:pPr>
+            <a:r>
+              <a:rPr lang="en-US" sz="1250" dirty="0">
+                <a:solidFill>
+                  <a:srgbClr val="4A5878"/>
+                </a:solidFill>
+                <a:latin typeface="Yu Gothic" pitchFamily="34" charset="0"/>
+                <a:ea typeface="Yu Gothic" pitchFamily="34" charset="-122"/>
+                <a:cs typeface="Yu Gothic" pitchFamily="34" charset="-120"/>
+              </a:rPr>
+              <a:t>顧客カルテ・来店の記録。freee・マネーフォワード・弥生用のCSV。</a:t>
+            </a:r>
+            <a:endParaRPr lang="en-US" sz="1250" dirty="0"/>
+          </a:p>
+        </p:txBody>
+      </p:sp>
+      <p:sp>
+        <p:nvSpPr>
+          <p:cNvPr id="17" name="Text 14"/>
+          <p:cNvSpPr txBox="1"/>
+          <p:nvPr/>
+        </p:nvSpPr>
+        <p:spPr>
+          <a:xfrm>
+            <a:off x="1280160" y="6272784"/>
+            <a:ext cx="8595360" cy="365760"/>
+          </a:xfrm>
+          <a:prstGeom prst="rect">
+            <a:avLst/>
+          </a:prstGeom>
+          <a:noFill/>
+          <a:ln/>
+        </p:spPr>
+        <p:txBody>
+          <a:bodyPr wrap="square" lIns="0" tIns="0" rIns="0" bIns="0" rtlCol="0" anchor="ctr"/>
+          <a:lstStyle/>
+          <a:p>
+            <a:pPr indent="0" marL="0">
+              <a:buNone/>
+            </a:pPr>
+            <a:r>
+              <a:rPr lang="en-US" sz="1000" dirty="0">
+                <a:solidFill>
+                  <a:srgbClr val="4A5878"/>
+                </a:solidFill>
+                <a:latin typeface="Yu Gothic" pitchFamily="34" charset="0"/>
+                <a:ea typeface="Yu Gothic" pitchFamily="34" charset="-122"/>
+                <a:cs typeface="Yu Gothic" pitchFamily="34" charset="-120"/>
+              </a:rPr>
+              <a:t>画面は見本です（店名・数字は架空）。</a:t>
+            </a:r>
+            <a:endParaRPr lang="en-US" sz="1000" dirty="0"/>
+          </a:p>
+        </p:txBody>
+      </p:sp>
+      <p:sp>
+        <p:nvSpPr>
+          <p:cNvPr id="25" name="Slide Number Placeholder 0"/>
+          <p:cNvSpPr>
+            <a:spLocks noGrp="1"/>
+          </p:cNvSpPr>
+          <p:nvPr>
+            <p:ph type="sldNum" sz="quarter" idx="4294967295"/>
+          </p:nvPr>
+        </p:nvSpPr>
+        <p:spPr>
+          <a:xfrm>
+            <a:off x="548640" y="6309360"/>
+            <a:ext cx="548640" cy="274320"/>
+          </a:xfrm>
+          <a:prstGeom prst="rect">
+            <a:avLst/>
+          </a:prstGeom>
+          <a:extLst>
+            <a:ext uri="{C572A759-6A51-4108-AA02-DFA0A04FC94B}">
+              <ma14:wrappingTextBoxFlag xmlns:ma14="http://schemas.microsoft.com/office/mac/drawingml/2011/main" val="0"/>
+            </a:ext>
+          </a:extLst>
+        </p:spPr>
+        <p:txBody>
+          <a:bodyPr/>
+          <a:lstStyle>
+            <a:lvl1pPr>
+              <a:defRPr sz="1000">
+                <a:solidFill>
+                  <a:srgbClr val="4A5878"/>
+                </a:solidFill>
+                <a:latin typeface="Yu Gothic"/>
+                <a:ea typeface="Yu Gothic"/>
+                <a:cs typeface="Yu Gothic"/>
+              </a:defRPr>
+            </a:lvl1pPr>
+          </a:lstStyle>
+          <a:p>
+            <a:pPr algn="l"/>
+            <a:fld id="{F7021451-1387-4CA6-816F-3879F97B5CBC}" type="slidenum">
+              <a:rPr b="0" lang="en-US"/>
+              <a:t>14</a:t>
+            </a:fld>
+            <a:endParaRPr lang="en-US"/>
+          </a:p>
+        </p:txBody>
+      </p:sp>
+    </p:spTree>
+  </p:cSld>
+  <p:clrMapOvr>
+    <a:masterClrMapping/>
+  </p:clrMapOvr>
+</p:sld>
+</file>
+
+<file path=ppt/slides/slide15.xml><?xml version="1.0" encoding="utf-8"?>
+<p:sld xmlns:a="http://schemas.openxmlformats.org/drawingml/2006/main" xmlns:r="http://schemas.openxmlformats.org/officeDocument/2006/relationships" xmlns:p="http://schemas.openxmlformats.org/presentationml/2006/main">
+  <p:cSld name="Slide 15">
+    <p:spTree>
+      <p:nvGrpSpPr>
+        <p:cNvPr id="1" name=""/>
+        <p:cNvGrpSpPr/>
+        <p:nvPr/>
+      </p:nvGrpSpPr>
+      <p:grpSpPr>
+        <a:xfrm>
+          <a:off x="0" y="0"/>
+          <a:ext cx="0" cy="0"/>
+          <a:chOff x="0" y="0"/>
+          <a:chExt cx="0" cy="0"/>
+        </a:xfrm>
+      </p:grpSpPr>
+      <p:sp>
+        <p:nvSpPr>
+          <p:cNvPr id="2" name="Text 0"/>
+          <p:cNvSpPr/>
+          <p:nvPr>
+            <p:ph idx="100" type="title" hasCustomPrompt="1"/>
+          </p:nvPr>
+        </p:nvSpPr>
+        <p:spPr>
+          <a:xfrm>
+            <a:off x="548640" y="365760"/>
+            <a:ext cx="11064240" cy="822960"/>
+          </a:xfrm>
+          <a:prstGeom prst="rect">
+            <a:avLst/>
+          </a:prstGeom>
+          <a:noFill/>
+          <a:ln/>
+        </p:spPr>
+        <p:txBody>
+          <a:bodyPr wrap="square" lIns="0" tIns="0" rIns="0" bIns="0" rtlCol="0" anchor="ctr"/>
+          <a:lstStyle/>
+          <a:p>
+            <a:pPr indent="0" marL="0">
+              <a:buNone/>
+            </a:pPr>
+            <a:r>
+              <a:rPr lang="en-US" sz="3000" b="1" dirty="0">
+                <a:solidFill>
+                  <a:srgbClr val="13234A"/>
+                </a:solidFill>
+                <a:latin typeface="Yu Gothic" pitchFamily="34" charset="0"/>
+                <a:ea typeface="Yu Gothic" pitchFamily="34" charset="-122"/>
+                <a:cs typeface="Yu Gothic" pitchFamily="34" charset="-120"/>
+              </a:rPr>
+              <a:t>スタッフ・キャストは自分のスマホで</a:t>
+            </a:r>
+            <a:endParaRPr lang="en-US" sz="3000" dirty="0"/>
+          </a:p>
+        </p:txBody>
+      </p:sp>
+      <p:sp>
+        <p:nvSpPr>
+          <p:cNvPr id="3" name="Shape 1"/>
+          <p:cNvSpPr/>
+          <p:nvPr/>
+        </p:nvSpPr>
+        <p:spPr>
+          <a:xfrm>
+            <a:off x="768096" y="1408176"/>
+            <a:ext cx="2304288" cy="4375953"/>
+          </a:xfrm>
+          <a:prstGeom prst="roundRect">
+            <a:avLst>
+              <a:gd name="adj" fmla="val 3968"/>
+            </a:avLst>
+          </a:prstGeom>
+          <a:solidFill>
+            <a:srgbClr val="FFFFFF"/>
+          </a:solidFill>
+          <a:ln w="12700">
+            <a:solidFill>
+              <a:srgbClr val="DCE4F2"/>
+            </a:solidFill>
+            <a:prstDash val="solid"/>
+          </a:ln>
+          <a:effectLst>
+            <a:outerShdw sx="100000" sy="100000" kx="0" ky="0" algn="bl" rotWithShape="0" blurRad="127000" dist="50800" dir="5400000">
+              <a:srgbClr val="13234A">
+                <a:alpha val="15000"/>
+              </a:srgbClr>
+            </a:outerShdw>
+          </a:effectLst>
+        </p:spPr>
+      </p:sp>
+      <p:pic>
+        <p:nvPicPr>
+          <p:cNvPr id="4" name="Image 0" descr="/tmp/claude-0/-home-user-GACHICAREERAI/b3a26714-2895-56f0-b4c8-705422406677/scratchpad/deck/m-staff-home.png">    </p:cNvPr>
+          <p:cNvPicPr>
+            <a:picLocks noChangeAspect="1"/>
+          </p:cNvPicPr>
+          <p:nvPr/>
+        </p:nvPicPr>
+        <p:blipFill>
+          <a:blip r:embed="rId1"/>
+          <a:stretch>
+            <a:fillRect/>
+          </a:stretch>
+        </p:blipFill>
+        <p:spPr>
+          <a:xfrm>
+            <a:off x="822960" y="1463040"/>
+            <a:ext cx="2194560" cy="4266225"/>
+          </a:xfrm>
+          <a:prstGeom prst="rect">
+            <a:avLst/>
+          </a:prstGeom>
+        </p:spPr>
+      </p:pic>
+      <p:sp>
+        <p:nvSpPr>
+          <p:cNvPr id="5" name="Shape 2"/>
+          <p:cNvSpPr/>
+          <p:nvPr/>
+        </p:nvSpPr>
+        <p:spPr>
+          <a:xfrm>
+            <a:off x="3328416" y="1408176"/>
+            <a:ext cx="2304288" cy="4375953"/>
+          </a:xfrm>
+          <a:prstGeom prst="roundRect">
+            <a:avLst>
+              <a:gd name="adj" fmla="val 3968"/>
+            </a:avLst>
+          </a:prstGeom>
+          <a:solidFill>
+            <a:srgbClr val="FFFFFF"/>
+          </a:solidFill>
+          <a:ln w="12700">
+            <a:solidFill>
+              <a:srgbClr val="DCE4F2"/>
+            </a:solidFill>
+            <a:prstDash val="solid"/>
+          </a:ln>
+          <a:effectLst>
+            <a:outerShdw sx="100000" sy="100000" kx="0" ky="0" algn="bl" rotWithShape="0" blurRad="127000" dist="50800" dir="5400000">
+              <a:srgbClr val="13234A">
+                <a:alpha val="15000"/>
+              </a:srgbClr>
+            </a:outerShdw>
+          </a:effectLst>
+        </p:spPr>
+      </p:sp>
+      <p:pic>
+        <p:nvPicPr>
+          <p:cNvPr id="6" name="Image 1" descr="/tmp/claude-0/-home-user-GACHICAREERAI/b3a26714-2895-56f0-b4c8-705422406677/scratchpad/deck/m-cast-home.png">    </p:cNvPr>
+          <p:cNvPicPr>
+            <a:picLocks noChangeAspect="1"/>
+          </p:cNvPicPr>
+          <p:nvPr/>
+        </p:nvPicPr>
+        <p:blipFill>
+          <a:blip r:embed="rId2"/>
+          <a:stretch>
+            <a:fillRect/>
+          </a:stretch>
+        </p:blipFill>
+        <p:spPr>
+          <a:xfrm>
+            <a:off x="3383280" y="1463040"/>
+            <a:ext cx="2194560" cy="4266225"/>
+          </a:xfrm>
+          <a:prstGeom prst="rect">
+            <a:avLst/>
+          </a:prstGeom>
+        </p:spPr>
+      </p:pic>
+      <p:sp>
+        <p:nvSpPr>
+          <p:cNvPr id="7" name="Shape 3"/>
+          <p:cNvSpPr/>
+          <p:nvPr/>
+        </p:nvSpPr>
+        <p:spPr>
+          <a:xfrm>
+            <a:off x="6217920" y="1463040"/>
+            <a:ext cx="2583180" cy="1874520"/>
+          </a:xfrm>
+          <a:prstGeom prst="roundRect">
+            <a:avLst>
+              <a:gd name="adj" fmla="val 7317"/>
+            </a:avLst>
+          </a:prstGeom>
+          <a:solidFill>
+            <a:srgbClr val="F2F6FD"/>
+          </a:solidFill>
+          <a:ln w="12700">
+            <a:solidFill>
+              <a:srgbClr val="F2F6FD"/>
+            </a:solidFill>
+            <a:prstDash val="solid"/>
+          </a:ln>
+        </p:spPr>
+      </p:sp>
+      <p:sp>
+        <p:nvSpPr>
+          <p:cNvPr id="8" name="Text 4"/>
+          <p:cNvSpPr txBox="1"/>
+          <p:nvPr/>
+        </p:nvSpPr>
+        <p:spPr>
+          <a:xfrm>
+            <a:off x="6492240" y="1719072"/>
+            <a:ext cx="2080260" cy="457200"/>
+          </a:xfrm>
+          <a:prstGeom prst="rect">
+            <a:avLst/>
+          </a:prstGeom>
+          <a:noFill/>
+          <a:ln/>
+        </p:spPr>
+        <p:txBody>
+          <a:bodyPr wrap="square" lIns="0" tIns="0" rIns="0" bIns="0" rtlCol="0" anchor="ctr"/>
+          <a:lstStyle/>
+          <a:p>
+            <a:pPr indent="0" marL="0">
+              <a:buNone/>
+            </a:pPr>
+            <a:r>
+              <a:rPr lang="en-US" sz="1550" b="1" dirty="0">
+                <a:solidFill>
+                  <a:srgbClr val="13234A"/>
+                </a:solidFill>
+                <a:latin typeface="Yu Gothic" pitchFamily="34" charset="0"/>
+                <a:ea typeface="Yu Gothic" pitchFamily="34" charset="-122"/>
+                <a:cs typeface="Yu Gothic" pitchFamily="34" charset="-120"/>
+              </a:rPr>
+              <a:t>シフト</a:t>
+            </a:r>
+            <a:endParaRPr lang="en-US" sz="1550" dirty="0"/>
+          </a:p>
+        </p:txBody>
+      </p:sp>
+      <p:sp>
+        <p:nvSpPr>
+          <p:cNvPr id="9" name="Text 5"/>
+          <p:cNvSpPr txBox="1"/>
+          <p:nvPr/>
+        </p:nvSpPr>
+        <p:spPr>
+          <a:xfrm>
+            <a:off x="6492240" y="2286000"/>
+            <a:ext cx="2080260" cy="914400"/>
+          </a:xfrm>
+          <a:prstGeom prst="rect">
+            <a:avLst/>
+          </a:prstGeom>
+          <a:noFill/>
+          <a:ln/>
+        </p:spPr>
+        <p:txBody>
+          <a:bodyPr wrap="square" lIns="0" tIns="0" rIns="0" bIns="0" rtlCol="0" anchor="t"/>
+          <a:lstStyle/>
+          <a:p>
+            <a:pPr indent="0" marL="0">
+              <a:lnSpc>
+                <a:spcPct val="115000"/>
+              </a:lnSpc>
+              <a:buNone/>
+            </a:pPr>
+            <a:r>
+              <a:rPr lang="en-US" sz="1300" dirty="0">
+                <a:solidFill>
+                  <a:srgbClr val="4A5878"/>
+                </a:solidFill>
+                <a:latin typeface="Yu Gothic" pitchFamily="34" charset="0"/>
+                <a:ea typeface="Yu Gothic" pitchFamily="34" charset="-122"/>
+                <a:cs typeface="Yu Gothic" pitchFamily="34" charset="-120"/>
+              </a:rPr>
+              <a:t>希望を出す・決まったシフトを見る。</a:t>
+            </a:r>
+            <a:endParaRPr lang="en-US" sz="1300" dirty="0"/>
+          </a:p>
+        </p:txBody>
+      </p:sp>
+      <p:sp>
+        <p:nvSpPr>
+          <p:cNvPr id="10" name="Shape 6"/>
+          <p:cNvSpPr/>
+          <p:nvPr/>
+        </p:nvSpPr>
+        <p:spPr>
+          <a:xfrm>
+            <a:off x="9029700" y="1463040"/>
+            <a:ext cx="2583180" cy="1874520"/>
+          </a:xfrm>
+          <a:prstGeom prst="roundRect">
+            <a:avLst>
+              <a:gd name="adj" fmla="val 7317"/>
+            </a:avLst>
+          </a:prstGeom>
+          <a:solidFill>
+            <a:srgbClr val="F2F6FD"/>
+          </a:solidFill>
+          <a:ln w="12700">
+            <a:solidFill>
+              <a:srgbClr val="F2F6FD"/>
+            </a:solidFill>
+            <a:prstDash val="solid"/>
+          </a:ln>
+        </p:spPr>
+      </p:sp>
+      <p:sp>
+        <p:nvSpPr>
+          <p:cNvPr id="11" name="Text 7"/>
+          <p:cNvSpPr txBox="1"/>
+          <p:nvPr/>
+        </p:nvSpPr>
+        <p:spPr>
+          <a:xfrm>
+            <a:off x="9304020" y="1719072"/>
+            <a:ext cx="2080260" cy="457200"/>
+          </a:xfrm>
+          <a:prstGeom prst="rect">
+            <a:avLst/>
+          </a:prstGeom>
+          <a:noFill/>
+          <a:ln/>
+        </p:spPr>
+        <p:txBody>
+          <a:bodyPr wrap="square" lIns="0" tIns="0" rIns="0" bIns="0" rtlCol="0" anchor="ctr"/>
+          <a:lstStyle/>
+          <a:p>
+            <a:pPr indent="0" marL="0">
+              <a:buNone/>
+            </a:pPr>
+            <a:r>
+              <a:rPr lang="en-US" sz="1550" b="1" dirty="0">
+                <a:solidFill>
+                  <a:srgbClr val="13234A"/>
+                </a:solidFill>
+                <a:latin typeface="Yu Gothic" pitchFamily="34" charset="0"/>
+                <a:ea typeface="Yu Gothic" pitchFamily="34" charset="-122"/>
+                <a:cs typeface="Yu Gothic" pitchFamily="34" charset="-120"/>
+              </a:rPr>
+              <a:t>給料・明細</a:t>
+            </a:r>
+            <a:endParaRPr lang="en-US" sz="1550" dirty="0"/>
+          </a:p>
+        </p:txBody>
+      </p:sp>
+      <p:sp>
+        <p:nvSpPr>
+          <p:cNvPr id="12" name="Text 8"/>
+          <p:cNvSpPr txBox="1"/>
+          <p:nvPr/>
+        </p:nvSpPr>
+        <p:spPr>
+          <a:xfrm>
+            <a:off x="9304020" y="2286000"/>
+            <a:ext cx="2080260" cy="914400"/>
+          </a:xfrm>
+          <a:prstGeom prst="rect">
+            <a:avLst/>
+          </a:prstGeom>
+          <a:noFill/>
+          <a:ln/>
+        </p:spPr>
+        <p:txBody>
+          <a:bodyPr wrap="square" lIns="0" tIns="0" rIns="0" bIns="0" rtlCol="0" anchor="t"/>
+          <a:lstStyle/>
+          <a:p>
+            <a:pPr indent="0" marL="0">
+              <a:lnSpc>
+                <a:spcPct val="115000"/>
+              </a:lnSpc>
+              <a:buNone/>
+            </a:pPr>
+            <a:r>
+              <a:rPr lang="en-US" sz="1300" dirty="0">
+                <a:solidFill>
+                  <a:srgbClr val="4A5878"/>
+                </a:solidFill>
+                <a:latin typeface="Yu Gothic" pitchFamily="34" charset="0"/>
+                <a:ea typeface="Yu Gothic" pitchFamily="34" charset="-122"/>
+                <a:cs typeface="Yu Gothic" pitchFamily="34" charset="-120"/>
+              </a:rPr>
+              <a:t>いくらもらえるか、日別の明細。前借りも。</a:t>
+            </a:r>
+            <a:endParaRPr lang="en-US" sz="1300" dirty="0"/>
+          </a:p>
+        </p:txBody>
+      </p:sp>
+      <p:sp>
+        <p:nvSpPr>
+          <p:cNvPr id="13" name="Shape 9"/>
+          <p:cNvSpPr/>
+          <p:nvPr/>
+        </p:nvSpPr>
+        <p:spPr>
+          <a:xfrm>
+            <a:off x="6217920" y="3566160"/>
+            <a:ext cx="2583180" cy="1874520"/>
+          </a:xfrm>
+          <a:prstGeom prst="roundRect">
+            <a:avLst>
+              <a:gd name="adj" fmla="val 7317"/>
+            </a:avLst>
+          </a:prstGeom>
+          <a:solidFill>
+            <a:srgbClr val="F2F6FD"/>
+          </a:solidFill>
+          <a:ln w="12700">
+            <a:solidFill>
+              <a:srgbClr val="F2F6FD"/>
+            </a:solidFill>
+            <a:prstDash val="solid"/>
+          </a:ln>
+        </p:spPr>
+      </p:sp>
+      <p:sp>
+        <p:nvSpPr>
+          <p:cNvPr id="14" name="Text 10"/>
+          <p:cNvSpPr txBox="1"/>
+          <p:nvPr/>
+        </p:nvSpPr>
+        <p:spPr>
+          <a:xfrm>
+            <a:off x="6492240" y="3822192"/>
+            <a:ext cx="2080260" cy="457200"/>
+          </a:xfrm>
+          <a:prstGeom prst="rect">
+            <a:avLst/>
+          </a:prstGeom>
+          <a:noFill/>
+          <a:ln/>
+        </p:spPr>
+        <p:txBody>
+          <a:bodyPr wrap="square" lIns="0" tIns="0" rIns="0" bIns="0" rtlCol="0" anchor="ctr"/>
+          <a:lstStyle/>
+          <a:p>
+            <a:pPr indent="0" marL="0">
+              <a:buNone/>
+            </a:pPr>
+            <a:r>
+              <a:rPr lang="en-US" sz="1550" b="1" dirty="0">
+                <a:solidFill>
+                  <a:srgbClr val="13234A"/>
+                </a:solidFill>
+                <a:latin typeface="Yu Gothic" pitchFamily="34" charset="0"/>
+                <a:ea typeface="Yu Gothic" pitchFamily="34" charset="-122"/>
+                <a:cs typeface="Yu Gothic" pitchFamily="34" charset="-120"/>
+              </a:rPr>
+              <a:t>チャット・通知</a:t>
+            </a:r>
+            <a:endParaRPr lang="en-US" sz="1550" dirty="0"/>
+          </a:p>
+        </p:txBody>
+      </p:sp>
+      <p:sp>
+        <p:nvSpPr>
+          <p:cNvPr id="15" name="Text 11"/>
+          <p:cNvSpPr txBox="1"/>
+          <p:nvPr/>
+        </p:nvSpPr>
+        <p:spPr>
+          <a:xfrm>
+            <a:off x="6492240" y="4389120"/>
+            <a:ext cx="2080260" cy="914400"/>
+          </a:xfrm>
+          <a:prstGeom prst="rect">
+            <a:avLst/>
+          </a:prstGeom>
+          <a:noFill/>
+          <a:ln/>
+        </p:spPr>
+        <p:txBody>
+          <a:bodyPr wrap="square" lIns="0" tIns="0" rIns="0" bIns="0" rtlCol="0" anchor="t"/>
+          <a:lstStyle/>
+          <a:p>
+            <a:pPr indent="0" marL="0">
+              <a:lnSpc>
+                <a:spcPct val="115000"/>
+              </a:lnSpc>
+              <a:buNone/>
+            </a:pPr>
+            <a:r>
+              <a:rPr lang="en-US" sz="1300" dirty="0">
+                <a:solidFill>
+                  <a:srgbClr val="4A5878"/>
+                </a:solidFill>
+                <a:latin typeface="Yu Gothic" pitchFamily="34" charset="0"/>
+                <a:ea typeface="Yu Gothic" pitchFamily="34" charset="-122"/>
+                <a:cs typeface="Yu Gothic" pitchFamily="34" charset="-120"/>
+              </a:rPr>
+              <a:t>1対1・グループ・お知らせ。写真・既読。</a:t>
+            </a:r>
+            <a:endParaRPr lang="en-US" sz="1300" dirty="0"/>
+          </a:p>
+        </p:txBody>
+      </p:sp>
+      <p:sp>
+        <p:nvSpPr>
+          <p:cNvPr id="16" name="Shape 12"/>
+          <p:cNvSpPr/>
+          <p:nvPr/>
+        </p:nvSpPr>
+        <p:spPr>
+          <a:xfrm>
+            <a:off x="9029700" y="3566160"/>
+            <a:ext cx="2583180" cy="1874520"/>
+          </a:xfrm>
+          <a:prstGeom prst="roundRect">
+            <a:avLst>
+              <a:gd name="adj" fmla="val 7317"/>
+            </a:avLst>
+          </a:prstGeom>
+          <a:solidFill>
+            <a:srgbClr val="F2F6FD"/>
+          </a:solidFill>
+          <a:ln w="12700">
+            <a:solidFill>
+              <a:srgbClr val="F2F6FD"/>
+            </a:solidFill>
+            <a:prstDash val="solid"/>
+          </a:ln>
+        </p:spPr>
+      </p:sp>
+      <p:sp>
+        <p:nvSpPr>
+          <p:cNvPr id="17" name="Text 13"/>
+          <p:cNvSpPr txBox="1"/>
+          <p:nvPr/>
+        </p:nvSpPr>
+        <p:spPr>
+          <a:xfrm>
+            <a:off x="9304020" y="3822192"/>
+            <a:ext cx="2080260" cy="457200"/>
+          </a:xfrm>
+          <a:prstGeom prst="rect">
+            <a:avLst/>
+          </a:prstGeom>
+          <a:noFill/>
+          <a:ln/>
+        </p:spPr>
+        <p:txBody>
+          <a:bodyPr wrap="square" lIns="0" tIns="0" rIns="0" bIns="0" rtlCol="0" anchor="ctr"/>
+          <a:lstStyle/>
+          <a:p>
+            <a:pPr indent="0" marL="0">
+              <a:buNone/>
+            </a:pPr>
+            <a:r>
+              <a:rPr lang="en-US" sz="1550" b="1" dirty="0">
+                <a:solidFill>
+                  <a:srgbClr val="13234A"/>
+                </a:solidFill>
+                <a:latin typeface="Yu Gothic" pitchFamily="34" charset="0"/>
+                <a:ea typeface="Yu Gothic" pitchFamily="34" charset="-122"/>
+                <a:cs typeface="Yu Gothic" pitchFamily="34" charset="-120"/>
+              </a:rPr>
+              <a:t>夜は成績・お客さま</a:t>
+            </a:r>
+            <a:endParaRPr lang="en-US" sz="1550" dirty="0"/>
+          </a:p>
+        </p:txBody>
+      </p:sp>
+      <p:sp>
+        <p:nvSpPr>
+          <p:cNvPr id="18" name="Text 14"/>
+          <p:cNvSpPr txBox="1"/>
+          <p:nvPr/>
+        </p:nvSpPr>
+        <p:spPr>
+          <a:xfrm>
+            <a:off x="9304020" y="4389120"/>
+            <a:ext cx="2080260" cy="914400"/>
+          </a:xfrm>
+          <a:prstGeom prst="rect">
+            <a:avLst/>
+          </a:prstGeom>
+          <a:noFill/>
+          <a:ln/>
+        </p:spPr>
+        <p:txBody>
+          <a:bodyPr wrap="square" lIns="0" tIns="0" rIns="0" bIns="0" rtlCol="0" anchor="t"/>
+          <a:lstStyle/>
+          <a:p>
+            <a:pPr indent="0" marL="0">
+              <a:lnSpc>
+                <a:spcPct val="115000"/>
+              </a:lnSpc>
+              <a:buNone/>
+            </a:pPr>
+            <a:r>
+              <a:rPr lang="en-US" sz="1300" dirty="0">
+                <a:solidFill>
+                  <a:srgbClr val="4A5878"/>
+                </a:solidFill>
+                <a:latin typeface="Yu Gothic" pitchFamily="34" charset="0"/>
+                <a:ea typeface="Yu Gothic" pitchFamily="34" charset="-122"/>
+                <a:cs typeface="Yu Gothic" pitchFamily="34" charset="-120"/>
+              </a:rPr>
+              <a:t>成績・ランキング、自分のお客さま、来客予定、確定申告の案内。</a:t>
+            </a:r>
+            <a:endParaRPr lang="en-US" sz="1300" dirty="0"/>
+          </a:p>
+        </p:txBody>
+      </p:sp>
+      <p:sp>
+        <p:nvSpPr>
+          <p:cNvPr id="19" name="Text 15"/>
+          <p:cNvSpPr txBox="1"/>
+          <p:nvPr/>
+        </p:nvSpPr>
+        <p:spPr>
+          <a:xfrm>
+            <a:off x="6217920" y="5486400"/>
+            <a:ext cx="5394960" cy="640080"/>
+          </a:xfrm>
+          <a:prstGeom prst="rect">
+            <a:avLst/>
+          </a:prstGeom>
+          <a:noFill/>
+          <a:ln/>
+        </p:spPr>
+        <p:txBody>
+          <a:bodyPr wrap="square" lIns="0" tIns="0" rIns="0" bIns="0" rtlCol="0" anchor="t"/>
+          <a:lstStyle/>
+          <a:p>
+            <a:pPr indent="0" marL="0">
+              <a:buNone/>
+            </a:pPr>
+            <a:r>
+              <a:rPr lang="en-US" sz="1400" b="1" dirty="0">
+                <a:solidFill>
+                  <a:srgbClr val="1557D6"/>
+                </a:solidFill>
+                <a:latin typeface="Yu Gothic" pitchFamily="34" charset="0"/>
+                <a:ea typeface="Yu Gothic" pitchFamily="34" charset="-122"/>
+                <a:cs typeface="Yu Gothic" pitchFamily="34" charset="-120"/>
+              </a:rPr>
+              <a:t>「給料いくら？」「シフトどうなった？」の問い合わせが減ります。</a:t>
+            </a:r>
+            <a:endParaRPr lang="en-US" sz="1400" dirty="0"/>
+          </a:p>
+        </p:txBody>
+      </p:sp>
+      <p:sp>
+        <p:nvSpPr>
+          <p:cNvPr id="20" name="Text 16"/>
+          <p:cNvSpPr txBox="1"/>
+          <p:nvPr/>
+        </p:nvSpPr>
+        <p:spPr>
+          <a:xfrm>
+            <a:off x="1280160" y="6272784"/>
+            <a:ext cx="8595360" cy="365760"/>
+          </a:xfrm>
+          <a:prstGeom prst="rect">
+            <a:avLst/>
+          </a:prstGeom>
+          <a:noFill/>
+          <a:ln/>
+        </p:spPr>
+        <p:txBody>
+          <a:bodyPr wrap="square" lIns="0" tIns="0" rIns="0" bIns="0" rtlCol="0" anchor="ctr"/>
+          <a:lstStyle/>
+          <a:p>
+            <a:pPr indent="0" marL="0">
+              <a:buNone/>
+            </a:pPr>
+            <a:r>
+              <a:rPr lang="en-US" sz="1000" dirty="0">
+                <a:solidFill>
+                  <a:srgbClr val="4A5878"/>
+                </a:solidFill>
+                <a:latin typeface="Yu Gothic" pitchFamily="34" charset="0"/>
+                <a:ea typeface="Yu Gothic" pitchFamily="34" charset="-122"/>
+                <a:cs typeface="Yu Gothic" pitchFamily="34" charset="-120"/>
+              </a:rPr>
+              <a:t>画面は見本です（名前・数字は架空）。</a:t>
+            </a:r>
+            <a:endParaRPr lang="en-US" sz="1000" dirty="0"/>
+          </a:p>
+        </p:txBody>
+      </p:sp>
+      <p:sp>
+        <p:nvSpPr>
+          <p:cNvPr id="25" name="Slide Number Placeholder 0"/>
+          <p:cNvSpPr>
+            <a:spLocks noGrp="1"/>
+          </p:cNvSpPr>
+          <p:nvPr>
+            <p:ph type="sldNum" sz="quarter" idx="4294967295"/>
+          </p:nvPr>
+        </p:nvSpPr>
+        <p:spPr>
+          <a:xfrm>
+            <a:off x="548640" y="6309360"/>
+            <a:ext cx="548640" cy="274320"/>
+          </a:xfrm>
+          <a:prstGeom prst="rect">
+            <a:avLst/>
+          </a:prstGeom>
+          <a:extLst>
+            <a:ext uri="{C572A759-6A51-4108-AA02-DFA0A04FC94B}">
+              <ma14:wrappingTextBoxFlag xmlns:ma14="http://schemas.microsoft.com/office/mac/drawingml/2011/main" val="0"/>
+            </a:ext>
+          </a:extLst>
+        </p:spPr>
+        <p:txBody>
+          <a:bodyPr/>
+          <a:lstStyle>
+            <a:lvl1pPr>
+              <a:defRPr sz="1000">
+                <a:solidFill>
+                  <a:srgbClr val="4A5878"/>
+                </a:solidFill>
+                <a:latin typeface="Yu Gothic"/>
+                <a:ea typeface="Yu Gothic"/>
+                <a:cs typeface="Yu Gothic"/>
+              </a:defRPr>
+            </a:lvl1pPr>
+          </a:lstStyle>
+          <a:p>
+            <a:pPr algn="l"/>
+            <a:fld id="{F7021451-1387-4CA6-816F-3879F97B5CBC}" type="slidenum">
+              <a:rPr b="0" lang="en-US"/>
+              <a:t>15</a:t>
+            </a:fld>
+            <a:endParaRPr lang="en-US"/>
+          </a:p>
+        </p:txBody>
+      </p:sp>
+    </p:spTree>
+  </p:cSld>
+  <p:clrMapOvr>
+    <a:masterClrMapping/>
+  </p:clrMapOvr>
+</p:sld>
+</file>
+
+<file path=ppt/slides/slide16.xml><?xml version="1.0" encoding="utf-8"?>
+<p:sld xmlns:a="http://schemas.openxmlformats.org/drawingml/2006/main" xmlns:r="http://schemas.openxmlformats.org/officeDocument/2006/relationships" xmlns:p="http://schemas.openxmlformats.org/presentationml/2006/main">
+  <p:cSld name="Slide 16">
+    <p:spTree>
+      <p:nvGrpSpPr>
+        <p:cNvPr id="1" name=""/>
+        <p:cNvGrpSpPr/>
+        <p:nvPr/>
+      </p:nvGrpSpPr>
+      <p:grpSpPr>
+        <a:xfrm>
+          <a:off x="0" y="0"/>
+          <a:ext cx="0" cy="0"/>
+          <a:chOff x="0" y="0"/>
+          <a:chExt cx="0" cy="0"/>
+        </a:xfrm>
+      </p:grpSpPr>
+      <p:sp>
+        <p:nvSpPr>
+          <p:cNvPr id="2" name="Text 0"/>
+          <p:cNvSpPr/>
+          <p:nvPr>
+            <p:ph idx="100" type="title" hasCustomPrompt="1"/>
+          </p:nvPr>
+        </p:nvSpPr>
+        <p:spPr>
+          <a:xfrm>
+            <a:off x="548640" y="365760"/>
+            <a:ext cx="11064240" cy="822960"/>
+          </a:xfrm>
+          <a:prstGeom prst="rect">
+            <a:avLst/>
+          </a:prstGeom>
+          <a:noFill/>
+          <a:ln/>
+        </p:spPr>
+        <p:txBody>
+          <a:bodyPr wrap="square" lIns="0" tIns="0" rIns="0" bIns="0" rtlCol="0" anchor="ctr"/>
+          <a:lstStyle/>
+          <a:p>
+            <a:pPr indent="0" marL="0">
+              <a:buNone/>
+            </a:pPr>
+            <a:r>
+              <a:rPr lang="en-US" sz="3000" b="1" dirty="0">
+                <a:solidFill>
+                  <a:srgbClr val="13234A"/>
+                </a:solidFill>
+                <a:latin typeface="Yu Gothic" pitchFamily="34" charset="0"/>
+                <a:ea typeface="Yu Gothic" pitchFamily="34" charset="-122"/>
+                <a:cs typeface="Yu Gothic" pitchFamily="34" charset="-120"/>
+              </a:rPr>
+              <a:t>AI面接は、スタンダードの料金にふくまれています</a:t>
+            </a:r>
+            <a:endParaRPr lang="en-US" sz="3000" dirty="0"/>
+          </a:p>
+        </p:txBody>
+      </p:sp>
+      <p:sp>
+        <p:nvSpPr>
+          <p:cNvPr id="3" name="Shape 1"/>
+          <p:cNvSpPr/>
+          <p:nvPr/>
+        </p:nvSpPr>
+        <p:spPr>
+          <a:xfrm>
+            <a:off x="548640" y="1417320"/>
+            <a:ext cx="3520440" cy="4343400"/>
+          </a:xfrm>
+          <a:prstGeom prst="roundRect">
+            <a:avLst>
+              <a:gd name="adj" fmla="val 3896"/>
+            </a:avLst>
+          </a:prstGeom>
+          <a:solidFill>
+            <a:srgbClr val="F2F6FD"/>
+          </a:solidFill>
+          <a:ln w="12700">
+            <a:solidFill>
+              <a:srgbClr val="F2F6FD"/>
+            </a:solidFill>
+            <a:prstDash val="solid"/>
+          </a:ln>
+        </p:spPr>
+      </p:sp>
+      <p:sp>
+        <p:nvSpPr>
+          <p:cNvPr id="4" name="Text 2"/>
+          <p:cNvSpPr txBox="1"/>
+          <p:nvPr/>
+        </p:nvSpPr>
+        <p:spPr>
+          <a:xfrm>
+            <a:off x="822960" y="1737360"/>
+            <a:ext cx="2971800" cy="457200"/>
+          </a:xfrm>
+          <a:prstGeom prst="rect">
+            <a:avLst/>
+          </a:prstGeom>
+          <a:noFill/>
+          <a:ln/>
+        </p:spPr>
+        <p:txBody>
+          <a:bodyPr wrap="square" lIns="0" tIns="0" rIns="0" bIns="0" rtlCol="0" anchor="t"/>
+          <a:lstStyle/>
+          <a:p>
+            <a:pPr indent="0" marL="0">
+              <a:buNone/>
+            </a:pPr>
+            <a:r>
+              <a:rPr lang="en-US" sz="2000" b="1" dirty="0">
+                <a:solidFill>
+                  <a:srgbClr val="13234A"/>
+                </a:solidFill>
+                <a:latin typeface="Yu Gothic" pitchFamily="34" charset="0"/>
+                <a:ea typeface="Yu Gothic" pitchFamily="34" charset="-122"/>
+                <a:cs typeface="Yu Gothic" pitchFamily="34" charset="-120"/>
+              </a:rPr>
+              <a:t>ライトプラン</a:t>
+            </a:r>
+            <a:endParaRPr lang="en-US" sz="2000" dirty="0"/>
+          </a:p>
+        </p:txBody>
+      </p:sp>
+      <p:sp>
+        <p:nvSpPr>
+          <p:cNvPr id="5" name="Text 3"/>
+          <p:cNvSpPr txBox="1"/>
+          <p:nvPr/>
+        </p:nvSpPr>
+        <p:spPr>
+          <a:xfrm>
+            <a:off x="822960" y="2194560"/>
+            <a:ext cx="2971800" cy="320040"/>
+          </a:xfrm>
+          <a:prstGeom prst="rect">
+            <a:avLst/>
+          </a:prstGeom>
+          <a:noFill/>
+          <a:ln/>
+        </p:spPr>
+        <p:txBody>
+          <a:bodyPr wrap="square" lIns="0" tIns="0" rIns="0" bIns="0" rtlCol="0" anchor="t"/>
+          <a:lstStyle/>
+          <a:p>
+            <a:pPr indent="0" marL="0">
+              <a:buNone/>
+            </a:pPr>
+            <a:r>
+              <a:rPr lang="en-US" sz="1300" dirty="0">
+                <a:solidFill>
+                  <a:srgbClr val="4A5878"/>
+                </a:solidFill>
+                <a:latin typeface="Yu Gothic" pitchFamily="34" charset="0"/>
+                <a:ea typeface="Yu Gothic" pitchFamily="34" charset="-122"/>
+                <a:cs typeface="Yu Gothic" pitchFamily="34" charset="-120"/>
+              </a:rPr>
+              <a:t>お会計と売上を、まず楽に</a:t>
+            </a:r>
+            <a:endParaRPr lang="en-US" sz="1300" dirty="0"/>
+          </a:p>
+        </p:txBody>
+      </p:sp>
+      <p:sp>
+        <p:nvSpPr>
+          <p:cNvPr id="6" name="Text 4"/>
+          <p:cNvSpPr txBox="1"/>
+          <p:nvPr/>
+        </p:nvSpPr>
+        <p:spPr>
+          <a:xfrm>
+            <a:off x="822960" y="2560320"/>
+            <a:ext cx="2971800" cy="548640"/>
+          </a:xfrm>
+          <a:prstGeom prst="rect">
+            <a:avLst/>
+          </a:prstGeom>
+          <a:noFill/>
+          <a:ln/>
+        </p:spPr>
+        <p:txBody>
+          <a:bodyPr wrap="square" lIns="0" tIns="0" rIns="0" bIns="0" rtlCol="0" anchor="ctr"/>
+          <a:lstStyle/>
+          <a:p>
+            <a:pPr indent="0" marL="0">
+              <a:buNone/>
+            </a:pPr>
+            <a:r>
+              <a:rPr lang="en-US" sz="1300" dirty="0">
+                <a:solidFill>
+                  <a:srgbClr val="13234A"/>
+                </a:solidFill>
+                <a:latin typeface="Yu Gothic" pitchFamily="34" charset="0"/>
+                <a:ea typeface="Yu Gothic" pitchFamily="34" charset="-122"/>
+                <a:cs typeface="Yu Gothic" pitchFamily="34" charset="-120"/>
+              </a:rPr>
+              <a:t>月額 </a:t>
+            </a:r>
+            <a:pPr indent="0" marL="0">
+              <a:buNone/>
+            </a:pPr>
+            <a:r>
+              <a:rPr lang="en-US" sz="2400" b="1" dirty="0">
+                <a:solidFill>
+                  <a:srgbClr val="13234A"/>
+                </a:solidFill>
+                <a:latin typeface="Yu Gothic" pitchFamily="34" charset="0"/>
+                <a:ea typeface="Yu Gothic" pitchFamily="34" charset="-122"/>
+                <a:cs typeface="Yu Gothic" pitchFamily="34" charset="-120"/>
+              </a:rPr>
+              <a:t>11,000円</a:t>
+            </a:r>
+            <a:pPr indent="0" marL="0">
+              <a:buNone/>
+            </a:pPr>
+            <a:r>
+              <a:rPr lang="en-US" sz="1100" dirty="0">
+                <a:solidFill>
+                  <a:srgbClr val="13234A"/>
+                </a:solidFill>
+                <a:latin typeface="Yu Gothic" pitchFamily="34" charset="0"/>
+                <a:ea typeface="Yu Gothic" pitchFamily="34" charset="-122"/>
+                <a:cs typeface="Yu Gothic" pitchFamily="34" charset="-120"/>
+              </a:rPr>
+              <a:t>（税込）</a:t>
+            </a:r>
+            <a:endParaRPr lang="en-US" sz="1500" dirty="0"/>
+          </a:p>
+        </p:txBody>
+      </p:sp>
+      <p:sp>
+        <p:nvSpPr>
+          <p:cNvPr id="7" name="Text 5"/>
+          <p:cNvSpPr txBox="1"/>
+          <p:nvPr/>
+        </p:nvSpPr>
+        <p:spPr>
+          <a:xfrm>
+            <a:off x="822960" y="3794760"/>
+            <a:ext cx="2971800" cy="1828800"/>
+          </a:xfrm>
+          <a:prstGeom prst="rect">
+            <a:avLst/>
+          </a:prstGeom>
+          <a:noFill/>
+          <a:ln/>
+        </p:spPr>
+        <p:txBody>
+          <a:bodyPr wrap="square" lIns="0" tIns="0" rIns="0" bIns="0" rtlCol="0" anchor="t"/>
+          <a:lstStyle/>
+          <a:p>
+            <a:pPr marL="342900" indent="-342900">
+              <a:spcAft>
+                <a:spcPts val="600"/>
+              </a:spcAft>
+              <a:buSzPct val="100000"/>
+              <a:buChar char="•"/>
+            </a:pPr>
+            <a:r>
+              <a:rPr lang="en-US" sz="1400" dirty="0">
+                <a:solidFill>
+                  <a:srgbClr val="13234A"/>
+                </a:solidFill>
+                <a:latin typeface="Yu Gothic" pitchFamily="34" charset="0"/>
+                <a:ea typeface="Yu Gothic" pitchFamily="34" charset="-122"/>
+                <a:cs typeface="Yu Gothic" pitchFamily="34" charset="-120"/>
+              </a:rPr>
+              <a:t>注文・会計・伝票</a:t>
+            </a:r>
+            <a:endParaRPr lang="en-US" sz="1400" dirty="0"/>
+          </a:p>
+          <a:p>
+            <a:pPr marL="342900" indent="-342900">
+              <a:spcAft>
+                <a:spcPts val="600"/>
+              </a:spcAft>
+              <a:buSzPct val="100000"/>
+              <a:buChar char="•"/>
+            </a:pPr>
+            <a:r>
+              <a:rPr lang="en-US" sz="1400" dirty="0">
+                <a:solidFill>
+                  <a:srgbClr val="13234A"/>
+                </a:solidFill>
+                <a:latin typeface="Yu Gothic" pitchFamily="34" charset="0"/>
+                <a:ea typeface="Yu Gothic" pitchFamily="34" charset="-122"/>
+                <a:cs typeface="Yu Gothic" pitchFamily="34" charset="-120"/>
+              </a:rPr>
+              <a:t>QR注文・厨房の画面</a:t>
+            </a:r>
+            <a:endParaRPr lang="en-US" sz="1400" dirty="0"/>
+          </a:p>
+          <a:p>
+            <a:pPr marL="342900" indent="-342900">
+              <a:spcAft>
+                <a:spcPts val="600"/>
+              </a:spcAft>
+              <a:buSzPct val="100000"/>
+              <a:buChar char="•"/>
+            </a:pPr>
+            <a:r>
+              <a:rPr lang="en-US" sz="1400" dirty="0">
+                <a:solidFill>
+                  <a:srgbClr val="13234A"/>
+                </a:solidFill>
+                <a:latin typeface="Yu Gothic" pitchFamily="34" charset="0"/>
+                <a:ea typeface="Yu Gothic" pitchFamily="34" charset="-122"/>
+                <a:cs typeface="Yu Gothic" pitchFamily="34" charset="-120"/>
+              </a:rPr>
+              <a:t>ポイント・会員証</a:t>
+            </a:r>
+            <a:endParaRPr lang="en-US" sz="1400" dirty="0"/>
+          </a:p>
+          <a:p>
+            <a:pPr marL="342900" indent="-342900">
+              <a:spcAft>
+                <a:spcPts val="600"/>
+              </a:spcAft>
+              <a:buSzPct val="100000"/>
+              <a:buChar char="•"/>
+            </a:pPr>
+            <a:r>
+              <a:rPr lang="en-US" sz="1400" dirty="0">
+                <a:solidFill>
+                  <a:srgbClr val="13234A"/>
+                </a:solidFill>
+                <a:latin typeface="Yu Gothic" pitchFamily="34" charset="0"/>
+                <a:ea typeface="Yu Gothic" pitchFamily="34" charset="-122"/>
+                <a:cs typeface="Yu Gothic" pitchFamily="34" charset="-120"/>
+              </a:rPr>
+              <a:t>Square・レシート印刷</a:t>
+            </a:r>
+            <a:endParaRPr lang="en-US" sz="1400" dirty="0"/>
+          </a:p>
+        </p:txBody>
+      </p:sp>
+      <p:sp>
+        <p:nvSpPr>
+          <p:cNvPr id="8" name="Shape 6"/>
+          <p:cNvSpPr/>
+          <p:nvPr/>
+        </p:nvSpPr>
+        <p:spPr>
+          <a:xfrm>
+            <a:off x="4325112" y="1417320"/>
+            <a:ext cx="3520440" cy="4343400"/>
+          </a:xfrm>
+          <a:prstGeom prst="roundRect">
+            <a:avLst>
+              <a:gd name="adj" fmla="val 3896"/>
+            </a:avLst>
+          </a:prstGeom>
+          <a:solidFill>
+            <a:srgbClr val="FFFFFF"/>
+          </a:solidFill>
+          <a:ln w="31750">
+            <a:solidFill>
+              <a:srgbClr val="1557D6"/>
+            </a:solidFill>
+            <a:prstDash val="solid"/>
+          </a:ln>
+          <a:effectLst>
+            <a:outerShdw sx="100000" sy="100000" kx="0" ky="0" algn="bl" rotWithShape="0" blurRad="152400" dist="50800" dir="5400000">
+              <a:srgbClr val="1557D6">
+                <a:alpha val="25000"/>
+              </a:srgbClr>
+            </a:outerShdw>
+          </a:effectLst>
+        </p:spPr>
+      </p:sp>
+      <p:sp>
+        <p:nvSpPr>
+          <p:cNvPr id="9" name="Shape 7"/>
+          <p:cNvSpPr/>
+          <p:nvPr/>
+        </p:nvSpPr>
+        <p:spPr>
+          <a:xfrm>
+            <a:off x="4599432" y="1234440"/>
+            <a:ext cx="2377440" cy="384048"/>
+          </a:xfrm>
+          <a:prstGeom prst="roundRect">
+            <a:avLst>
+              <a:gd name="adj" fmla="val 50000"/>
+            </a:avLst>
+          </a:prstGeom>
+          <a:solidFill>
+            <a:srgbClr val="1557D6"/>
+          </a:solidFill>
+          <a:ln w="12700">
+            <a:solidFill>
+              <a:srgbClr val="1557D6"/>
+            </a:solidFill>
+            <a:prstDash val="solid"/>
+          </a:ln>
+        </p:spPr>
+      </p:sp>
+      <p:sp>
+        <p:nvSpPr>
+          <p:cNvPr id="10" name="Text 8"/>
+          <p:cNvSpPr txBox="1"/>
+          <p:nvPr/>
+        </p:nvSpPr>
+        <p:spPr>
+          <a:xfrm>
+            <a:off x="4599432" y="1234440"/>
+            <a:ext cx="2377440" cy="384048"/>
+          </a:xfrm>
+          <a:prstGeom prst="rect">
+            <a:avLst/>
+          </a:prstGeom>
+          <a:noFill/>
+          <a:ln/>
+        </p:spPr>
+        <p:txBody>
+          <a:bodyPr wrap="square" lIns="0" tIns="0" rIns="0" bIns="0" rtlCol="0" anchor="ctr"/>
+          <a:lstStyle/>
+          <a:p>
+            <a:pPr algn="ctr" indent="0" marL="0">
+              <a:buNone/>
+            </a:pPr>
+            <a:r>
+              <a:rPr lang="en-US" sz="1200" b="1" dirty="0">
+                <a:solidFill>
+                  <a:srgbClr val="FFFFFF"/>
+                </a:solidFill>
+                <a:latin typeface="Yu Gothic" pitchFamily="34" charset="0"/>
+                <a:ea typeface="Yu Gothic" pitchFamily="34" charset="-122"/>
+                <a:cs typeface="Yu Gothic" pitchFamily="34" charset="-120"/>
+              </a:rPr>
+              <a:t>キャンペーン価格・おすすめ</a:t>
+            </a:r>
+            <a:endParaRPr lang="en-US" sz="1200" dirty="0"/>
+          </a:p>
+        </p:txBody>
+      </p:sp>
+      <p:sp>
+        <p:nvSpPr>
+          <p:cNvPr id="11" name="Text 9"/>
+          <p:cNvSpPr txBox="1"/>
+          <p:nvPr/>
+        </p:nvSpPr>
+        <p:spPr>
+          <a:xfrm>
+            <a:off x="4599432" y="1737360"/>
+            <a:ext cx="2971800" cy="457200"/>
+          </a:xfrm>
+          <a:prstGeom prst="rect">
+            <a:avLst/>
+          </a:prstGeom>
+          <a:noFill/>
+          <a:ln/>
+        </p:spPr>
+        <p:txBody>
+          <a:bodyPr wrap="square" lIns="0" tIns="0" rIns="0" bIns="0" rtlCol="0" anchor="t"/>
+          <a:lstStyle/>
+          <a:p>
+            <a:pPr indent="0" marL="0">
+              <a:buNone/>
+            </a:pPr>
+            <a:r>
+              <a:rPr lang="en-US" sz="2000" b="1" dirty="0">
+                <a:solidFill>
+                  <a:srgbClr val="13234A"/>
+                </a:solidFill>
+                <a:latin typeface="Yu Gothic" pitchFamily="34" charset="0"/>
+                <a:ea typeface="Yu Gothic" pitchFamily="34" charset="-122"/>
+                <a:cs typeface="Yu Gothic" pitchFamily="34" charset="-120"/>
+              </a:rPr>
+              <a:t>スタンダードプラン</a:t>
+            </a:r>
+            <a:endParaRPr lang="en-US" sz="2000" dirty="0"/>
+          </a:p>
+        </p:txBody>
+      </p:sp>
+      <p:sp>
+        <p:nvSpPr>
+          <p:cNvPr id="12" name="Text 10"/>
+          <p:cNvSpPr txBox="1"/>
+          <p:nvPr/>
+        </p:nvSpPr>
+        <p:spPr>
+          <a:xfrm>
+            <a:off x="4599432" y="2194560"/>
+            <a:ext cx="2971800" cy="320040"/>
+          </a:xfrm>
+          <a:prstGeom prst="rect">
+            <a:avLst/>
+          </a:prstGeom>
+          <a:noFill/>
+          <a:ln/>
+        </p:spPr>
+        <p:txBody>
+          <a:bodyPr wrap="square" lIns="0" tIns="0" rIns="0" bIns="0" rtlCol="0" anchor="t"/>
+          <a:lstStyle/>
+          <a:p>
+            <a:pPr indent="0" marL="0">
+              <a:buNone/>
+            </a:pPr>
+            <a:r>
+              <a:rPr lang="en-US" sz="1300" dirty="0">
+                <a:solidFill>
+                  <a:srgbClr val="4A5878"/>
+                </a:solidFill>
+                <a:latin typeface="Yu Gothic" pitchFamily="34" charset="0"/>
+                <a:ea typeface="Yu Gothic" pitchFamily="34" charset="-122"/>
+                <a:cs typeface="Yu Gothic" pitchFamily="34" charset="-120"/>
+              </a:rPr>
+              <a:t>お店の運営を、まるごと</a:t>
+            </a:r>
+            <a:endParaRPr lang="en-US" sz="1300" dirty="0"/>
+          </a:p>
+        </p:txBody>
+      </p:sp>
+      <p:sp>
+        <p:nvSpPr>
+          <p:cNvPr id="13" name="Text 11"/>
+          <p:cNvSpPr txBox="1"/>
+          <p:nvPr/>
+        </p:nvSpPr>
+        <p:spPr>
+          <a:xfrm>
+            <a:off x="4599432" y="2514600"/>
+            <a:ext cx="2971800" cy="274320"/>
+          </a:xfrm>
+          <a:prstGeom prst="rect">
+            <a:avLst/>
+          </a:prstGeom>
+          <a:noFill/>
+          <a:ln/>
+        </p:spPr>
+        <p:txBody>
+          <a:bodyPr wrap="square" lIns="0" tIns="0" rIns="0" bIns="0" rtlCol="0" anchor="t"/>
+          <a:lstStyle/>
+          <a:p>
+            <a:pPr indent="0" marL="0">
+              <a:buNone/>
+            </a:pPr>
+            <a:r>
+              <a:rPr lang="en-US" sz="1200" dirty="0">
+                <a:solidFill>
+                  <a:srgbClr val="4A5878"/>
+                </a:solidFill>
+                <a:latin typeface="Yu Gothic" pitchFamily="34" charset="0"/>
+                <a:ea typeface="Yu Gothic" pitchFamily="34" charset="-122"/>
+                <a:cs typeface="Yu Gothic" pitchFamily="34" charset="-120"/>
+              </a:rPr>
+              <a:t>月額（税込）</a:t>
+            </a:r>
+            <a:endParaRPr lang="en-US" sz="1200" dirty="0"/>
+          </a:p>
+        </p:txBody>
+      </p:sp>
+      <p:sp>
+        <p:nvSpPr>
+          <p:cNvPr id="14" name="Text 12"/>
+          <p:cNvSpPr txBox="1"/>
+          <p:nvPr/>
+        </p:nvSpPr>
+        <p:spPr>
+          <a:xfrm>
+            <a:off x="4599432" y="2743200"/>
+            <a:ext cx="2971800" cy="685800"/>
+          </a:xfrm>
+          <a:prstGeom prst="rect">
+            <a:avLst/>
+          </a:prstGeom>
+          <a:noFill/>
+          <a:ln/>
+        </p:spPr>
+        <p:txBody>
+          <a:bodyPr wrap="square" lIns="0" tIns="0" rIns="0" bIns="0" rtlCol="0" anchor="t"/>
+          <a:lstStyle/>
+          <a:p>
+            <a:pPr indent="0" marL="0">
+              <a:lnSpc>
+                <a:spcPct val="100000"/>
+              </a:lnSpc>
+              <a:buNone/>
+            </a:pPr>
+            <a:r>
+              <a:rPr lang="en-US" sz="1900" b="1" dirty="0">
+                <a:solidFill>
+                  <a:srgbClr val="1557D6"/>
+                </a:solidFill>
+                <a:latin typeface="Yu Gothic" pitchFamily="34" charset="0"/>
+                <a:ea typeface="Yu Gothic" pitchFamily="34" charset="-122"/>
+                <a:cs typeface="Yu Gothic" pitchFamily="34" charset="-120"/>
+              </a:rPr>
+              <a:t>昼 22,000円</a:t>
+            </a:r>
+            <a:endParaRPr lang="en-US" sz="1900" dirty="0"/>
+          </a:p>
+          <a:p>
+            <a:pPr indent="0" marL="0">
+              <a:lnSpc>
+                <a:spcPct val="100000"/>
+              </a:lnSpc>
+              <a:buNone/>
+            </a:pPr>
+            <a:r>
+              <a:rPr lang="en-US" sz="1900" b="1" dirty="0">
+                <a:solidFill>
+                  <a:srgbClr val="1557D6"/>
+                </a:solidFill>
+                <a:latin typeface="Yu Gothic" pitchFamily="34" charset="0"/>
+                <a:ea typeface="Yu Gothic" pitchFamily="34" charset="-122"/>
+                <a:cs typeface="Yu Gothic" pitchFamily="34" charset="-120"/>
+              </a:rPr>
+              <a:t>夜 33,000円</a:t>
+            </a:r>
+            <a:endParaRPr lang="en-US" sz="1900" dirty="0"/>
+          </a:p>
+        </p:txBody>
+      </p:sp>
+      <p:sp>
+        <p:nvSpPr>
+          <p:cNvPr id="15" name="Text 13"/>
+          <p:cNvSpPr txBox="1"/>
+          <p:nvPr/>
+        </p:nvSpPr>
+        <p:spPr>
+          <a:xfrm>
+            <a:off x="4599432" y="3429000"/>
+            <a:ext cx="2971800" cy="274320"/>
+          </a:xfrm>
+          <a:prstGeom prst="rect">
+            <a:avLst/>
+          </a:prstGeom>
+          <a:noFill/>
+          <a:ln/>
+        </p:spPr>
+        <p:txBody>
+          <a:bodyPr wrap="square" lIns="0" tIns="0" rIns="0" bIns="0" rtlCol="0" anchor="t"/>
+          <a:lstStyle/>
+          <a:p>
+            <a:pPr indent="0" marL="0">
+              <a:buNone/>
+            </a:pPr>
+            <a:r>
+              <a:rPr lang="en-US" sz="1100" dirty="0">
+                <a:solidFill>
+                  <a:srgbClr val="4A5878"/>
+                </a:solidFill>
+                <a:latin typeface="Yu Gothic" pitchFamily="34" charset="0"/>
+                <a:ea typeface="Yu Gothic" pitchFamily="34" charset="-122"/>
+                <a:cs typeface="Yu Gothic" pitchFamily="34" charset="-120"/>
+              </a:rPr>
+              <a:t>通常 昼33,000円／夜40,000円</a:t>
+            </a:r>
+            <a:endParaRPr lang="en-US" sz="1100" dirty="0"/>
+          </a:p>
+        </p:txBody>
+      </p:sp>
+      <p:sp>
+        <p:nvSpPr>
+          <p:cNvPr id="16" name="Text 14"/>
+          <p:cNvSpPr txBox="1"/>
+          <p:nvPr/>
+        </p:nvSpPr>
+        <p:spPr>
+          <a:xfrm>
+            <a:off x="4599432" y="3794760"/>
+            <a:ext cx="2971800" cy="1828800"/>
+          </a:xfrm>
+          <a:prstGeom prst="rect">
+            <a:avLst/>
+          </a:prstGeom>
+          <a:noFill/>
+          <a:ln/>
+        </p:spPr>
+        <p:txBody>
+          <a:bodyPr wrap="square" lIns="0" tIns="0" rIns="0" bIns="0" rtlCol="0" anchor="t"/>
+          <a:lstStyle/>
+          <a:p>
+            <a:pPr marL="342900" indent="-342900">
+              <a:spcAft>
+                <a:spcPts val="600"/>
+              </a:spcAft>
+              <a:buSzPct val="100000"/>
+              <a:buChar char="•"/>
+            </a:pPr>
+            <a:r>
+              <a:rPr lang="en-US" sz="1400" dirty="0">
+                <a:solidFill>
+                  <a:srgbClr val="13234A"/>
+                </a:solidFill>
+                <a:latin typeface="Yu Gothic" pitchFamily="34" charset="0"/>
+                <a:ea typeface="Yu Gothic" pitchFamily="34" charset="-122"/>
+                <a:cs typeface="Yu Gothic" pitchFamily="34" charset="-120"/>
+              </a:rPr>
+              <a:t>ライトの機能すべて</a:t>
+            </a:r>
+            <a:endParaRPr lang="en-US" sz="1400" dirty="0"/>
+          </a:p>
+          <a:p>
+            <a:pPr marL="342900" indent="-342900">
+              <a:spcAft>
+                <a:spcPts val="600"/>
+              </a:spcAft>
+              <a:buSzPct val="100000"/>
+              <a:buChar char="•"/>
+            </a:pPr>
+            <a:r>
+              <a:rPr lang="en-US" sz="1400" dirty="0">
+                <a:solidFill>
+                  <a:srgbClr val="13234A"/>
+                </a:solidFill>
+                <a:latin typeface="Yu Gothic" pitchFamily="34" charset="0"/>
+                <a:ea typeface="Yu Gothic" pitchFamily="34" charset="-122"/>
+                <a:cs typeface="Yu Gothic" pitchFamily="34" charset="-120"/>
+              </a:rPr>
+              <a:t>打刻・シフト・給料</a:t>
+            </a:r>
+            <a:endParaRPr lang="en-US" sz="1400" dirty="0"/>
+          </a:p>
+          <a:p>
+            <a:pPr marL="342900" indent="-342900">
+              <a:spcAft>
+                <a:spcPts val="600"/>
+              </a:spcAft>
+              <a:buSzPct val="100000"/>
+              <a:buChar char="•"/>
+            </a:pPr>
+            <a:r>
+              <a:rPr lang="en-US" sz="1400" dirty="0">
+                <a:solidFill>
+                  <a:srgbClr val="13234A"/>
+                </a:solidFill>
+                <a:latin typeface="Yu Gothic" pitchFamily="34" charset="0"/>
+                <a:ea typeface="Yu Gothic" pitchFamily="34" charset="-122"/>
+                <a:cs typeface="Yu Gothic" pitchFamily="34" charset="-120"/>
+              </a:rPr>
+              <a:t>顧客・クーポン・お金・日報</a:t>
+            </a:r>
+            <a:endParaRPr lang="en-US" sz="1400" dirty="0"/>
+          </a:p>
+          <a:p>
+            <a:pPr marL="342900" indent="-342900">
+              <a:spcAft>
+                <a:spcPts val="600"/>
+              </a:spcAft>
+              <a:buSzPct val="100000"/>
+              <a:buChar char="•"/>
+            </a:pPr>
+            <a:r>
+              <a:rPr lang="en-US" sz="1400" b="1" dirty="0">
+                <a:solidFill>
+                  <a:srgbClr val="1557D6"/>
+                </a:solidFill>
+                <a:latin typeface="Yu Gothic" pitchFamily="34" charset="0"/>
+                <a:ea typeface="Yu Gothic" pitchFamily="34" charset="-122"/>
+                <a:cs typeface="Yu Gothic" pitchFamily="34" charset="-120"/>
+              </a:rPr>
+              <a:t>AI面接（追加料金なし）</a:t>
+            </a:r>
+            <a:endParaRPr lang="en-US" sz="1400" dirty="0"/>
+          </a:p>
+        </p:txBody>
+      </p:sp>
+      <p:sp>
+        <p:nvSpPr>
+          <p:cNvPr id="17" name="Shape 15"/>
+          <p:cNvSpPr/>
+          <p:nvPr/>
+        </p:nvSpPr>
+        <p:spPr>
+          <a:xfrm>
+            <a:off x="8101584" y="1417320"/>
+            <a:ext cx="3520440" cy="4343400"/>
+          </a:xfrm>
+          <a:prstGeom prst="roundRect">
+            <a:avLst>
+              <a:gd name="adj" fmla="val 3896"/>
+            </a:avLst>
+          </a:prstGeom>
+          <a:solidFill>
+            <a:srgbClr val="F2F6FD"/>
+          </a:solidFill>
+          <a:ln w="12700">
+            <a:solidFill>
+              <a:srgbClr val="F2F6FD"/>
+            </a:solidFill>
+            <a:prstDash val="solid"/>
+          </a:ln>
+        </p:spPr>
+      </p:sp>
+      <p:sp>
+        <p:nvSpPr>
+          <p:cNvPr id="18" name="Text 16"/>
+          <p:cNvSpPr txBox="1"/>
+          <p:nvPr/>
+        </p:nvSpPr>
+        <p:spPr>
+          <a:xfrm>
+            <a:off x="8375904" y="1737360"/>
+            <a:ext cx="2971800" cy="457200"/>
+          </a:xfrm>
+          <a:prstGeom prst="rect">
+            <a:avLst/>
+          </a:prstGeom>
+          <a:noFill/>
+          <a:ln/>
+        </p:spPr>
+        <p:txBody>
+          <a:bodyPr wrap="square" lIns="0" tIns="0" rIns="0" bIns="0" rtlCol="0" anchor="t"/>
+          <a:lstStyle/>
+          <a:p>
+            <a:pPr indent="0" marL="0">
+              <a:buNone/>
+            </a:pPr>
+            <a:r>
+              <a:rPr lang="en-US" sz="2000" b="1" dirty="0">
+                <a:solidFill>
+                  <a:srgbClr val="13234A"/>
+                </a:solidFill>
+                <a:latin typeface="Yu Gothic" pitchFamily="34" charset="0"/>
+                <a:ea typeface="Yu Gothic" pitchFamily="34" charset="-122"/>
+                <a:cs typeface="Yu Gothic" pitchFamily="34" charset="-120"/>
+              </a:rPr>
+              <a:t>個別プラン</a:t>
+            </a:r>
+            <a:endParaRPr lang="en-US" sz="2000" dirty="0"/>
+          </a:p>
+        </p:txBody>
+      </p:sp>
+      <p:sp>
+        <p:nvSpPr>
+          <p:cNvPr id="19" name="Text 17"/>
+          <p:cNvSpPr txBox="1"/>
+          <p:nvPr/>
+        </p:nvSpPr>
+        <p:spPr>
+          <a:xfrm>
+            <a:off x="8375904" y="2194560"/>
+            <a:ext cx="2971800" cy="320040"/>
+          </a:xfrm>
+          <a:prstGeom prst="rect">
+            <a:avLst/>
+          </a:prstGeom>
+          <a:noFill/>
+          <a:ln/>
+        </p:spPr>
+        <p:txBody>
+          <a:bodyPr wrap="square" lIns="0" tIns="0" rIns="0" bIns="0" rtlCol="0" anchor="t"/>
+          <a:lstStyle/>
+          <a:p>
+            <a:pPr indent="0" marL="0">
+              <a:buNone/>
+            </a:pPr>
+            <a:r>
+              <a:rPr lang="en-US" sz="1300" dirty="0">
+                <a:solidFill>
+                  <a:srgbClr val="4A5878"/>
+                </a:solidFill>
+                <a:latin typeface="Yu Gothic" pitchFamily="34" charset="0"/>
+                <a:ea typeface="Yu Gothic" pitchFamily="34" charset="-122"/>
+                <a:cs typeface="Yu Gothic" pitchFamily="34" charset="-120"/>
+              </a:rPr>
+              <a:t>お店のやり方に合わせて</a:t>
+            </a:r>
+            <a:endParaRPr lang="en-US" sz="1300" dirty="0"/>
+          </a:p>
+        </p:txBody>
+      </p:sp>
+      <p:sp>
+        <p:nvSpPr>
+          <p:cNvPr id="20" name="Text 18"/>
+          <p:cNvSpPr txBox="1"/>
+          <p:nvPr/>
+        </p:nvSpPr>
+        <p:spPr>
+          <a:xfrm>
+            <a:off x="8375904" y="2560320"/>
+            <a:ext cx="2971800" cy="548640"/>
+          </a:xfrm>
+          <a:prstGeom prst="rect">
+            <a:avLst/>
+          </a:prstGeom>
+          <a:noFill/>
+          <a:ln/>
+        </p:spPr>
+        <p:txBody>
+          <a:bodyPr wrap="square" lIns="0" tIns="0" rIns="0" bIns="0" rtlCol="0" anchor="ctr"/>
+          <a:lstStyle/>
+          <a:p>
+            <a:pPr indent="0" marL="0">
+              <a:buNone/>
+            </a:pPr>
+            <a:r>
+              <a:rPr lang="en-US" sz="1300" dirty="0">
+                <a:solidFill>
+                  <a:srgbClr val="13234A"/>
+                </a:solidFill>
+                <a:latin typeface="Yu Gothic" pitchFamily="34" charset="0"/>
+                <a:ea typeface="Yu Gothic" pitchFamily="34" charset="-122"/>
+                <a:cs typeface="Yu Gothic" pitchFamily="34" charset="-120"/>
+              </a:rPr>
+              <a:t>月額 </a:t>
+            </a:r>
+            <a:pPr indent="0" marL="0">
+              <a:buNone/>
+            </a:pPr>
+            <a:r>
+              <a:rPr lang="en-US" sz="2400" b="1" dirty="0">
+                <a:solidFill>
+                  <a:srgbClr val="13234A"/>
+                </a:solidFill>
+                <a:latin typeface="Yu Gothic" pitchFamily="34" charset="0"/>
+                <a:ea typeface="Yu Gothic" pitchFamily="34" charset="-122"/>
+                <a:cs typeface="Yu Gothic" pitchFamily="34" charset="-120"/>
+              </a:rPr>
+              <a:t>55,000円〜</a:t>
+            </a:r>
+            <a:pPr indent="0" marL="0">
+              <a:buNone/>
+            </a:pPr>
+            <a:r>
+              <a:rPr lang="en-US" sz="1100" dirty="0">
+                <a:solidFill>
+                  <a:srgbClr val="13234A"/>
+                </a:solidFill>
+                <a:latin typeface="Yu Gothic" pitchFamily="34" charset="0"/>
+                <a:ea typeface="Yu Gothic" pitchFamily="34" charset="-122"/>
+                <a:cs typeface="Yu Gothic" pitchFamily="34" charset="-120"/>
+              </a:rPr>
+              <a:t>（税込）</a:t>
+            </a:r>
+            <a:endParaRPr lang="en-US" sz="1500" dirty="0"/>
+          </a:p>
+        </p:txBody>
+      </p:sp>
+      <p:sp>
+        <p:nvSpPr>
+          <p:cNvPr id="21" name="Text 19"/>
+          <p:cNvSpPr txBox="1"/>
+          <p:nvPr/>
+        </p:nvSpPr>
+        <p:spPr>
+          <a:xfrm>
+            <a:off x="8375904" y="3794760"/>
+            <a:ext cx="2971800" cy="1828800"/>
+          </a:xfrm>
+          <a:prstGeom prst="rect">
+            <a:avLst/>
+          </a:prstGeom>
+          <a:noFill/>
+          <a:ln/>
+        </p:spPr>
+        <p:txBody>
+          <a:bodyPr wrap="square" lIns="0" tIns="0" rIns="0" bIns="0" rtlCol="0" anchor="t"/>
+          <a:lstStyle/>
+          <a:p>
+            <a:pPr marL="342900" indent="-342900">
+              <a:spcAft>
+                <a:spcPts val="600"/>
+              </a:spcAft>
+              <a:buSzPct val="100000"/>
+              <a:buChar char="•"/>
+            </a:pPr>
+            <a:r>
+              <a:rPr lang="en-US" sz="1400" dirty="0">
+                <a:solidFill>
+                  <a:srgbClr val="13234A"/>
+                </a:solidFill>
+                <a:latin typeface="Yu Gothic" pitchFamily="34" charset="0"/>
+                <a:ea typeface="Yu Gothic" pitchFamily="34" charset="-122"/>
+                <a:cs typeface="Yu Gothic" pitchFamily="34" charset="-120"/>
+              </a:rPr>
+              <a:t>ライト＋スタンダードの機能</a:t>
+            </a:r>
+            <a:endParaRPr lang="en-US" sz="1400" dirty="0"/>
+          </a:p>
+          <a:p>
+            <a:pPr marL="342900" indent="-342900">
+              <a:spcAft>
+                <a:spcPts val="600"/>
+              </a:spcAft>
+              <a:buSzPct val="100000"/>
+              <a:buChar char="•"/>
+            </a:pPr>
+            <a:r>
+              <a:rPr lang="en-US" sz="1400" dirty="0">
+                <a:solidFill>
+                  <a:srgbClr val="13234A"/>
+                </a:solidFill>
+                <a:latin typeface="Yu Gothic" pitchFamily="34" charset="0"/>
+                <a:ea typeface="Yu Gothic" pitchFamily="34" charset="-122"/>
+                <a:cs typeface="Yu Gothic" pitchFamily="34" charset="-120"/>
+              </a:rPr>
+              <a:t>お店独自の給料の計算</a:t>
+            </a:r>
+            <a:endParaRPr lang="en-US" sz="1400" dirty="0"/>
+          </a:p>
+          <a:p>
+            <a:pPr marL="342900" indent="-342900">
+              <a:spcAft>
+                <a:spcPts val="600"/>
+              </a:spcAft>
+              <a:buSzPct val="100000"/>
+              <a:buChar char="•"/>
+            </a:pPr>
+            <a:r>
+              <a:rPr lang="en-US" sz="1400" dirty="0">
+                <a:solidFill>
+                  <a:srgbClr val="13234A"/>
+                </a:solidFill>
+                <a:latin typeface="Yu Gothic" pitchFamily="34" charset="0"/>
+                <a:ea typeface="Yu Gothic" pitchFamily="34" charset="-122"/>
+                <a:cs typeface="Yu Gothic" pitchFamily="34" charset="-120"/>
+              </a:rPr>
+              <a:t>データの取り込み・帳票</a:t>
+            </a:r>
+            <a:endParaRPr lang="en-US" sz="1400" dirty="0"/>
+          </a:p>
+          <a:p>
+            <a:pPr marL="342900" indent="-342900">
+              <a:spcAft>
+                <a:spcPts val="600"/>
+              </a:spcAft>
+              <a:buSzPct val="100000"/>
+              <a:buChar char="•"/>
+            </a:pPr>
+            <a:r>
+              <a:rPr lang="en-US" sz="1400" b="1" dirty="0">
+                <a:solidFill>
+                  <a:srgbClr val="1557D6"/>
+                </a:solidFill>
+                <a:latin typeface="Yu Gothic" pitchFamily="34" charset="0"/>
+                <a:ea typeface="Yu Gothic" pitchFamily="34" charset="-122"/>
+                <a:cs typeface="Yu Gothic" pitchFamily="34" charset="-120"/>
+              </a:rPr>
+              <a:t>AI面接（追加料金なし）</a:t>
+            </a:r>
+            <a:endParaRPr lang="en-US" sz="1400" dirty="0"/>
+          </a:p>
+        </p:txBody>
+      </p:sp>
+      <p:sp>
+        <p:nvSpPr>
+          <p:cNvPr id="22" name="Text 20"/>
+          <p:cNvSpPr txBox="1"/>
+          <p:nvPr/>
+        </p:nvSpPr>
+        <p:spPr>
+          <a:xfrm>
+            <a:off x="1280160" y="6272784"/>
+            <a:ext cx="8595360" cy="365760"/>
+          </a:xfrm>
+          <a:prstGeom prst="rect">
+            <a:avLst/>
+          </a:prstGeom>
+          <a:noFill/>
+          <a:ln/>
+        </p:spPr>
+        <p:txBody>
+          <a:bodyPr wrap="square" lIns="0" tIns="0" rIns="0" bIns="0" rtlCol="0" anchor="ctr"/>
+          <a:lstStyle/>
+          <a:p>
+            <a:pPr indent="0" marL="0">
+              <a:buNone/>
+            </a:pPr>
+            <a:r>
+              <a:rPr lang="en-US" sz="1000" dirty="0">
+                <a:solidFill>
+                  <a:srgbClr val="4A5878"/>
+                </a:solidFill>
+                <a:latin typeface="Yu Gothic" pitchFamily="34" charset="0"/>
+                <a:ea typeface="Yu Gothic" pitchFamily="34" charset="-122"/>
+                <a:cs typeface="Yu Gothic" pitchFamily="34" charset="-120"/>
+              </a:rPr>
+              <a:t>料金は1店舗ごと・初期費用0円・1か月無料。キャンペーン期間中のお申し込みは、契約が続くかぎりキャンペーン価格のまま（予告なく終了する場合があります）。</a:t>
+            </a:r>
+            <a:endParaRPr lang="en-US" sz="1000" dirty="0"/>
+          </a:p>
+        </p:txBody>
+      </p:sp>
+      <p:sp>
+        <p:nvSpPr>
+          <p:cNvPr id="25" name="Slide Number Placeholder 0"/>
+          <p:cNvSpPr>
+            <a:spLocks noGrp="1"/>
+          </p:cNvSpPr>
+          <p:nvPr>
+            <p:ph type="sldNum" sz="quarter" idx="4294967295"/>
+          </p:nvPr>
+        </p:nvSpPr>
+        <p:spPr>
+          <a:xfrm>
+            <a:off x="548640" y="6309360"/>
+            <a:ext cx="548640" cy="274320"/>
+          </a:xfrm>
+          <a:prstGeom prst="rect">
+            <a:avLst/>
+          </a:prstGeom>
+          <a:extLst>
+            <a:ext uri="{C572A759-6A51-4108-AA02-DFA0A04FC94B}">
+              <ma14:wrappingTextBoxFlag xmlns:ma14="http://schemas.microsoft.com/office/mac/drawingml/2011/main" val="0"/>
+            </a:ext>
+          </a:extLst>
+        </p:spPr>
+        <p:txBody>
+          <a:bodyPr/>
+          <a:lstStyle>
+            <a:lvl1pPr>
+              <a:defRPr sz="1000">
+                <a:solidFill>
+                  <a:srgbClr val="4A5878"/>
+                </a:solidFill>
+                <a:latin typeface="Yu Gothic"/>
+                <a:ea typeface="Yu Gothic"/>
+                <a:cs typeface="Yu Gothic"/>
+              </a:defRPr>
+            </a:lvl1pPr>
+          </a:lstStyle>
+          <a:p>
+            <a:pPr algn="l"/>
+            <a:fld id="{F7021451-1387-4CA6-816F-3879F97B5CBC}" type="slidenum">
+              <a:rPr b="0" lang="en-US"/>
+              <a:t>16</a:t>
+            </a:fld>
+            <a:endParaRPr lang="en-US"/>
+          </a:p>
+        </p:txBody>
+      </p:sp>
+    </p:spTree>
+  </p:cSld>
+  <p:clrMapOvr>
+    <a:masterClrMapping/>
+  </p:clrMapOvr>
+</p:sld>
+</file>
+
+<file path=ppt/slides/slide17.xml><?xml version="1.0" encoding="utf-8"?>
+<p:sld xmlns:a="http://schemas.openxmlformats.org/drawingml/2006/main" xmlns:r="http://schemas.openxmlformats.org/officeDocument/2006/relationships" xmlns:p="http://schemas.openxmlformats.org/presentationml/2006/main">
+  <p:cSld name="Slide 17">
+    <p:spTree>
+      <p:nvGrpSpPr>
+        <p:cNvPr id="1" name=""/>
+        <p:cNvGrpSpPr/>
+        <p:nvPr/>
+      </p:nvGrpSpPr>
+      <p:grpSpPr>
+        <a:xfrm>
+          <a:off x="0" y="0"/>
+          <a:ext cx="0" cy="0"/>
+          <a:chOff x="0" y="0"/>
+          <a:chExt cx="0" cy="0"/>
+        </a:xfrm>
+      </p:grpSpPr>
+      <p:sp>
+        <p:nvSpPr>
+          <p:cNvPr id="2" name="Text 0"/>
+          <p:cNvSpPr/>
+          <p:nvPr>
+            <p:ph idx="100" type="title" hasCustomPrompt="1"/>
+          </p:nvPr>
+        </p:nvSpPr>
+        <p:spPr>
+          <a:xfrm>
+            <a:off x="548640" y="365760"/>
+            <a:ext cx="11064240" cy="822960"/>
+          </a:xfrm>
+          <a:prstGeom prst="rect">
+            <a:avLst/>
+          </a:prstGeom>
+          <a:noFill/>
+          <a:ln/>
+        </p:spPr>
+        <p:txBody>
+          <a:bodyPr wrap="square" lIns="0" tIns="0" rIns="0" bIns="0" rtlCol="0" anchor="ctr"/>
+          <a:lstStyle/>
+          <a:p>
+            <a:pPr indent="0" marL="0">
+              <a:buNone/>
+            </a:pPr>
+            <a:r>
+              <a:rPr lang="en-US" sz="3000" b="1" dirty="0">
+                <a:solidFill>
+                  <a:srgbClr val="13234A"/>
+                </a:solidFill>
+                <a:latin typeface="Yu Gothic" pitchFamily="34" charset="0"/>
+                <a:ea typeface="Yu Gothic" pitchFamily="34" charset="-122"/>
+                <a:cs typeface="Yu Gothic" pitchFamily="34" charset="-120"/>
+              </a:rPr>
               <a:t>いま始めると</a:t>
             </a:r>
             <a:endParaRPr lang="en-US" sz="3000" dirty="0"/>
@@ -4131,7 +8816,7 @@
             <a:pPr algn="l"/>
             <a:fld id="{F7021451-1387-4CA6-816F-3879F97B5CBC}" type="slidenum">
               <a:rPr b="0" lang="en-US"/>
-              <a:t>11</a:t>
+              <a:t>17</a:t>
             </a:fld>
             <a:endParaRPr lang="en-US"/>
           </a:p>
@@ -4145,9 +8830,9 @@
 </p:sld>
 </file>
 
-<file path=ppt/slides/slide12.xml><?xml version="1.0" encoding="utf-8"?>
+<file path=ppt/slides/slide18.xml><?xml version="1.0" encoding="utf-8"?>
 <p:sld xmlns:a="http://schemas.openxmlformats.org/drawingml/2006/main" xmlns:r="http://schemas.openxmlformats.org/officeDocument/2006/relationships" xmlns:p="http://schemas.openxmlformats.org/presentationml/2006/main">
-  <p:cSld name="Slide 12">
+  <p:cSld name="Slide 18">
     <p:spTree>
       <p:nvGrpSpPr>
         <p:cNvPr id="1" name=""/>

--- a/docs/posupos-sales/posupos-teian.pptx
+++ b/docs/posupos-sales/posupos-teian.pptx
@@ -2880,7 +2880,7 @@
                 <a:ea typeface="Yu Gothic" pitchFamily="34" charset="-122"/>
                 <a:cs typeface="Yu Gothic" pitchFamily="34" charset="-120"/>
               </a:rPr>
-              <a:t>AIが一次面接をして、お店の面接は30秒〜1分。</a:t>
+              <a:t>AIが一次面接をして、お店は1分の録画を見るだけ。</a:t>
             </a:r>
             <a:endParaRPr lang="en-US" sz="1800" dirty="0"/>
           </a:p>
@@ -10832,7 +10832,7 @@
                 <a:ea typeface="Yu Gothic" pitchFamily="34" charset="-122"/>
                 <a:cs typeface="Yu Gothic" pitchFamily="34" charset="-120"/>
               </a:rPr>
-              <a:t>お店の面接：1人30秒〜1分</a:t>
+              <a:t>お店が見る録画：1人1分ほど</a:t>
             </a:r>
             <a:endParaRPr lang="en-US" sz="1600" dirty="0"/>
           </a:p>
@@ -10930,7 +10930,7 @@
                 <a:ea typeface="Yu Gothic" pitchFamily="34" charset="-122"/>
                 <a:cs typeface="Yu Gothic" pitchFamily="34" charset="-120"/>
               </a:rPr>
-              <a:t>説明のための架空の例です（応募10人・ドタキャン3人の場合）。応募者がAIと話す時間（10〜15分）は、お店の時間には入りません。</a:t>
+              <a:t>説明のための架空の例です（応募10人・ドタキャン3人の場合）。応募者が答える時間（選ぶ1分＋話す1分ほど）は、お店の時間には入りません。</a:t>
             </a:r>
             <a:endParaRPr lang="en-US" sz="1000" dirty="0"/>
           </a:p>
@@ -11474,7 +11474,7 @@
                 <a:ea typeface="Yu Gothic" pitchFamily="34" charset="-122"/>
                 <a:cs typeface="Yu Gothic" pitchFamily="34" charset="-120"/>
               </a:rPr>
-              <a:t>入れる日・時間、話し方、雰囲気を体入の前に確認。体入してもらう人をしぼれるので、合わない人の体入費が減ります。</a:t>
+              <a:t>出勤できる日・時間をボタンで、話している姿を1分の録画で、体入の前に確認。体入してもらう人をしぼれるので、合わない人の体入費が減ります。</a:t>
             </a:r>
             <a:endParaRPr lang="en-US" sz="1550" dirty="0"/>
           </a:p>
@@ -11641,12 +11641,12 @@
         </p:nvSpPr>
         <p:spPr>
           <a:xfrm>
-            <a:off x="539496" y="1453896"/>
-            <a:ext cx="5047488" cy="4178808"/>
+            <a:off x="630936" y="1545336"/>
+            <a:ext cx="2487168" cy="3749040"/>
           </a:xfrm>
           <a:prstGeom prst="roundRect">
             <a:avLst>
-              <a:gd name="adj" fmla="val 2188"/>
+              <a:gd name="adj" fmla="val 3676"/>
             </a:avLst>
           </a:prstGeom>
           <a:solidFill>
@@ -11669,7 +11669,7 @@
       </p:sp>
       <p:pic>
         <p:nvPicPr>
-          <p:cNvPr id="4" name="Image 0" descr="/tmp/claude-0/-home-user-GACHICAREERAI/b3a26714-2895-56f0-b4c8-705422406677/scratchpad/deck/pos-ai-interview-night.png">    </p:cNvPr>
+          <p:cNvPr id="4" name="Image 0" descr="/tmp/claude-0/-home-user-GACHICAREERAI/b3a26714-2895-56f0-b4c8-705422406677/scratchpad/deck/pos-ai-choose.png">    </p:cNvPr>
           <p:cNvPicPr>
             <a:picLocks noChangeAspect="1"/>
           </p:cNvPicPr>
@@ -11683,8 +11683,8 @@
         </p:blipFill>
         <p:spPr>
           <a:xfrm>
-            <a:off x="594360" y="1508760"/>
-            <a:ext cx="4937760" cy="4069080"/>
+            <a:off x="685800" y="1600200"/>
+            <a:ext cx="2377440" cy="3639312"/>
           </a:xfrm>
           <a:prstGeom prst="rect">
             <a:avLst/>
@@ -11699,12 +11699,12 @@
         </p:nvSpPr>
         <p:spPr>
           <a:xfrm>
-            <a:off x="5980176" y="1453896"/>
-            <a:ext cx="5641848" cy="3950208"/>
+            <a:off x="3236976" y="1545336"/>
+            <a:ext cx="2377440" cy="3749040"/>
           </a:xfrm>
           <a:prstGeom prst="roundRect">
             <a:avLst>
-              <a:gd name="adj" fmla="val 2315"/>
+              <a:gd name="adj" fmla="val 3846"/>
             </a:avLst>
           </a:prstGeom>
           <a:solidFill>
@@ -11727,7 +11727,7 @@
       </p:sp>
       <p:pic>
         <p:nvPicPr>
-          <p:cNvPr id="6" name="Image 1" descr="/tmp/claude-0/-home-user-GACHICAREERAI/b3a26714-2895-56f0-b4c8-705422406677/scratchpad/deck/pos-ai-result-day.png">    </p:cNvPr>
+          <p:cNvPr id="6" name="Image 1" descr="/tmp/claude-0/-home-user-GACHICAREERAI/b3a26714-2895-56f0-b4c8-705422406677/scratchpad/deck/pos-ai-talk-night.png">    </p:cNvPr>
           <p:cNvPicPr>
             <a:picLocks noChangeAspect="1"/>
           </p:cNvPicPr>
@@ -11741,8 +11741,8 @@
         </p:blipFill>
         <p:spPr>
           <a:xfrm>
-            <a:off x="6035040" y="1508760"/>
-            <a:ext cx="5532120" cy="3840480"/>
+            <a:off x="3291840" y="1600200"/>
+            <a:ext cx="2267712" cy="3639312"/>
           </a:xfrm>
           <a:prstGeom prst="rect">
             <a:avLst/>
@@ -11751,7 +11751,104 @@
       </p:pic>
       <p:sp>
         <p:nvSpPr>
-          <p:cNvPr id="7" name="Text 3"/>
+          <p:cNvPr id="7" name="Shape 3"/>
+          <p:cNvSpPr/>
+          <p:nvPr/>
+        </p:nvSpPr>
+        <p:spPr>
+          <a:xfrm>
+            <a:off x="5843016" y="1773936"/>
+            <a:ext cx="5779008" cy="3502152"/>
+          </a:xfrm>
+          <a:prstGeom prst="roundRect">
+            <a:avLst>
+              <a:gd name="adj" fmla="val 2611"/>
+            </a:avLst>
+          </a:prstGeom>
+          <a:solidFill>
+            <a:srgbClr val="FFFFFF"/>
+          </a:solidFill>
+          <a:ln w="12700">
+            <a:solidFill>
+              <a:srgbClr val="DCE4F2"/>
+            </a:solidFill>
+            <a:prstDash val="solid"/>
+          </a:ln>
+          <a:effectLst>
+            <a:outerShdw sx="100000" sy="100000" kx="0" ky="0" algn="bl" rotWithShape="0" blurRad="127000" dist="50800" dir="5400000">
+              <a:srgbClr val="13234A">
+                <a:alpha val="15000"/>
+              </a:srgbClr>
+            </a:outerShdw>
+          </a:effectLst>
+        </p:spPr>
+      </p:sp>
+      <p:pic>
+        <p:nvPicPr>
+          <p:cNvPr id="8" name="Image 2" descr="/tmp/claude-0/-home-user-GACHICAREERAI/b3a26714-2895-56f0-b4c8-705422406677/scratchpad/deck/pos-ai-result-night.png">    </p:cNvPr>
+          <p:cNvPicPr>
+            <a:picLocks noChangeAspect="1"/>
+          </p:cNvPicPr>
+          <p:nvPr/>
+        </p:nvPicPr>
+        <p:blipFill>
+          <a:blip r:embed="rId3"/>
+          <a:stretch>
+            <a:fillRect/>
+          </a:stretch>
+        </p:blipFill>
+        <p:spPr>
+          <a:xfrm>
+            <a:off x="5897880" y="1828800"/>
+            <a:ext cx="5669280" cy="3392424"/>
+          </a:xfrm>
+          <a:prstGeom prst="rect">
+            <a:avLst/>
+          </a:prstGeom>
+        </p:spPr>
+      </p:pic>
+      <p:sp>
+        <p:nvSpPr>
+          <p:cNvPr id="9" name="Text 4"/>
+          <p:cNvSpPr txBox="1"/>
+          <p:nvPr/>
+        </p:nvSpPr>
+        <p:spPr>
+          <a:xfrm>
+            <a:off x="685800" y="5394960"/>
+            <a:ext cx="10881360" cy="457200"/>
+          </a:xfrm>
+          <a:prstGeom prst="rect">
+            <a:avLst/>
+          </a:prstGeom>
+          <a:noFill/>
+          <a:ln/>
+        </p:spPr>
+        <p:txBody>
+          <a:bodyPr wrap="square" lIns="0" tIns="0" rIns="0" bIns="0" rtlCol="0" anchor="t"/>
+          <a:lstStyle/>
+          <a:p>
+            <a:pPr indent="0" marL="0">
+              <a:buNone/>
+            </a:pPr>
+            <a:r>
+              <a:rPr lang="en-US" sz="1800" b="1" dirty="0">
+                <a:solidFill>
+                  <a:srgbClr val="1557D6"/>
+                </a:solidFill>
+                <a:latin typeface="Yu Gothic" pitchFamily="34" charset="0"/>
+                <a:ea typeface="Yu Gothic" pitchFamily="34" charset="-122"/>
+                <a:cs typeface="Yu Gothic" pitchFamily="34" charset="-120"/>
+              </a:rPr>
+              <a:t>選ぶ → 話す → 届く</a:t>
+            </a:r>
+            <a:endParaRPr lang="en-US" sz="1800" dirty="0"/>
+          </a:p>
+        </p:txBody>
+      </p:sp>
+      <p:sp>
+        <p:nvSpPr>
+          <p:cNvPr id="10" name="Text 5"/>
           <p:cNvSpPr txBox="1"/>
           <p:nvPr/>
         </p:nvSpPr>
@@ -11989,7 +12086,7 @@
                 <a:ea typeface="Yu Gothic" pitchFamily="34" charset="-122"/>
                 <a:cs typeface="Yu Gothic" pitchFamily="34" charset="-120"/>
               </a:rPr>
-              <a:t>お店の面接</a:t>
+              <a:t>お店が見るのは</a:t>
             </a:r>
             <a:endParaRPr lang="en-US" sz="1200" dirty="0"/>
           </a:p>
@@ -12020,7 +12117,7 @@
               <a:buNone/>
             </a:pPr>
             <a:r>
-              <a:rPr lang="en-US" sz="2000" b="1" dirty="0">
+              <a:rPr lang="en-US" sz="2400" b="1" dirty="0">
                 <a:solidFill>
                   <a:srgbClr val="FFE58A"/>
                 </a:solidFill>
@@ -12028,9 +12125,9 @@
                 <a:ea typeface="Yu Gothic" pitchFamily="34" charset="-122"/>
                 <a:cs typeface="Yu Gothic" pitchFamily="34" charset="-120"/>
               </a:rPr>
-              <a:t>30秒〜1分</a:t>
-            </a:r>
-            <a:endParaRPr lang="en-US" sz="2000" dirty="0"/>
+              <a:t>1分の録画</a:t>
+            </a:r>
+            <a:endParaRPr lang="en-US" sz="2400" dirty="0"/>
           </a:p>
         </p:txBody>
       </p:sp>
@@ -12070,7 +12167,7 @@
                 <a:ea typeface="Yu Gothic" pitchFamily="34" charset="-122"/>
                 <a:cs typeface="Yu Gothic" pitchFamily="34" charset="-120"/>
               </a:rPr>
-              <a:t>届いたまとめ・録画・会話を見て決めるだけ。対面の面接はいりません</a:t>
+              <a:t>届いた録画と選んだ答えを見て決めるだけ。対面の面接はいりません</a:t>
             </a:r>
             <a:endParaRPr lang="en-US" sz="1400" dirty="0"/>
           </a:p>
@@ -12418,7 +12515,7 @@
                 <a:ea typeface="Yu Gothic" pitchFamily="34" charset="-122"/>
                 <a:cs typeface="Yu Gothic" pitchFamily="34" charset="-120"/>
               </a:rPr>
-              <a:t>受け終わると、まとめ・入れる日と時間・写真・録画・会話が届きます</a:t>
+              <a:t>受け終わると、録画・写真・選んだ答えの一覧・話し方の雰囲気のまとめが届きます</a:t>
             </a:r>
             <a:endParaRPr lang="en-US" sz="1400" dirty="0"/>
           </a:p>
@@ -12805,7 +12902,7 @@
                 <a:ea typeface="Yu Gothic" pitchFamily="34" charset="-122"/>
                 <a:cs typeface="Yu Gothic" pitchFamily="34" charset="-120"/>
               </a:rPr>
-              <a:t>応募者がAIと話す時間は10〜15分です。AIは合否を決めません。採用はお店が決めます。</a:t>
+              <a:t>応募者は、ボタンで選ぶのに1分ほど・AIと話すのが1分ほど。AIは合否を決めません。採用はお店が決めます。</a:t>
             </a:r>
             <a:endParaRPr lang="en-US" sz="1000" dirty="0"/>
           </a:p>
@@ -13689,7 +13786,7 @@
                           <a:ea typeface="Yu Gothic" pitchFamily="34" charset="-122"/>
                           <a:cs typeface="Yu Gothic" pitchFamily="34" charset="-120"/>
                         </a:rPr>
-                        <a:t>AIが受け持つ。お店は30秒〜1分</a:t>
+                        <a:t>選ぶ質問＋1分の録画。お店は見るだけ</a:t>
                       </a:r>
                       <a:endParaRPr lang="en-US" sz="1600" dirty="0">
                         <a:latin typeface="Yu Gothic" charset="0"/>
@@ -14083,7 +14180,7 @@
                           <a:ea typeface="Yu Gothic" pitchFamily="34" charset="-122"/>
                           <a:cs typeface="Yu Gothic" pitchFamily="34" charset="-120"/>
                         </a:rPr>
-                        <a:t>全員に同じ質問・録画と会話で比べる</a:t>
+                        <a:t>全員同じボタンの答えと録画で比べる</a:t>
                       </a:r>
                       <a:endParaRPr lang="en-US" sz="1600" dirty="0">
                         <a:latin typeface="Yu Gothic" charset="0"/>
@@ -14258,12 +14355,12 @@
         </p:nvSpPr>
         <p:spPr>
           <a:xfrm>
-            <a:off x="6391656" y="1499616"/>
-            <a:ext cx="5230368" cy="3675888"/>
+            <a:off x="6391656" y="1682496"/>
+            <a:ext cx="5230368" cy="3172968"/>
           </a:xfrm>
           <a:prstGeom prst="roundRect">
             <a:avLst>
-              <a:gd name="adj" fmla="val 2488"/>
+              <a:gd name="adj" fmla="val 2882"/>
             </a:avLst>
           </a:prstGeom>
           <a:solidFill>
@@ -14300,8 +14397,8 @@
         </p:blipFill>
         <p:spPr>
           <a:xfrm>
-            <a:off x="6446520" y="1554480"/>
-            <a:ext cx="5120640" cy="3566160"/>
+            <a:off x="6446520" y="1737360"/>
+            <a:ext cx="5120640" cy="3063240"/>
           </a:xfrm>
           <a:prstGeom prst="rect">
             <a:avLst/>
@@ -14368,7 +14465,7 @@
                 <a:ea typeface="Yu Gothic" pitchFamily="34" charset="-122"/>
                 <a:cs typeface="Yu Gothic" pitchFamily="34" charset="-120"/>
               </a:rPr>
-              <a:t>お店の基準で聞ける</a:t>
+              <a:t>条件が一覧でわかる</a:t>
             </a:r>
             <a:endParaRPr lang="en-US" sz="1700" dirty="0"/>
           </a:p>
@@ -14410,7 +14507,7 @@
                 <a:ea typeface="Yu Gothic" pitchFamily="34" charset="-122"/>
                 <a:cs typeface="Yu Gothic" pitchFamily="34" charset="-120"/>
               </a:rPr>
-              <a:t>ほしい人の条件に合わせた質問を10個まで足せます。「いつもの質問」に保存すれば毎回そのまま。</a:t>
+              <a:t>出勤日数・曜日・時間帯・勤務開始・通勤・経験を、全員が同じボタンで答えます。選んだ答えが一覧で届きます。</a:t>
             </a:r>
             <a:endParaRPr lang="en-US" sz="1350" dirty="0"/>
           </a:p>
@@ -14476,7 +14573,7 @@
                 <a:ea typeface="Yu Gothic" pitchFamily="34" charset="-122"/>
                 <a:cs typeface="Yu Gothic" pitchFamily="34" charset="-120"/>
               </a:rPr>
-              <a:t>全員に同じ質問で、比べやすい</a:t>
+              <a:t>お店の質問も聞ける</a:t>
             </a:r>
             <a:endParaRPr lang="en-US" sz="1700" dirty="0"/>
           </a:p>
@@ -14518,7 +14615,7 @@
                 <a:ea typeface="Yu Gothic" pitchFamily="34" charset="-122"/>
                 <a:cs typeface="Yu Gothic" pitchFamily="34" charset="-120"/>
               </a:rPr>
-              <a:t>職種の質問のあとに、お店の質問を全部聞きます。面接する人による聞きもれがありません。</a:t>
+              <a:t>お店から聞きたいことを3つまで。AIの面接官が会話の中で聞きます。</a:t>
             </a:r>
             <a:endParaRPr lang="en-US" sz="1350" dirty="0"/>
           </a:p>
@@ -14584,7 +14681,7 @@
                 <a:ea typeface="Yu Gothic" pitchFamily="34" charset="-122"/>
                 <a:cs typeface="Yu Gothic" pitchFamily="34" charset="-120"/>
               </a:rPr>
-              <a:t>答え方と雰囲気まで見える</a:t>
+              <a:t>話している姿が見える</a:t>
             </a:r>
             <a:endParaRPr lang="en-US" sz="1700" dirty="0"/>
           </a:p>
@@ -14626,7 +14723,7 @@
                 <a:ea typeface="Yu Gothic" pitchFamily="34" charset="-122"/>
                 <a:cs typeface="Yu Gothic" pitchFamily="34" charset="-120"/>
               </a:rPr>
-              <a:t>入れる日と時間・気になった点のまとめ、写真・はじめの1分の録画・会話の全部。</a:t>
+              <a:t>自己紹介とやってみたい理由を話す姿の録画と顔の写真。雰囲気・話し方・表情がわかります。</a:t>
             </a:r>
             <a:endParaRPr lang="en-US" sz="1350" dirty="0"/>
           </a:p>
@@ -14640,7 +14737,7 @@
         </p:nvSpPr>
         <p:spPr>
           <a:xfrm>
-            <a:off x="6446520" y="5257800"/>
+            <a:off x="6446520" y="4937760"/>
             <a:ext cx="5120640" cy="274320"/>
           </a:xfrm>
           <a:prstGeom prst="rect">
@@ -14704,7 +14801,7 @@
                 <a:ea typeface="Yu Gothic" pitchFamily="34" charset="-122"/>
                 <a:cs typeface="Yu Gothic" pitchFamily="34" charset="-120"/>
               </a:rPr>
-              <a:t>AIは合否を決めません。届いた内容を見て、会うかどうか・採用するかどうかはお店が決めます。</a:t>
+              <a:t>AIは合否を決めません。見た目についてもAIは何も言いません。録画と写真を見て、お店が決めます。</a:t>
             </a:r>
             <a:endParaRPr lang="en-US" sz="1000" dirty="0"/>
           </a:p>

--- a/docs/posupos-sales/posupos-teian.pptx
+++ b/docs/posupos-sales/posupos-teian.pptx
@@ -7771,7 +7771,7 @@
                 <a:ea typeface="Yu Gothic" pitchFamily="34" charset="-122"/>
                 <a:cs typeface="Yu Gothic" pitchFamily="34" charset="-120"/>
               </a:rPr>
-              <a:t>通常 昼33,000円／夜40,000円</a:t>
+              <a:t>今申し込んだお店は、ずっとこの価格</a:t>
             </a:r>
             <a:endParaRPr lang="en-US" sz="1100" dirty="0"/>
           </a:p>

--- a/docs/posupos-sales/posupos-teian.pptx
+++ b/docs/posupos-sales/posupos-teian.pptx
@@ -7294,24 +7294,24 @@
         </p:nvSpPr>
         <p:spPr>
           <a:xfrm>
-            <a:off x="822960" y="2560320"/>
-            <a:ext cx="2971800" cy="548640"/>
-          </a:xfrm>
-          <a:prstGeom prst="rect">
-            <a:avLst/>
-          </a:prstGeom>
-          <a:noFill/>
-          <a:ln/>
-        </p:spPr>
-        <p:txBody>
-          <a:bodyPr wrap="square" lIns="0" tIns="0" rIns="0" bIns="0" rtlCol="0" anchor="ctr"/>
-          <a:lstStyle/>
-          <a:p>
-            <a:pPr indent="0" marL="0">
-              <a:buNone/>
-            </a:pPr>
-            <a:r>
-              <a:rPr lang="en-US" sz="1300" dirty="0">
+            <a:off x="822960" y="2651760"/>
+            <a:ext cx="2971800" cy="457200"/>
+          </a:xfrm>
+          <a:prstGeom prst="rect">
+            <a:avLst/>
+          </a:prstGeom>
+          <a:noFill/>
+          <a:ln/>
+        </p:spPr>
+        <p:txBody>
+          <a:bodyPr wrap="square" lIns="0" tIns="0" rIns="0" bIns="0" rtlCol="0" anchor="t"/>
+          <a:lstStyle/>
+          <a:p>
+            <a:pPr indent="0" marL="0">
+              <a:buNone/>
+            </a:pPr>
+            <a:r>
+              <a:rPr lang="en-US" sz="1500" b="1" dirty="0">
                 <a:solidFill>
                   <a:srgbClr val="13234A"/>
                 </a:solidFill>
@@ -7319,35 +7319,7 @@
                 <a:ea typeface="Yu Gothic" pitchFamily="34" charset="-122"/>
                 <a:cs typeface="Yu Gothic" pitchFamily="34" charset="-120"/>
               </a:rPr>
-              <a:t>月額 </a:t>
-            </a:r>
-            <a:pPr indent="0" marL="0">
-              <a:buNone/>
-            </a:pPr>
-            <a:r>
-              <a:rPr lang="en-US" sz="2400" b="1" dirty="0">
-                <a:solidFill>
-                  <a:srgbClr val="13234A"/>
-                </a:solidFill>
-                <a:latin typeface="Yu Gothic" pitchFamily="34" charset="0"/>
-                <a:ea typeface="Yu Gothic" pitchFamily="34" charset="-122"/>
-                <a:cs typeface="Yu Gothic" pitchFamily="34" charset="-120"/>
-              </a:rPr>
-              <a:t>11,000円</a:t>
-            </a:r>
-            <a:pPr indent="0" marL="0">
-              <a:buNone/>
-            </a:pPr>
-            <a:r>
-              <a:rPr lang="en-US" sz="1100" dirty="0">
-                <a:solidFill>
-                  <a:srgbClr val="13234A"/>
-                </a:solidFill>
-                <a:latin typeface="Yu Gothic" pitchFamily="34" charset="0"/>
-                <a:ea typeface="Yu Gothic" pitchFamily="34" charset="-122"/>
-                <a:cs typeface="Yu Gothic" pitchFamily="34" charset="-120"/>
-              </a:rPr>
-              <a:t>（税込）</a:t>
+              <a:t>料金：お見積もり（1店舗ごと）</a:t>
             </a:r>
             <a:endParaRPr lang="en-US" sz="1500" dirty="0"/>
           </a:p>
@@ -7361,8 +7333,8 @@
         </p:nvSpPr>
         <p:spPr>
           <a:xfrm>
-            <a:off x="822960" y="3794760"/>
-            <a:ext cx="2971800" cy="1828800"/>
+            <a:off x="822960" y="3337560"/>
+            <a:ext cx="2971800" cy="2194560"/>
           </a:xfrm>
           <a:prstGeom prst="rect">
             <a:avLst/>
@@ -7553,7 +7525,7 @@
                 <a:ea typeface="Yu Gothic" pitchFamily="34" charset="-122"/>
                 <a:cs typeface="Yu Gothic" pitchFamily="34" charset="-120"/>
               </a:rPr>
-              <a:t>キャンペーン価格・おすすめ</a:t>
+              <a:t>おすすめ</a:t>
             </a:r>
             <a:endParaRPr lang="en-US" sz="1200" dirty="0"/>
           </a:p>
@@ -7645,8 +7617,8 @@
         </p:nvSpPr>
         <p:spPr>
           <a:xfrm>
-            <a:off x="4599432" y="2514600"/>
-            <a:ext cx="2971800" cy="274320"/>
+            <a:off x="4599432" y="2651760"/>
+            <a:ext cx="2971800" cy="457200"/>
           </a:xfrm>
           <a:prstGeom prst="rect">
             <a:avLst/>
@@ -7662,17 +7634,17 @@
               <a:buNone/>
             </a:pPr>
             <a:r>
-              <a:rPr lang="en-US" sz="1200" dirty="0">
-                <a:solidFill>
-                  <a:srgbClr val="4A5878"/>
-                </a:solidFill>
-                <a:latin typeface="Yu Gothic" pitchFamily="34" charset="0"/>
-                <a:ea typeface="Yu Gothic" pitchFamily="34" charset="-122"/>
-                <a:cs typeface="Yu Gothic" pitchFamily="34" charset="-120"/>
-              </a:rPr>
-              <a:t>月額（税込）</a:t>
-            </a:r>
-            <a:endParaRPr lang="en-US" sz="1200" dirty="0"/>
+              <a:rPr lang="en-US" sz="1500" b="1" dirty="0">
+                <a:solidFill>
+                  <a:srgbClr val="1557D6"/>
+                </a:solidFill>
+                <a:latin typeface="Yu Gothic" pitchFamily="34" charset="0"/>
+                <a:ea typeface="Yu Gothic" pitchFamily="34" charset="-122"/>
+                <a:cs typeface="Yu Gothic" pitchFamily="34" charset="-120"/>
+              </a:rPr>
+              <a:t>料金：お見積もり（1店舗ごと）</a:t>
+            </a:r>
+            <a:endParaRPr lang="en-US" sz="1500" dirty="0"/>
           </a:p>
         </p:txBody>
       </p:sp>
@@ -7684,109 +7656,8 @@
         </p:nvSpPr>
         <p:spPr>
           <a:xfrm>
-            <a:off x="4599432" y="2743200"/>
-            <a:ext cx="2971800" cy="685800"/>
-          </a:xfrm>
-          <a:prstGeom prst="rect">
-            <a:avLst/>
-          </a:prstGeom>
-          <a:noFill/>
-          <a:ln/>
-        </p:spPr>
-        <p:txBody>
-          <a:bodyPr wrap="square" lIns="0" tIns="0" rIns="0" bIns="0" rtlCol="0" anchor="t"/>
-          <a:lstStyle/>
-          <a:p>
-            <a:pPr indent="0" marL="0">
-              <a:lnSpc>
-                <a:spcPct val="100000"/>
-              </a:lnSpc>
-              <a:buNone/>
-            </a:pPr>
-            <a:r>
-              <a:rPr lang="en-US" sz="1900" b="1" dirty="0">
-                <a:solidFill>
-                  <a:srgbClr val="1557D6"/>
-                </a:solidFill>
-                <a:latin typeface="Yu Gothic" pitchFamily="34" charset="0"/>
-                <a:ea typeface="Yu Gothic" pitchFamily="34" charset="-122"/>
-                <a:cs typeface="Yu Gothic" pitchFamily="34" charset="-120"/>
-              </a:rPr>
-              <a:t>昼 22,000円</a:t>
-            </a:r>
-            <a:endParaRPr lang="en-US" sz="1900" dirty="0"/>
-          </a:p>
-          <a:p>
-            <a:pPr indent="0" marL="0">
-              <a:lnSpc>
-                <a:spcPct val="100000"/>
-              </a:lnSpc>
-              <a:buNone/>
-            </a:pPr>
-            <a:r>
-              <a:rPr lang="en-US" sz="1900" b="1" dirty="0">
-                <a:solidFill>
-                  <a:srgbClr val="1557D6"/>
-                </a:solidFill>
-                <a:latin typeface="Yu Gothic" pitchFamily="34" charset="0"/>
-                <a:ea typeface="Yu Gothic" pitchFamily="34" charset="-122"/>
-                <a:cs typeface="Yu Gothic" pitchFamily="34" charset="-120"/>
-              </a:rPr>
-              <a:t>夜 33,000円</a:t>
-            </a:r>
-            <a:endParaRPr lang="en-US" sz="1900" dirty="0"/>
-          </a:p>
-        </p:txBody>
-      </p:sp>
-      <p:sp>
-        <p:nvSpPr>
-          <p:cNvPr id="15" name="Text 13"/>
-          <p:cNvSpPr txBox="1"/>
-          <p:nvPr/>
-        </p:nvSpPr>
-        <p:spPr>
-          <a:xfrm>
-            <a:off x="4599432" y="3429000"/>
-            <a:ext cx="2971800" cy="274320"/>
-          </a:xfrm>
-          <a:prstGeom prst="rect">
-            <a:avLst/>
-          </a:prstGeom>
-          <a:noFill/>
-          <a:ln/>
-        </p:spPr>
-        <p:txBody>
-          <a:bodyPr wrap="square" lIns="0" tIns="0" rIns="0" bIns="0" rtlCol="0" anchor="t"/>
-          <a:lstStyle/>
-          <a:p>
-            <a:pPr indent="0" marL="0">
-              <a:buNone/>
-            </a:pPr>
-            <a:r>
-              <a:rPr lang="en-US" sz="1100" dirty="0">
-                <a:solidFill>
-                  <a:srgbClr val="4A5878"/>
-                </a:solidFill>
-                <a:latin typeface="Yu Gothic" pitchFamily="34" charset="0"/>
-                <a:ea typeface="Yu Gothic" pitchFamily="34" charset="-122"/>
-                <a:cs typeface="Yu Gothic" pitchFamily="34" charset="-120"/>
-              </a:rPr>
-              <a:t>今申し込んだお店は、ずっとこの価格</a:t>
-            </a:r>
-            <a:endParaRPr lang="en-US" sz="1100" dirty="0"/>
-          </a:p>
-        </p:txBody>
-      </p:sp>
-      <p:sp>
-        <p:nvSpPr>
-          <p:cNvPr id="16" name="Text 14"/>
-          <p:cNvSpPr txBox="1"/>
-          <p:nvPr/>
-        </p:nvSpPr>
-        <p:spPr>
-          <a:xfrm>
-            <a:off x="4599432" y="3794760"/>
-            <a:ext cx="2971800" cy="1828800"/>
+            <a:off x="4599432" y="3337560"/>
+            <a:ext cx="2971800" cy="2194560"/>
           </a:xfrm>
           <a:prstGeom prst="rect">
             <a:avLst/>
@@ -7885,7 +7756,7 @@
       </p:sp>
       <p:sp>
         <p:nvSpPr>
-          <p:cNvPr id="17" name="Shape 15"/>
+          <p:cNvPr id="15" name="Shape 13"/>
           <p:cNvSpPr/>
           <p:nvPr/>
         </p:nvSpPr>
@@ -7912,7 +7783,7 @@
       </p:sp>
       <p:sp>
         <p:nvSpPr>
-          <p:cNvPr id="18" name="Text 16"/>
+          <p:cNvPr id="16" name="Text 14"/>
           <p:cNvSpPr txBox="1"/>
           <p:nvPr/>
         </p:nvSpPr>
@@ -7951,7 +7822,7 @@
       </p:sp>
       <p:sp>
         <p:nvSpPr>
-          <p:cNvPr id="19" name="Text 17"/>
+          <p:cNvPr id="17" name="Text 15"/>
           <p:cNvSpPr txBox="1"/>
           <p:nvPr/>
         </p:nvSpPr>
@@ -7990,30 +7861,30 @@
       </p:sp>
       <p:sp>
         <p:nvSpPr>
-          <p:cNvPr id="20" name="Text 18"/>
-          <p:cNvSpPr txBox="1"/>
-          <p:nvPr/>
-        </p:nvSpPr>
-        <p:spPr>
-          <a:xfrm>
-            <a:off x="8375904" y="2560320"/>
-            <a:ext cx="2971800" cy="548640"/>
-          </a:xfrm>
-          <a:prstGeom prst="rect">
-            <a:avLst/>
-          </a:prstGeom>
-          <a:noFill/>
-          <a:ln/>
-        </p:spPr>
-        <p:txBody>
-          <a:bodyPr wrap="square" lIns="0" tIns="0" rIns="0" bIns="0" rtlCol="0" anchor="ctr"/>
-          <a:lstStyle/>
-          <a:p>
-            <a:pPr indent="0" marL="0">
-              <a:buNone/>
-            </a:pPr>
-            <a:r>
-              <a:rPr lang="en-US" sz="1300" dirty="0">
+          <p:cNvPr id="18" name="Text 16"/>
+          <p:cNvSpPr txBox="1"/>
+          <p:nvPr/>
+        </p:nvSpPr>
+        <p:spPr>
+          <a:xfrm>
+            <a:off x="8375904" y="2651760"/>
+            <a:ext cx="2971800" cy="457200"/>
+          </a:xfrm>
+          <a:prstGeom prst="rect">
+            <a:avLst/>
+          </a:prstGeom>
+          <a:noFill/>
+          <a:ln/>
+        </p:spPr>
+        <p:txBody>
+          <a:bodyPr wrap="square" lIns="0" tIns="0" rIns="0" bIns="0" rtlCol="0" anchor="t"/>
+          <a:lstStyle/>
+          <a:p>
+            <a:pPr indent="0" marL="0">
+              <a:buNone/>
+            </a:pPr>
+            <a:r>
+              <a:rPr lang="en-US" sz="1500" b="1" dirty="0">
                 <a:solidFill>
                   <a:srgbClr val="13234A"/>
                 </a:solidFill>
@@ -8021,35 +7892,7 @@
                 <a:ea typeface="Yu Gothic" pitchFamily="34" charset="-122"/>
                 <a:cs typeface="Yu Gothic" pitchFamily="34" charset="-120"/>
               </a:rPr>
-              <a:t>月額 </a:t>
-            </a:r>
-            <a:pPr indent="0" marL="0">
-              <a:buNone/>
-            </a:pPr>
-            <a:r>
-              <a:rPr lang="en-US" sz="2400" b="1" dirty="0">
-                <a:solidFill>
-                  <a:srgbClr val="13234A"/>
-                </a:solidFill>
-                <a:latin typeface="Yu Gothic" pitchFamily="34" charset="0"/>
-                <a:ea typeface="Yu Gothic" pitchFamily="34" charset="-122"/>
-                <a:cs typeface="Yu Gothic" pitchFamily="34" charset="-120"/>
-              </a:rPr>
-              <a:t>55,000円〜</a:t>
-            </a:r>
-            <a:pPr indent="0" marL="0">
-              <a:buNone/>
-            </a:pPr>
-            <a:r>
-              <a:rPr lang="en-US" sz="1100" dirty="0">
-                <a:solidFill>
-                  <a:srgbClr val="13234A"/>
-                </a:solidFill>
-                <a:latin typeface="Yu Gothic" pitchFamily="34" charset="0"/>
-                <a:ea typeface="Yu Gothic" pitchFamily="34" charset="-122"/>
-                <a:cs typeface="Yu Gothic" pitchFamily="34" charset="-120"/>
-              </a:rPr>
-              <a:t>（税込）</a:t>
+              <a:t>料金：お見積もり（1店舗ごと）</a:t>
             </a:r>
             <a:endParaRPr lang="en-US" sz="1500" dirty="0"/>
           </a:p>
@@ -8057,14 +7900,14 @@
       </p:sp>
       <p:sp>
         <p:nvSpPr>
-          <p:cNvPr id="21" name="Text 19"/>
-          <p:cNvSpPr txBox="1"/>
-          <p:nvPr/>
-        </p:nvSpPr>
-        <p:spPr>
-          <a:xfrm>
-            <a:off x="8375904" y="3794760"/>
-            <a:ext cx="2971800" cy="1828800"/>
+          <p:cNvPr id="19" name="Text 17"/>
+          <p:cNvSpPr txBox="1"/>
+          <p:nvPr/>
+        </p:nvSpPr>
+        <p:spPr>
+          <a:xfrm>
+            <a:off x="8375904" y="3337560"/>
+            <a:ext cx="2971800" cy="2194560"/>
           </a:xfrm>
           <a:prstGeom prst="rect">
             <a:avLst/>
@@ -8163,7 +8006,7 @@
       </p:sp>
       <p:sp>
         <p:nvSpPr>
-          <p:cNvPr id="22" name="Text 20"/>
+          <p:cNvPr id="20" name="Text 18"/>
           <p:cNvSpPr txBox="1"/>
           <p:nvPr/>
         </p:nvSpPr>
@@ -8194,7 +8037,7 @@
                 <a:ea typeface="Yu Gothic" pitchFamily="34" charset="-122"/>
                 <a:cs typeface="Yu Gothic" pitchFamily="34" charset="-120"/>
               </a:rPr>
-              <a:t>料金は1店舗ごと・初期費用0円・1か月無料。キャンペーン期間中のお申し込みは、契約が続くかぎりキャンペーン価格のまま（予告なく終了する場合があります）。</a:t>
+              <a:t>料金は1店舗ごとに、お店に合わせてお見積もりします。0円から始められます（※ プランによって、最初の1か月を無料でお試しいただけます）。</a:t>
             </a:r>
             <a:endParaRPr lang="en-US" sz="1000" dirty="0"/>
           </a:p>
@@ -8308,7 +8151,7 @@
                 <a:ea typeface="Yu Gothic" pitchFamily="34" charset="-122"/>
                 <a:cs typeface="Yu Gothic" pitchFamily="34" charset="-120"/>
               </a:rPr>
-              <a:t>いま始めると</a:t>
+              <a:t>はじめやすい理由</a:t>
             </a:r>
             <a:endParaRPr lang="en-US" sz="3000" dirty="0"/>
           </a:p>
@@ -8381,7 +8224,7 @@
                 <a:ea typeface="Yu Gothic" pitchFamily="34" charset="-122"/>
                 <a:cs typeface="Yu Gothic" pitchFamily="34" charset="-120"/>
               </a:rPr>
-              <a:t>ずっとキャンペーン価格</a:t>
+              <a:t>0円から始められる</a:t>
             </a:r>
             <a:endParaRPr lang="en-US" sz="1700" dirty="0"/>
           </a:p>
@@ -8423,7 +8266,7 @@
                 <a:ea typeface="Yu Gothic" pitchFamily="34" charset="-122"/>
                 <a:cs typeface="Yu Gothic" pitchFamily="34" charset="-120"/>
               </a:rPr>
-              <a:t>キャンペーン期間中のお申し込みは、契約が続くかぎりキャンペーン価格のまま（予告なく終了する場合があります）。</a:t>
+              <a:t>プランによって、最初の1か月は無料。カードを登録しなければ、お試しのあと勝手に請求されることはありません。</a:t>
             </a:r>
             <a:endParaRPr lang="en-US" sz="1400" dirty="0"/>
           </a:p>
@@ -8496,7 +8339,7 @@
                 <a:ea typeface="Yu Gothic" pitchFamily="34" charset="-122"/>
                 <a:cs typeface="Yu Gothic" pitchFamily="34" charset="-120"/>
               </a:rPr>
-              <a:t>1か月無料</a:t>
+              <a:t>今のレジと並行して使える</a:t>
             </a:r>
             <a:endParaRPr lang="en-US" sz="1700" dirty="0"/>
           </a:p>
@@ -8538,7 +8381,7 @@
                 <a:ea typeface="Yu Gothic" pitchFamily="34" charset="-122"/>
                 <a:cs typeface="Yu Gothic" pitchFamily="34" charset="-120"/>
               </a:rPr>
-              <a:t>カードを登録しなければ、お試しのあと勝手に請求されることはありません。</a:t>
+              <a:t>入れかえずに、くらべてから決められます。</a:t>
             </a:r>
             <a:endParaRPr lang="en-US" sz="1400" dirty="0"/>
           </a:p>
@@ -8611,7 +8454,7 @@
                 <a:ea typeface="Yu Gothic" pitchFamily="34" charset="-122"/>
                 <a:cs typeface="Yu Gothic" pitchFamily="34" charset="-120"/>
               </a:rPr>
-              <a:t>初期費用0円</a:t>
+              <a:t>AI面接は追加料金なし</a:t>
             </a:r>
             <a:endParaRPr lang="en-US" sz="1700" dirty="0"/>
           </a:p>
@@ -8653,7 +8496,7 @@
                 <a:ea typeface="Yu Gothic" pitchFamily="34" charset="-122"/>
                 <a:cs typeface="Yu Gothic" pitchFamily="34" charset="-120"/>
               </a:rPr>
-              <a:t>ホームページからのお申し込みは、商品・写真・スタッフの登録代行も無料。</a:t>
+              <a:t>スタンダードプランなら、次の応募からすぐAI面接を使えます。</a:t>
             </a:r>
             <a:endParaRPr lang="en-US" sz="1400" dirty="0"/>
           </a:p>
@@ -8726,7 +8569,7 @@
                 <a:ea typeface="Yu Gothic" pitchFamily="34" charset="-122"/>
                 <a:cs typeface="Yu Gothic" pitchFamily="34" charset="-120"/>
               </a:rPr>
-              <a:t>AI面接は追加料金なし</a:t>
+              <a:t>グループ店も何店舗でも</a:t>
             </a:r>
             <a:endParaRPr lang="en-US" sz="1700" dirty="0"/>
           </a:p>
@@ -8768,7 +8611,7 @@
                 <a:ea typeface="Yu Gothic" pitchFamily="34" charset="-122"/>
                 <a:cs typeface="Yu Gothic" pitchFamily="34" charset="-120"/>
               </a:rPr>
-              <a:t>スタンダードプランなら、次の応募からすぐAI面接を使えます。</a:t>
+              <a:t>料金は1店舗ごと。お店を足すのもかんたんです。</a:t>
             </a:r>
             <a:endParaRPr lang="en-US" sz="1400" dirty="0"/>
           </a:p>
@@ -9182,7 +9025,7 @@
                 <a:ea typeface="Yu Gothic" pitchFamily="34" charset="-122"/>
                 <a:cs typeface="Yu Gothic" pitchFamily="34" charset="-120"/>
               </a:rPr>
-              <a:t>登録はおまかせ</a:t>
+              <a:t>料金はお見積もり</a:t>
             </a:r>
             <a:endParaRPr lang="en-US" sz="1800" dirty="0"/>
           </a:p>
@@ -9224,7 +9067,7 @@
                 <a:ea typeface="Yu Gothic" pitchFamily="34" charset="-122"/>
                 <a:cs typeface="Yu Gothic" pitchFamily="34" charset="-120"/>
               </a:rPr>
-              <a:t>ホームページからのお申し込みは登録代行が無料。</a:t>
+              <a:t>お店の種類と店舗数から、料金をご案内します。</a:t>
             </a:r>
             <a:endParaRPr lang="en-US" sz="1400" dirty="0"/>
           </a:p>
